--- a/examples/preview/sample_paper.pptx
+++ b/examples/preview/sample_paper.pptx
@@ -15,6 +15,13 @@
     <p:sldId id="263" r:id="rId14"/>
     <p:sldId id="264" r:id="rId15"/>
     <p:sldId id="265" r:id="rId16"/>
+    <p:sldId id="266" r:id="rId17"/>
+    <p:sldId id="267" r:id="rId18"/>
+    <p:sldId id="268" r:id="rId19"/>
+    <p:sldId id="269" r:id="rId20"/>
+    <p:sldId id="270" r:id="rId21"/>
+    <p:sldId id="271" r:id="rId22"/>
+    <p:sldId id="272" r:id="rId23"/>
   </p:sldIdLst>
   <p:sldSz cx="12191695" cy="6858000" type="screen4x3"/>
   <p:notesSz cx="6858000" cy="9144000"/>
@@ -3105,11 +3112,312 @@
         </p:nvSpPr>
         <p:spPr>
           <a:xfrm>
+            <a:off x="7071183" y="0"/>
+            <a:ext cx="5120511" cy="6858000"/>
+          </a:xfrm>
+          <a:prstGeom prst="rect">
+            <a:avLst/>
+          </a:prstGeom>
+          <a:solidFill>
+            <a:srgbClr val="1F2937"/>
+          </a:solidFill>
+          <a:ln>
+            <a:noFill/>
+          </a:ln>
+          <a:effectLst/>
+        </p:spPr>
+        <p:style>
+          <a:lnRef idx="1">
+            <a:schemeClr val="accent1"/>
+          </a:lnRef>
+          <a:fillRef idx="3">
+            <a:schemeClr val="accent1"/>
+          </a:fillRef>
+          <a:effectRef idx="2">
+            <a:schemeClr val="accent1"/>
+          </a:effectRef>
+          <a:fontRef idx="minor">
+            <a:schemeClr val="lt1"/>
+          </a:fontRef>
+        </p:style>
+        <p:txBody>
+          <a:bodyPr rtlCol="0" anchor="ctr"/>
+          <a:lstStyle/>
+          <a:p>
+            <a:pPr algn="ctr"/>
+          </a:p>
+        </p:txBody>
+      </p:sp>
+      <p:sp>
+        <p:nvSpPr>
+          <p:cNvPr id="3" name="Rectangle 2"/>
+          <p:cNvSpPr/>
+          <p:nvPr/>
+        </p:nvSpPr>
+        <p:spPr>
+          <a:xfrm>
+            <a:off x="7010224" y="0"/>
+            <a:ext cx="82296" cy="6858000"/>
+          </a:xfrm>
+          <a:prstGeom prst="rect">
+            <a:avLst/>
+          </a:prstGeom>
+          <a:solidFill>
+            <a:srgbClr val="475569"/>
+          </a:solidFill>
+          <a:ln>
+            <a:noFill/>
+          </a:ln>
+          <a:effectLst/>
+        </p:spPr>
+        <p:style>
+          <a:lnRef idx="1">
+            <a:schemeClr val="accent1"/>
+          </a:lnRef>
+          <a:fillRef idx="3">
+            <a:schemeClr val="accent1"/>
+          </a:fillRef>
+          <a:effectRef idx="2">
+            <a:schemeClr val="accent1"/>
+          </a:effectRef>
+          <a:fontRef idx="minor">
+            <a:schemeClr val="lt1"/>
+          </a:fontRef>
+        </p:style>
+        <p:txBody>
+          <a:bodyPr rtlCol="0" anchor="ctr"/>
+          <a:lstStyle/>
+          <a:p>
+            <a:pPr algn="ctr"/>
+          </a:p>
+        </p:txBody>
+      </p:sp>
+      <p:sp>
+        <p:nvSpPr>
+          <p:cNvPr id="4" name="Rectangle 3"/>
+          <p:cNvSpPr/>
+          <p:nvPr/>
+        </p:nvSpPr>
+        <p:spPr>
+          <a:xfrm>
             <a:off x="0" y="0"/>
-            <a:ext cx="12191695" cy="6858000"/>
-          </a:xfrm>
-          <a:prstGeom prst="rect">
-            <a:avLst/>
+            <a:ext cx="146304" cy="6858000"/>
+          </a:xfrm>
+          <a:prstGeom prst="rect">
+            <a:avLst/>
+          </a:prstGeom>
+          <a:solidFill>
+            <a:srgbClr val="1F2937"/>
+          </a:solidFill>
+          <a:ln>
+            <a:noFill/>
+          </a:ln>
+          <a:effectLst/>
+        </p:spPr>
+        <p:style>
+          <a:lnRef idx="1">
+            <a:schemeClr val="accent1"/>
+          </a:lnRef>
+          <a:fillRef idx="3">
+            <a:schemeClr val="accent1"/>
+          </a:fillRef>
+          <a:effectRef idx="2">
+            <a:schemeClr val="accent1"/>
+          </a:effectRef>
+          <a:fontRef idx="minor">
+            <a:schemeClr val="lt1"/>
+          </a:fontRef>
+        </p:style>
+        <p:txBody>
+          <a:bodyPr rtlCol="0" anchor="ctr"/>
+          <a:lstStyle/>
+          <a:p>
+            <a:pPr algn="ctr"/>
+          </a:p>
+        </p:txBody>
+      </p:sp>
+      <p:sp>
+        <p:nvSpPr>
+          <p:cNvPr id="5" name="TextBox 4"/>
+          <p:cNvSpPr txBox="1"/>
+          <p:nvPr/>
+        </p:nvSpPr>
+        <p:spPr>
+          <a:xfrm>
+            <a:off x="868680" y="1828800"/>
+            <a:ext cx="5730096" cy="2011680"/>
+          </a:xfrm>
+          <a:prstGeom prst="rect">
+            <a:avLst/>
+          </a:prstGeom>
+          <a:noFill/>
+        </p:spPr>
+        <p:txBody>
+          <a:bodyPr wrap="square" anchor="t" lIns="54864" rIns="54864" tIns="0" bIns="0">
+            <a:spAutoFit/>
+          </a:bodyPr>
+          <a:lstStyle/>
+          <a:p>
+            <a:pPr algn="l">
+              <a:lnSpc>
+                <a:spcPct val="120000"/>
+              </a:lnSpc>
+              <a:defRPr sz="2100"/>
+            </a:pPr>
+            <a:r>
+              <a:rPr sz="2100" b="1" u="none">
+                <a:solidFill>
+                  <a:srgbClr val="1F2937"/>
+                </a:solidFill>
+                <a:latin typeface="Times New Roman"/>
+                <a:ea typeface="微软雅黑"/>
+              </a:rPr>
+              <a:t>胶州四中高三级部物理学科单元达标评测题</a:t>
+            </a:r>
+          </a:p>
+        </p:txBody>
+      </p:sp>
+      <p:sp>
+        <p:nvSpPr>
+          <p:cNvPr id="6" name="TextBox 5"/>
+          <p:cNvSpPr txBox="1"/>
+          <p:nvPr/>
+        </p:nvSpPr>
+        <p:spPr>
+          <a:xfrm>
+            <a:off x="914400" y="3611880"/>
+            <a:ext cx="5852013" cy="822960"/>
+          </a:xfrm>
+          <a:prstGeom prst="rect">
+            <a:avLst/>
+          </a:prstGeom>
+          <a:noFill/>
+        </p:spPr>
+        <p:txBody>
+          <a:bodyPr wrap="square" anchor="t" lIns="54864" rIns="54864" tIns="0" bIns="0">
+            <a:spAutoFit/>
+          </a:bodyPr>
+          <a:lstStyle/>
+          <a:p>
+            <a:pPr algn="l">
+              <a:lnSpc>
+                <a:spcPct val="130000"/>
+              </a:lnSpc>
+              <a:defRPr sz="2000"/>
+            </a:pPr>
+            <a:r>
+              <a:rPr sz="2000" b="0" u="none">
+                <a:solidFill>
+                  <a:srgbClr val="44506B"/>
+                </a:solidFill>
+                <a:latin typeface="Times New Roman"/>
+                <a:ea typeface="微软雅黑"/>
+              </a:rPr>
+              <a:t>试卷讲评</a:t>
+            </a:r>
+          </a:p>
+        </p:txBody>
+      </p:sp>
+      <p:sp>
+        <p:nvSpPr>
+          <p:cNvPr id="7" name="Rectangle 6"/>
+          <p:cNvSpPr/>
+          <p:nvPr/>
+        </p:nvSpPr>
+        <p:spPr>
+          <a:xfrm>
+            <a:off x="914400" y="4617720"/>
+            <a:ext cx="1371600" cy="38100"/>
+          </a:xfrm>
+          <a:prstGeom prst="rect">
+            <a:avLst/>
+          </a:prstGeom>
+          <a:solidFill>
+            <a:srgbClr val="475569"/>
+          </a:solidFill>
+          <a:ln>
+            <a:noFill/>
+          </a:ln>
+          <a:effectLst/>
+        </p:spPr>
+        <p:style>
+          <a:lnRef idx="1">
+            <a:schemeClr val="accent1"/>
+          </a:lnRef>
+          <a:fillRef idx="3">
+            <a:schemeClr val="accent1"/>
+          </a:fillRef>
+          <a:effectRef idx="2">
+            <a:schemeClr val="accent1"/>
+          </a:effectRef>
+          <a:fontRef idx="minor">
+            <a:schemeClr val="lt1"/>
+          </a:fontRef>
+        </p:style>
+        <p:txBody>
+          <a:bodyPr rtlCol="0" anchor="ctr"/>
+          <a:lstStyle/>
+          <a:p>
+            <a:pPr algn="ctr"/>
+          </a:p>
+        </p:txBody>
+      </p:sp>
+      <p:sp>
+        <p:nvSpPr>
+          <p:cNvPr id="8" name="TextBox 7"/>
+          <p:cNvSpPr txBox="1"/>
+          <p:nvPr/>
+        </p:nvSpPr>
+        <p:spPr>
+          <a:xfrm>
+            <a:off x="914400" y="4800600"/>
+            <a:ext cx="6095847" cy="457200"/>
+          </a:xfrm>
+          <a:prstGeom prst="rect">
+            <a:avLst/>
+          </a:prstGeom>
+          <a:noFill/>
+        </p:spPr>
+        <p:txBody>
+          <a:bodyPr wrap="square" anchor="t" lIns="54864" rIns="54864" tIns="0" bIns="0">
+            <a:spAutoFit/>
+          </a:bodyPr>
+          <a:lstStyle/>
+          <a:p>
+            <a:pPr algn="l">
+              <a:lnSpc>
+                <a:spcPct val="130000"/>
+              </a:lnSpc>
+              <a:defRPr sz="1300"/>
+            </a:pPr>
+            <a:r>
+              <a:rPr sz="1300" b="0" u="none">
+                <a:solidFill>
+                  <a:srgbClr val="7A8698"/>
+                </a:solidFill>
+                <a:latin typeface="Times New Roman"/>
+                <a:ea typeface="微软雅黑"/>
+              </a:rPr>
+              <a:t>90分钟　100分</a:t>
+            </a:r>
+          </a:p>
+        </p:txBody>
+      </p:sp>
+      <p:sp>
+        <p:nvSpPr>
+          <p:cNvPr id="9" name="Rounded Rectangle 8"/>
+          <p:cNvSpPr/>
+          <p:nvPr/>
+        </p:nvSpPr>
+        <p:spPr>
+          <a:xfrm>
+            <a:off x="10362895" y="5806440"/>
+            <a:ext cx="1188720" cy="420624"/>
+          </a:xfrm>
+          <a:prstGeom prst="roundRect">
+            <a:avLst>
+              <a:gd name="adj" fmla="val 40000"/>
+            </a:avLst>
           </a:prstGeom>
           <a:solidFill>
             <a:srgbClr val="FFFFFF"/>
@@ -3143,190 +3451,14 @@
       </p:sp>
       <p:sp>
         <p:nvSpPr>
-          <p:cNvPr id="3" name="Rectangle 2"/>
-          <p:cNvSpPr/>
-          <p:nvPr/>
-        </p:nvSpPr>
-        <p:spPr>
-          <a:xfrm>
-            <a:off x="0" y="0"/>
-            <a:ext cx="384048" cy="6858000"/>
-          </a:xfrm>
-          <a:prstGeom prst="rect">
-            <a:avLst/>
-          </a:prstGeom>
-          <a:solidFill>
-            <a:srgbClr val="1F2937"/>
-          </a:solidFill>
-          <a:ln>
-            <a:noFill/>
-          </a:ln>
-          <a:effectLst/>
-        </p:spPr>
-        <p:style>
-          <a:lnRef idx="1">
-            <a:schemeClr val="accent1"/>
-          </a:lnRef>
-          <a:fillRef idx="3">
-            <a:schemeClr val="accent1"/>
-          </a:fillRef>
-          <a:effectRef idx="2">
-            <a:schemeClr val="accent1"/>
-          </a:effectRef>
-          <a:fontRef idx="minor">
-            <a:schemeClr val="lt1"/>
-          </a:fontRef>
-        </p:style>
-        <p:txBody>
-          <a:bodyPr rtlCol="0" anchor="ctr"/>
-          <a:lstStyle/>
-          <a:p>
-            <a:pPr algn="ctr"/>
-          </a:p>
-        </p:txBody>
-      </p:sp>
-      <p:sp>
-        <p:nvSpPr>
-          <p:cNvPr id="4" name="Rectangle 3"/>
-          <p:cNvSpPr/>
-          <p:nvPr/>
-        </p:nvSpPr>
-        <p:spPr>
-          <a:xfrm>
-            <a:off x="384048" y="0"/>
-            <a:ext cx="91440" cy="6858000"/>
-          </a:xfrm>
-          <a:prstGeom prst="rect">
-            <a:avLst/>
-          </a:prstGeom>
-          <a:solidFill>
-            <a:srgbClr val="4B5563"/>
-          </a:solidFill>
-          <a:ln>
-            <a:noFill/>
-          </a:ln>
-          <a:effectLst/>
-        </p:spPr>
-        <p:style>
-          <a:lnRef idx="1">
-            <a:schemeClr val="accent1"/>
-          </a:lnRef>
-          <a:fillRef idx="3">
-            <a:schemeClr val="accent1"/>
-          </a:fillRef>
-          <a:effectRef idx="2">
-            <a:schemeClr val="accent1"/>
-          </a:effectRef>
-          <a:fontRef idx="minor">
-            <a:schemeClr val="lt1"/>
-          </a:fontRef>
-        </p:style>
-        <p:txBody>
-          <a:bodyPr rtlCol="0" anchor="ctr"/>
-          <a:lstStyle/>
-          <a:p>
-            <a:pPr algn="ctr"/>
-          </a:p>
-        </p:txBody>
-      </p:sp>
-      <p:sp>
-        <p:nvSpPr>
-          <p:cNvPr id="5" name="Rectangle 4"/>
-          <p:cNvSpPr/>
-          <p:nvPr/>
-        </p:nvSpPr>
-        <p:spPr>
-          <a:xfrm>
-            <a:off x="9357055" y="4937760"/>
-            <a:ext cx="2834640" cy="1920240"/>
-          </a:xfrm>
-          <a:prstGeom prst="rect">
-            <a:avLst/>
-          </a:prstGeom>
-          <a:solidFill>
-            <a:srgbClr val="F1F3F6"/>
-          </a:solidFill>
-          <a:ln>
-            <a:noFill/>
-          </a:ln>
-          <a:effectLst/>
-        </p:spPr>
-        <p:style>
-          <a:lnRef idx="1">
-            <a:schemeClr val="accent1"/>
-          </a:lnRef>
-          <a:fillRef idx="3">
-            <a:schemeClr val="accent1"/>
-          </a:fillRef>
-          <a:effectRef idx="2">
-            <a:schemeClr val="accent1"/>
-          </a:effectRef>
-          <a:fontRef idx="minor">
-            <a:schemeClr val="lt1"/>
-          </a:fontRef>
-        </p:style>
-        <p:txBody>
-          <a:bodyPr rtlCol="0" anchor="ctr"/>
-          <a:lstStyle/>
-          <a:p>
-            <a:pPr algn="ctr"/>
-          </a:p>
-        </p:txBody>
-      </p:sp>
-      <p:sp>
-        <p:nvSpPr>
-          <p:cNvPr id="6" name="Rounded Rectangle 5"/>
-          <p:cNvSpPr/>
-          <p:nvPr/>
-        </p:nvSpPr>
-        <p:spPr>
-          <a:xfrm>
-            <a:off x="1051560" y="1234440"/>
-            <a:ext cx="1261872" cy="457200"/>
-          </a:xfrm>
-          <a:prstGeom prst="roundRect">
-            <a:avLst/>
-          </a:prstGeom>
-          <a:solidFill>
-            <a:srgbClr val="4B5563"/>
-          </a:solidFill>
-          <a:ln>
-            <a:noFill/>
-          </a:ln>
-          <a:effectLst/>
-        </p:spPr>
-        <p:style>
-          <a:lnRef idx="1">
-            <a:schemeClr val="accent1"/>
-          </a:lnRef>
-          <a:fillRef idx="3">
-            <a:schemeClr val="accent1"/>
-          </a:fillRef>
-          <a:effectRef idx="2">
-            <a:schemeClr val="accent1"/>
-          </a:effectRef>
-          <a:fontRef idx="minor">
-            <a:schemeClr val="lt1"/>
-          </a:fontRef>
-        </p:style>
-        <p:txBody>
-          <a:bodyPr rtlCol="0" anchor="ctr"/>
-          <a:lstStyle/>
-          <a:p>
-            <a:pPr algn="ctr"/>
-          </a:p>
-        </p:txBody>
-      </p:sp>
-      <p:sp>
-        <p:nvSpPr>
-          <p:cNvPr id="7" name="TextBox 6"/>
+          <p:cNvPr id="10" name="TextBox 9"/>
           <p:cNvSpPr txBox="1"/>
           <p:nvPr/>
         </p:nvSpPr>
         <p:spPr>
           <a:xfrm>
-            <a:off x="1051560" y="1252728"/>
-            <a:ext cx="1261872" cy="420624"/>
+            <a:off x="10362895" y="5824729"/>
+            <a:ext cx="1188720" cy="384048"/>
           </a:xfrm>
           <a:prstGeom prst="rect">
             <a:avLst/>
@@ -3334,188 +3466,26 @@
           <a:noFill/>
         </p:spPr>
         <p:txBody>
-          <a:bodyPr wrap="square" anchor="ctr" lIns="45720" rIns="45720" tIns="0" bIns="0">
+          <a:bodyPr wrap="square" anchor="ctr" lIns="54864" rIns="54864" tIns="0" bIns="0">
             <a:spAutoFit/>
           </a:bodyPr>
           <a:lstStyle/>
           <a:p>
             <a:pPr algn="ctr">
               <a:lnSpc>
-                <a:spcPct val="125000"/>
+                <a:spcPct val="130000"/>
               </a:lnSpc>
+              <a:defRPr sz="1300"/>
             </a:pPr>
             <a:r>
-              <a:rPr sz="1400" b="1">
-                <a:solidFill>
-                  <a:srgbClr val="FFFFFF"/>
+              <a:rPr sz="1300" b="1" u="none">
+                <a:solidFill>
+                  <a:srgbClr val="1F2937"/>
                 </a:solidFill>
                 <a:latin typeface="Times New Roman"/>
                 <a:ea typeface="微软雅黑"/>
               </a:rPr>
               <a:t>试卷讲评</a:t>
-            </a:r>
-          </a:p>
-        </p:txBody>
-      </p:sp>
-      <p:sp>
-        <p:nvSpPr>
-          <p:cNvPr id="8" name="TextBox 7"/>
-          <p:cNvSpPr txBox="1"/>
-          <p:nvPr/>
-        </p:nvSpPr>
-        <p:spPr>
-          <a:xfrm>
-            <a:off x="1005840" y="1874519"/>
-            <a:ext cx="9814255" cy="2011680"/>
-          </a:xfrm>
-          <a:prstGeom prst="rect">
-            <a:avLst/>
-          </a:prstGeom>
-          <a:noFill/>
-        </p:spPr>
-        <p:txBody>
-          <a:bodyPr wrap="square" anchor="t" lIns="45720" rIns="45720" tIns="0" bIns="0">
-            <a:spAutoFit/>
-          </a:bodyPr>
-          <a:lstStyle/>
-          <a:p>
-            <a:pPr algn="l">
-              <a:lnSpc>
-                <a:spcPct val="118000"/>
-              </a:lnSpc>
-            </a:pPr>
-            <a:r>
-              <a:rPr sz="3400" b="1">
-                <a:solidFill>
-                  <a:srgbClr val="1F2937"/>
-                </a:solidFill>
-                <a:latin typeface="Times New Roman"/>
-              </a:rPr>
-              <a:t>胶州四中高三级部物理学科单元达标评测题</a:t>
-            </a:r>
-          </a:p>
-        </p:txBody>
-      </p:sp>
-      <p:sp>
-        <p:nvSpPr>
-          <p:cNvPr id="9" name="TextBox 8"/>
-          <p:cNvSpPr txBox="1"/>
-          <p:nvPr/>
-        </p:nvSpPr>
-        <p:spPr>
-          <a:xfrm>
-            <a:off x="1051560" y="3977639"/>
-            <a:ext cx="9631375" cy="822960"/>
-          </a:xfrm>
-          <a:prstGeom prst="rect">
-            <a:avLst/>
-          </a:prstGeom>
-          <a:noFill/>
-        </p:spPr>
-        <p:txBody>
-          <a:bodyPr wrap="square" anchor="t" lIns="45720" rIns="45720" tIns="0" bIns="0">
-            <a:spAutoFit/>
-          </a:bodyPr>
-          <a:lstStyle/>
-          <a:p>
-            <a:pPr algn="l">
-              <a:lnSpc>
-                <a:spcPct val="130000"/>
-              </a:lnSpc>
-            </a:pPr>
-            <a:r>
-              <a:rPr sz="2200" b="0">
-                <a:solidFill>
-                  <a:srgbClr val="44506B"/>
-                </a:solidFill>
-                <a:latin typeface="Times New Roman"/>
-                <a:ea typeface="微软雅黑"/>
-              </a:rPr>
-              <a:t>试卷讲评</a:t>
-            </a:r>
-          </a:p>
-        </p:txBody>
-      </p:sp>
-      <p:sp>
-        <p:nvSpPr>
-          <p:cNvPr id="10" name="Rectangle 9"/>
-          <p:cNvSpPr/>
-          <p:nvPr/>
-        </p:nvSpPr>
-        <p:spPr>
-          <a:xfrm>
-            <a:off x="1051560" y="4892040"/>
-            <a:ext cx="1463040" cy="38100"/>
-          </a:xfrm>
-          <a:prstGeom prst="rect">
-            <a:avLst/>
-          </a:prstGeom>
-          <a:solidFill>
-            <a:srgbClr val="4B5563"/>
-          </a:solidFill>
-          <a:ln>
-            <a:noFill/>
-          </a:ln>
-          <a:effectLst/>
-        </p:spPr>
-        <p:style>
-          <a:lnRef idx="1">
-            <a:schemeClr val="accent1"/>
-          </a:lnRef>
-          <a:fillRef idx="3">
-            <a:schemeClr val="accent1"/>
-          </a:fillRef>
-          <a:effectRef idx="2">
-            <a:schemeClr val="accent1"/>
-          </a:effectRef>
-          <a:fontRef idx="minor">
-            <a:schemeClr val="lt1"/>
-          </a:fontRef>
-        </p:style>
-        <p:txBody>
-          <a:bodyPr rtlCol="0" anchor="ctr"/>
-          <a:lstStyle/>
-          <a:p>
-            <a:pPr algn="ctr"/>
-          </a:p>
-        </p:txBody>
-      </p:sp>
-      <p:sp>
-        <p:nvSpPr>
-          <p:cNvPr id="11" name="TextBox 10"/>
-          <p:cNvSpPr txBox="1"/>
-          <p:nvPr/>
-        </p:nvSpPr>
-        <p:spPr>
-          <a:xfrm>
-            <a:off x="1051560" y="5074920"/>
-            <a:ext cx="9631375" cy="457200"/>
-          </a:xfrm>
-          <a:prstGeom prst="rect">
-            <a:avLst/>
-          </a:prstGeom>
-          <a:noFill/>
-        </p:spPr>
-        <p:txBody>
-          <a:bodyPr wrap="square" anchor="t" lIns="45720" rIns="45720" tIns="0" bIns="0">
-            <a:spAutoFit/>
-          </a:bodyPr>
-          <a:lstStyle/>
-          <a:p>
-            <a:pPr algn="l">
-              <a:lnSpc>
-                <a:spcPct val="125000"/>
-              </a:lnSpc>
-            </a:pPr>
-            <a:r>
-              <a:rPr sz="1400" b="0">
-                <a:solidFill>
-                  <a:srgbClr val="7A8698"/>
-                </a:solidFill>
-                <a:latin typeface="Times New Roman"/>
-                <a:ea typeface="微软雅黑"/>
-              </a:rPr>
-              <a:t>90分钟 | 满分：100分</a:t>
             </a:r>
           </a:p>
         </p:txBody>
@@ -3547,6 +3517,3131 @@
         <p:spPr>
           <a:xfrm>
             <a:off x="0" y="0"/>
+            <a:ext cx="12191695" cy="822960"/>
+          </a:xfrm>
+          <a:prstGeom prst="rect">
+            <a:avLst/>
+          </a:prstGeom>
+          <a:solidFill>
+            <a:srgbClr val="1F2937"/>
+          </a:solidFill>
+          <a:ln>
+            <a:noFill/>
+          </a:ln>
+          <a:effectLst/>
+        </p:spPr>
+        <p:style>
+          <a:lnRef idx="1">
+            <a:schemeClr val="accent1"/>
+          </a:lnRef>
+          <a:fillRef idx="3">
+            <a:schemeClr val="accent1"/>
+          </a:fillRef>
+          <a:effectRef idx="2">
+            <a:schemeClr val="accent1"/>
+          </a:effectRef>
+          <a:fontRef idx="minor">
+            <a:schemeClr val="lt1"/>
+          </a:fontRef>
+        </p:style>
+        <p:txBody>
+          <a:bodyPr rtlCol="0" anchor="ctr"/>
+          <a:lstStyle/>
+          <a:p>
+            <a:pPr algn="ctr"/>
+          </a:p>
+        </p:txBody>
+      </p:sp>
+      <p:sp>
+        <p:nvSpPr>
+          <p:cNvPr id="3" name="Rectangle 2"/>
+          <p:cNvSpPr/>
+          <p:nvPr/>
+        </p:nvSpPr>
+        <p:spPr>
+          <a:xfrm>
+            <a:off x="0" y="822960"/>
+            <a:ext cx="12191695" cy="45720"/>
+          </a:xfrm>
+          <a:prstGeom prst="rect">
+            <a:avLst/>
+          </a:prstGeom>
+          <a:solidFill>
+            <a:srgbClr val="475569"/>
+          </a:solidFill>
+          <a:ln>
+            <a:noFill/>
+          </a:ln>
+          <a:effectLst/>
+        </p:spPr>
+        <p:style>
+          <a:lnRef idx="1">
+            <a:schemeClr val="accent1"/>
+          </a:lnRef>
+          <a:fillRef idx="3">
+            <a:schemeClr val="accent1"/>
+          </a:fillRef>
+          <a:effectRef idx="2">
+            <a:schemeClr val="accent1"/>
+          </a:effectRef>
+          <a:fontRef idx="minor">
+            <a:schemeClr val="lt1"/>
+          </a:fontRef>
+        </p:style>
+        <p:txBody>
+          <a:bodyPr rtlCol="0" anchor="ctr"/>
+          <a:lstStyle/>
+          <a:p>
+            <a:pPr algn="ctr"/>
+          </a:p>
+        </p:txBody>
+      </p:sp>
+      <p:sp>
+        <p:nvSpPr>
+          <p:cNvPr id="4" name="TextBox 3"/>
+          <p:cNvSpPr txBox="1"/>
+          <p:nvPr/>
+        </p:nvSpPr>
+        <p:spPr>
+          <a:xfrm>
+            <a:off x="548640" y="137160"/>
+            <a:ext cx="8442656" cy="548640"/>
+          </a:xfrm>
+          <a:prstGeom prst="rect">
+            <a:avLst/>
+          </a:prstGeom>
+          <a:noFill/>
+        </p:spPr>
+        <p:txBody>
+          <a:bodyPr wrap="square" anchor="ctr" lIns="54864" rIns="54864" tIns="0" bIns="0">
+            <a:spAutoFit/>
+          </a:bodyPr>
+          <a:lstStyle/>
+          <a:p>
+            <a:pPr algn="l">
+              <a:lnSpc>
+                <a:spcPct val="130000"/>
+              </a:lnSpc>
+              <a:defRPr sz="2600"/>
+            </a:pPr>
+            <a:r>
+              <a:rPr sz="2600" b="1" u="none">
+                <a:solidFill>
+                  <a:srgbClr val="FFFFFF"/>
+                </a:solidFill>
+                <a:latin typeface="Times New Roman"/>
+                <a:ea typeface="微软雅黑"/>
+              </a:rPr>
+              <a:t>第 4 题</a:t>
+            </a:r>
+          </a:p>
+        </p:txBody>
+      </p:sp>
+      <p:sp>
+        <p:nvSpPr>
+          <p:cNvPr id="5" name="Rounded Rectangle 4"/>
+          <p:cNvSpPr/>
+          <p:nvPr/>
+        </p:nvSpPr>
+        <p:spPr>
+          <a:xfrm>
+            <a:off x="10097719" y="219456"/>
+            <a:ext cx="1545336" cy="365760"/>
+          </a:xfrm>
+          <a:prstGeom prst="roundRect">
+            <a:avLst>
+              <a:gd name="adj" fmla="val 30000"/>
+            </a:avLst>
+          </a:prstGeom>
+          <a:solidFill>
+            <a:srgbClr val="2E4A78"/>
+          </a:solidFill>
+          <a:ln>
+            <a:noFill/>
+          </a:ln>
+          <a:effectLst/>
+        </p:spPr>
+        <p:style>
+          <a:lnRef idx="1">
+            <a:schemeClr val="accent1"/>
+          </a:lnRef>
+          <a:fillRef idx="3">
+            <a:schemeClr val="accent1"/>
+          </a:fillRef>
+          <a:effectRef idx="2">
+            <a:schemeClr val="accent1"/>
+          </a:effectRef>
+          <a:fontRef idx="minor">
+            <a:schemeClr val="lt1"/>
+          </a:fontRef>
+        </p:style>
+        <p:txBody>
+          <a:bodyPr rtlCol="0" anchor="ctr"/>
+          <a:lstStyle/>
+          <a:p>
+            <a:pPr algn="ctr"/>
+          </a:p>
+        </p:txBody>
+      </p:sp>
+      <p:sp>
+        <p:nvSpPr>
+          <p:cNvPr id="6" name="TextBox 5"/>
+          <p:cNvSpPr txBox="1"/>
+          <p:nvPr/>
+        </p:nvSpPr>
+        <p:spPr>
+          <a:xfrm>
+            <a:off x="10097719" y="237744"/>
+            <a:ext cx="1545336" cy="329184"/>
+          </a:xfrm>
+          <a:prstGeom prst="rect">
+            <a:avLst/>
+          </a:prstGeom>
+          <a:noFill/>
+        </p:spPr>
+        <p:txBody>
+          <a:bodyPr wrap="square" anchor="ctr" lIns="54864" rIns="54864" tIns="0" bIns="0">
+            <a:spAutoFit/>
+          </a:bodyPr>
+          <a:lstStyle/>
+          <a:p>
+            <a:pPr algn="ctr">
+              <a:lnSpc>
+                <a:spcPct val="130000"/>
+              </a:lnSpc>
+              <a:defRPr sz="1100"/>
+            </a:pPr>
+            <a:r>
+              <a:rPr sz="1100" b="1" u="none">
+                <a:solidFill>
+                  <a:srgbClr val="FFFFFF"/>
+                </a:solidFill>
+                <a:latin typeface="Times New Roman"/>
+                <a:ea typeface="微软雅黑"/>
+              </a:rPr>
+              <a:t>二、多项选择题</a:t>
+            </a:r>
+          </a:p>
+        </p:txBody>
+      </p:sp>
+      <p:sp>
+        <p:nvSpPr>
+          <p:cNvPr id="7" name="Rectangle 6"/>
+          <p:cNvSpPr/>
+          <p:nvPr/>
+        </p:nvSpPr>
+        <p:spPr>
+          <a:xfrm>
+            <a:off x="548640" y="1097280"/>
+            <a:ext cx="64008" cy="566928"/>
+          </a:xfrm>
+          <a:prstGeom prst="rect">
+            <a:avLst/>
+          </a:prstGeom>
+          <a:solidFill>
+            <a:srgbClr val="16A34A"/>
+          </a:solidFill>
+          <a:ln>
+            <a:noFill/>
+          </a:ln>
+          <a:effectLst/>
+        </p:spPr>
+        <p:style>
+          <a:lnRef idx="1">
+            <a:schemeClr val="accent1"/>
+          </a:lnRef>
+          <a:fillRef idx="3">
+            <a:schemeClr val="accent1"/>
+          </a:fillRef>
+          <a:effectRef idx="2">
+            <a:schemeClr val="accent1"/>
+          </a:effectRef>
+          <a:fontRef idx="minor">
+            <a:schemeClr val="lt1"/>
+          </a:fontRef>
+        </p:style>
+        <p:txBody>
+          <a:bodyPr rtlCol="0" anchor="ctr"/>
+          <a:lstStyle/>
+          <a:p>
+            <a:pPr algn="ctr"/>
+          </a:p>
+        </p:txBody>
+      </p:sp>
+      <p:sp>
+        <p:nvSpPr>
+          <p:cNvPr id="8" name="TextBox 7"/>
+          <p:cNvSpPr txBox="1"/>
+          <p:nvPr/>
+        </p:nvSpPr>
+        <p:spPr>
+          <a:xfrm>
+            <a:off x="731520" y="1097280"/>
+            <a:ext cx="10911535" cy="566928"/>
+          </a:xfrm>
+          <a:prstGeom prst="rect">
+            <a:avLst/>
+          </a:prstGeom>
+          <a:noFill/>
+        </p:spPr>
+        <p:txBody>
+          <a:bodyPr wrap="square" anchor="t" lIns="54864" rIns="54864" tIns="0" bIns="0">
+            <a:spAutoFit/>
+          </a:bodyPr>
+          <a:lstStyle/>
+          <a:p>
+            <a:pPr algn="l">
+              <a:lnSpc>
+                <a:spcPct val="135000"/>
+              </a:lnSpc>
+              <a:defRPr sz="2200"/>
+            </a:pPr>
+            <a:r>
+              <a:rPr sz="2200" b="1" u="none">
+                <a:solidFill>
+                  <a:srgbClr val="15803D"/>
+                </a:solidFill>
+                <a:latin typeface="Times New Roman"/>
+                <a:ea typeface="微软雅黑"/>
+              </a:rPr>
+              <a:t>答案：</a:t>
+            </a:r>
+            <a:r>
+              <a:rPr sz="2200" b="0" u="none">
+                <a:solidFill>
+                  <a:srgbClr val="15803D"/>
+                </a:solidFill>
+                <a:latin typeface="Times New Roman"/>
+                <a:ea typeface="微软雅黑"/>
+              </a:rPr>
+              <a:t>AB</a:t>
+            </a:r>
+          </a:p>
+        </p:txBody>
+      </p:sp>
+      <p:sp>
+        <p:nvSpPr>
+          <p:cNvPr id="9" name="TextBox 8"/>
+          <p:cNvSpPr txBox="1"/>
+          <p:nvPr/>
+        </p:nvSpPr>
+        <p:spPr>
+          <a:xfrm>
+            <a:off x="566928" y="1828800"/>
+            <a:ext cx="11048695" cy="4389120"/>
+          </a:xfrm>
+          <a:prstGeom prst="rect">
+            <a:avLst/>
+          </a:prstGeom>
+          <a:noFill/>
+        </p:spPr>
+        <p:txBody>
+          <a:bodyPr wrap="square" anchor="t" lIns="54864" rIns="54864" tIns="0" bIns="0">
+            <a:spAutoFit/>
+          </a:bodyPr>
+          <a:lstStyle/>
+          <a:p>
+            <a:pPr algn="l">
+              <a:lnSpc>
+                <a:spcPct val="145000"/>
+              </a:lnSpc>
+              <a:defRPr sz="2000"/>
+            </a:pPr>
+            <a:r>
+              <a:rPr sz="2000" b="1" u="none">
+                <a:solidFill>
+                  <a:srgbClr val="475569"/>
+                </a:solidFill>
+                <a:latin typeface="Times New Roman"/>
+                <a:ea typeface="微软雅黑"/>
+              </a:rPr>
+              <a:t>解析　</a:t>
+            </a:r>
+            <a:r>
+              <a:rPr sz="2000" b="0" u="none">
+                <a:solidFill>
+                  <a:srgbClr val="111827"/>
+                </a:solidFill>
+                <a:latin typeface="Times New Roman"/>
+                <a:ea typeface="微软雅黑"/>
+              </a:rPr>
+              <a:t>由 v-t 图像斜率可知甲做匀加速、乙做匀减速；t=2 s 时两图线相交表示速度相同，不是相遇；0~4 s 内乙的图线面积更大，位移更大。</a:t>
+            </a:r>
+          </a:p>
+        </p:txBody>
+      </p:sp>
+      <p:sp>
+        <p:nvSpPr>
+          <p:cNvPr id="10" name="Rectangle 9"/>
+          <p:cNvSpPr/>
+          <p:nvPr/>
+        </p:nvSpPr>
+        <p:spPr>
+          <a:xfrm>
+            <a:off x="0" y="6739128"/>
+            <a:ext cx="12191695" cy="118872"/>
+          </a:xfrm>
+          <a:prstGeom prst="rect">
+            <a:avLst/>
+          </a:prstGeom>
+          <a:solidFill>
+            <a:srgbClr val="475569"/>
+          </a:solidFill>
+          <a:ln>
+            <a:noFill/>
+          </a:ln>
+          <a:effectLst/>
+        </p:spPr>
+        <p:style>
+          <a:lnRef idx="1">
+            <a:schemeClr val="accent1"/>
+          </a:lnRef>
+          <a:fillRef idx="3">
+            <a:schemeClr val="accent1"/>
+          </a:fillRef>
+          <a:effectRef idx="2">
+            <a:schemeClr val="accent1"/>
+          </a:effectRef>
+          <a:fontRef idx="minor">
+            <a:schemeClr val="lt1"/>
+          </a:fontRef>
+        </p:style>
+        <p:txBody>
+          <a:bodyPr rtlCol="0" anchor="ctr"/>
+          <a:lstStyle/>
+          <a:p>
+            <a:pPr algn="ctr"/>
+          </a:p>
+        </p:txBody>
+      </p:sp>
+      <p:sp>
+        <p:nvSpPr>
+          <p:cNvPr id="11" name="TextBox 10"/>
+          <p:cNvSpPr txBox="1"/>
+          <p:nvPr/>
+        </p:nvSpPr>
+        <p:spPr>
+          <a:xfrm>
+            <a:off x="548640" y="6345936"/>
+            <a:ext cx="8595360" cy="274320"/>
+          </a:xfrm>
+          <a:prstGeom prst="rect">
+            <a:avLst/>
+          </a:prstGeom>
+          <a:noFill/>
+        </p:spPr>
+        <p:txBody>
+          <a:bodyPr wrap="square" anchor="t" lIns="54864" rIns="54864" tIns="0" bIns="0">
+            <a:spAutoFit/>
+          </a:bodyPr>
+          <a:lstStyle/>
+          <a:p>
+            <a:pPr algn="l">
+              <a:lnSpc>
+                <a:spcPct val="130000"/>
+              </a:lnSpc>
+              <a:defRPr sz="1000"/>
+            </a:pPr>
+            <a:r>
+              <a:rPr sz="1000" b="0" u="none">
+                <a:solidFill>
+                  <a:srgbClr val="8A94A6"/>
+                </a:solidFill>
+                <a:latin typeface="Times New Roman"/>
+                <a:ea typeface="微软雅黑"/>
+              </a:rPr>
+              <a:t>胶州四中高三级部物理学科单元达标评测题</a:t>
+            </a:r>
+          </a:p>
+        </p:txBody>
+      </p:sp>
+      <p:sp>
+        <p:nvSpPr>
+          <p:cNvPr id="12" name="TextBox 11"/>
+          <p:cNvSpPr txBox="1"/>
+          <p:nvPr/>
+        </p:nvSpPr>
+        <p:spPr>
+          <a:xfrm>
+            <a:off x="11048695" y="6345936"/>
+            <a:ext cx="685800" cy="274320"/>
+          </a:xfrm>
+          <a:prstGeom prst="rect">
+            <a:avLst/>
+          </a:prstGeom>
+          <a:noFill/>
+        </p:spPr>
+        <p:txBody>
+          <a:bodyPr wrap="square" anchor="t" lIns="54864" rIns="54864" tIns="0" bIns="0">
+            <a:spAutoFit/>
+          </a:bodyPr>
+          <a:lstStyle/>
+          <a:p>
+            <a:pPr algn="r">
+              <a:lnSpc>
+                <a:spcPct val="130000"/>
+              </a:lnSpc>
+              <a:defRPr sz="1000"/>
+            </a:pPr>
+            <a:r>
+              <a:rPr sz="1000" b="0" u="none">
+                <a:solidFill>
+                  <a:srgbClr val="8A94A6"/>
+                </a:solidFill>
+                <a:latin typeface="Times New Roman"/>
+                <a:ea typeface="微软雅黑"/>
+              </a:rPr>
+              <a:t>10</a:t>
+            </a:r>
+          </a:p>
+        </p:txBody>
+      </p:sp>
+    </p:spTree>
+  </p:cSld>
+  <p:clrMapOvr>
+    <a:masterClrMapping/>
+  </p:clrMapOvr>
+</p:sld>
+</file>
+
+<file path=ppt/slides/slide11.xml><?xml version="1.0" encoding="utf-8"?>
+<p:sld xmlns:a="http://schemas.openxmlformats.org/drawingml/2006/main" xmlns:p="http://schemas.openxmlformats.org/presentationml/2006/main" xmlns:r="http://schemas.openxmlformats.org/officeDocument/2006/relationships">
+  <p:cSld>
+    <p:spTree>
+      <p:nvGrpSpPr>
+        <p:cNvPr id="1" name=""/>
+        <p:cNvGrpSpPr/>
+        <p:nvPr/>
+      </p:nvGrpSpPr>
+      <p:grpSpPr/>
+      <p:sp>
+        <p:nvSpPr>
+          <p:cNvPr id="2" name="Rectangle 1"/>
+          <p:cNvSpPr/>
+          <p:nvPr/>
+        </p:nvSpPr>
+        <p:spPr>
+          <a:xfrm>
+            <a:off x="0" y="0"/>
+            <a:ext cx="12191695" cy="822960"/>
+          </a:xfrm>
+          <a:prstGeom prst="rect">
+            <a:avLst/>
+          </a:prstGeom>
+          <a:solidFill>
+            <a:srgbClr val="1F2937"/>
+          </a:solidFill>
+          <a:ln>
+            <a:noFill/>
+          </a:ln>
+          <a:effectLst/>
+        </p:spPr>
+        <p:style>
+          <a:lnRef idx="1">
+            <a:schemeClr val="accent1"/>
+          </a:lnRef>
+          <a:fillRef idx="3">
+            <a:schemeClr val="accent1"/>
+          </a:fillRef>
+          <a:effectRef idx="2">
+            <a:schemeClr val="accent1"/>
+          </a:effectRef>
+          <a:fontRef idx="minor">
+            <a:schemeClr val="lt1"/>
+          </a:fontRef>
+        </p:style>
+        <p:txBody>
+          <a:bodyPr rtlCol="0" anchor="ctr"/>
+          <a:lstStyle/>
+          <a:p>
+            <a:pPr algn="ctr"/>
+          </a:p>
+        </p:txBody>
+      </p:sp>
+      <p:sp>
+        <p:nvSpPr>
+          <p:cNvPr id="3" name="Rectangle 2"/>
+          <p:cNvSpPr/>
+          <p:nvPr/>
+        </p:nvSpPr>
+        <p:spPr>
+          <a:xfrm>
+            <a:off x="0" y="822960"/>
+            <a:ext cx="12191695" cy="45720"/>
+          </a:xfrm>
+          <a:prstGeom prst="rect">
+            <a:avLst/>
+          </a:prstGeom>
+          <a:solidFill>
+            <a:srgbClr val="475569"/>
+          </a:solidFill>
+          <a:ln>
+            <a:noFill/>
+          </a:ln>
+          <a:effectLst/>
+        </p:spPr>
+        <p:style>
+          <a:lnRef idx="1">
+            <a:schemeClr val="accent1"/>
+          </a:lnRef>
+          <a:fillRef idx="3">
+            <a:schemeClr val="accent1"/>
+          </a:fillRef>
+          <a:effectRef idx="2">
+            <a:schemeClr val="accent1"/>
+          </a:effectRef>
+          <a:fontRef idx="minor">
+            <a:schemeClr val="lt1"/>
+          </a:fontRef>
+        </p:style>
+        <p:txBody>
+          <a:bodyPr rtlCol="0" anchor="ctr"/>
+          <a:lstStyle/>
+          <a:p>
+            <a:pPr algn="ctr"/>
+          </a:p>
+        </p:txBody>
+      </p:sp>
+      <p:sp>
+        <p:nvSpPr>
+          <p:cNvPr id="4" name="TextBox 3"/>
+          <p:cNvSpPr txBox="1"/>
+          <p:nvPr/>
+        </p:nvSpPr>
+        <p:spPr>
+          <a:xfrm>
+            <a:off x="548640" y="137160"/>
+            <a:ext cx="8442656" cy="548640"/>
+          </a:xfrm>
+          <a:prstGeom prst="rect">
+            <a:avLst/>
+          </a:prstGeom>
+          <a:noFill/>
+        </p:spPr>
+        <p:txBody>
+          <a:bodyPr wrap="square" anchor="ctr" lIns="54864" rIns="54864" tIns="0" bIns="0">
+            <a:spAutoFit/>
+          </a:bodyPr>
+          <a:lstStyle/>
+          <a:p>
+            <a:pPr algn="l">
+              <a:lnSpc>
+                <a:spcPct val="130000"/>
+              </a:lnSpc>
+              <a:defRPr sz="2600"/>
+            </a:pPr>
+            <a:r>
+              <a:rPr sz="2600" b="1" u="none">
+                <a:solidFill>
+                  <a:srgbClr val="FFFFFF"/>
+                </a:solidFill>
+                <a:latin typeface="Times New Roman"/>
+                <a:ea typeface="微软雅黑"/>
+              </a:rPr>
+              <a:t>第 5 题</a:t>
+            </a:r>
+          </a:p>
+        </p:txBody>
+      </p:sp>
+      <p:sp>
+        <p:nvSpPr>
+          <p:cNvPr id="5" name="Rounded Rectangle 4"/>
+          <p:cNvSpPr/>
+          <p:nvPr/>
+        </p:nvSpPr>
+        <p:spPr>
+          <a:xfrm>
+            <a:off x="10097719" y="219456"/>
+            <a:ext cx="1545336" cy="365760"/>
+          </a:xfrm>
+          <a:prstGeom prst="roundRect">
+            <a:avLst>
+              <a:gd name="adj" fmla="val 30000"/>
+            </a:avLst>
+          </a:prstGeom>
+          <a:solidFill>
+            <a:srgbClr val="2E4A78"/>
+          </a:solidFill>
+          <a:ln>
+            <a:noFill/>
+          </a:ln>
+          <a:effectLst/>
+        </p:spPr>
+        <p:style>
+          <a:lnRef idx="1">
+            <a:schemeClr val="accent1"/>
+          </a:lnRef>
+          <a:fillRef idx="3">
+            <a:schemeClr val="accent1"/>
+          </a:fillRef>
+          <a:effectRef idx="2">
+            <a:schemeClr val="accent1"/>
+          </a:effectRef>
+          <a:fontRef idx="minor">
+            <a:schemeClr val="lt1"/>
+          </a:fontRef>
+        </p:style>
+        <p:txBody>
+          <a:bodyPr rtlCol="0" anchor="ctr"/>
+          <a:lstStyle/>
+          <a:p>
+            <a:pPr algn="ctr"/>
+          </a:p>
+        </p:txBody>
+      </p:sp>
+      <p:sp>
+        <p:nvSpPr>
+          <p:cNvPr id="6" name="TextBox 5"/>
+          <p:cNvSpPr txBox="1"/>
+          <p:nvPr/>
+        </p:nvSpPr>
+        <p:spPr>
+          <a:xfrm>
+            <a:off x="10097719" y="237744"/>
+            <a:ext cx="1545336" cy="329184"/>
+          </a:xfrm>
+          <a:prstGeom prst="rect">
+            <a:avLst/>
+          </a:prstGeom>
+          <a:noFill/>
+        </p:spPr>
+        <p:txBody>
+          <a:bodyPr wrap="square" anchor="ctr" lIns="54864" rIns="54864" tIns="0" bIns="0">
+            <a:spAutoFit/>
+          </a:bodyPr>
+          <a:lstStyle/>
+          <a:p>
+            <a:pPr algn="ctr">
+              <a:lnSpc>
+                <a:spcPct val="130000"/>
+              </a:lnSpc>
+              <a:defRPr sz="1100"/>
+            </a:pPr>
+            <a:r>
+              <a:rPr sz="1100" b="1" u="none">
+                <a:solidFill>
+                  <a:srgbClr val="FFFFFF"/>
+                </a:solidFill>
+                <a:latin typeface="Times New Roman"/>
+                <a:ea typeface="微软雅黑"/>
+              </a:rPr>
+              <a:t>二、多项选择题</a:t>
+            </a:r>
+          </a:p>
+        </p:txBody>
+      </p:sp>
+      <p:sp>
+        <p:nvSpPr>
+          <p:cNvPr id="7" name="TextBox 6"/>
+          <p:cNvSpPr txBox="1"/>
+          <p:nvPr/>
+        </p:nvSpPr>
+        <p:spPr>
+          <a:xfrm>
+            <a:off x="548640" y="1078992"/>
+            <a:ext cx="11094415" cy="2103120"/>
+          </a:xfrm>
+          <a:prstGeom prst="rect">
+            <a:avLst/>
+          </a:prstGeom>
+          <a:noFill/>
+        </p:spPr>
+        <p:txBody>
+          <a:bodyPr wrap="square" anchor="t" lIns="54864" rIns="54864" tIns="0" bIns="0">
+            <a:spAutoFit/>
+          </a:bodyPr>
+          <a:lstStyle/>
+          <a:p>
+            <a:pPr algn="l">
+              <a:lnSpc>
+                <a:spcPct val="145000"/>
+              </a:lnSpc>
+              <a:defRPr sz="2200"/>
+            </a:pPr>
+            <a:r>
+              <a:rPr sz="2200" b="0" u="none">
+                <a:solidFill>
+                  <a:srgbClr val="111827"/>
+                </a:solidFill>
+                <a:latin typeface="Times New Roman"/>
+                <a:ea typeface="微软雅黑"/>
+              </a:rPr>
+              <a:t>关于自由落体运动，下列说法正确的是（　　） A. 物体竖直向下的运动就是自由落体运动 B. 自由落体运动是初速度为零、加速度为g的匀加速直线运动 C. 在同一地点，一切物体自由下落的加速度都相同 D. 自由落体运动的位移与时间成正比</a:t>
+            </a:r>
+          </a:p>
+        </p:txBody>
+      </p:sp>
+      <p:sp>
+        <p:nvSpPr>
+          <p:cNvPr id="8" name="Rectangle 7"/>
+          <p:cNvSpPr/>
+          <p:nvPr/>
+        </p:nvSpPr>
+        <p:spPr>
+          <a:xfrm>
+            <a:off x="0" y="6739128"/>
+            <a:ext cx="12191695" cy="118872"/>
+          </a:xfrm>
+          <a:prstGeom prst="rect">
+            <a:avLst/>
+          </a:prstGeom>
+          <a:solidFill>
+            <a:srgbClr val="475569"/>
+          </a:solidFill>
+          <a:ln>
+            <a:noFill/>
+          </a:ln>
+          <a:effectLst/>
+        </p:spPr>
+        <p:style>
+          <a:lnRef idx="1">
+            <a:schemeClr val="accent1"/>
+          </a:lnRef>
+          <a:fillRef idx="3">
+            <a:schemeClr val="accent1"/>
+          </a:fillRef>
+          <a:effectRef idx="2">
+            <a:schemeClr val="accent1"/>
+          </a:effectRef>
+          <a:fontRef idx="minor">
+            <a:schemeClr val="lt1"/>
+          </a:fontRef>
+        </p:style>
+        <p:txBody>
+          <a:bodyPr rtlCol="0" anchor="ctr"/>
+          <a:lstStyle/>
+          <a:p>
+            <a:pPr algn="ctr"/>
+          </a:p>
+        </p:txBody>
+      </p:sp>
+      <p:sp>
+        <p:nvSpPr>
+          <p:cNvPr id="9" name="TextBox 8"/>
+          <p:cNvSpPr txBox="1"/>
+          <p:nvPr/>
+        </p:nvSpPr>
+        <p:spPr>
+          <a:xfrm>
+            <a:off x="548640" y="6345936"/>
+            <a:ext cx="8595360" cy="274320"/>
+          </a:xfrm>
+          <a:prstGeom prst="rect">
+            <a:avLst/>
+          </a:prstGeom>
+          <a:noFill/>
+        </p:spPr>
+        <p:txBody>
+          <a:bodyPr wrap="square" anchor="t" lIns="54864" rIns="54864" tIns="0" bIns="0">
+            <a:spAutoFit/>
+          </a:bodyPr>
+          <a:lstStyle/>
+          <a:p>
+            <a:pPr algn="l">
+              <a:lnSpc>
+                <a:spcPct val="130000"/>
+              </a:lnSpc>
+              <a:defRPr sz="1000"/>
+            </a:pPr>
+            <a:r>
+              <a:rPr sz="1000" b="0" u="none">
+                <a:solidFill>
+                  <a:srgbClr val="8A94A6"/>
+                </a:solidFill>
+                <a:latin typeface="Times New Roman"/>
+                <a:ea typeface="微软雅黑"/>
+              </a:rPr>
+              <a:t>胶州四中高三级部物理学科单元达标评测题</a:t>
+            </a:r>
+          </a:p>
+        </p:txBody>
+      </p:sp>
+      <p:sp>
+        <p:nvSpPr>
+          <p:cNvPr id="10" name="TextBox 9"/>
+          <p:cNvSpPr txBox="1"/>
+          <p:nvPr/>
+        </p:nvSpPr>
+        <p:spPr>
+          <a:xfrm>
+            <a:off x="11048695" y="6345936"/>
+            <a:ext cx="685800" cy="274320"/>
+          </a:xfrm>
+          <a:prstGeom prst="rect">
+            <a:avLst/>
+          </a:prstGeom>
+          <a:noFill/>
+        </p:spPr>
+        <p:txBody>
+          <a:bodyPr wrap="square" anchor="t" lIns="54864" rIns="54864" tIns="0" bIns="0">
+            <a:spAutoFit/>
+          </a:bodyPr>
+          <a:lstStyle/>
+          <a:p>
+            <a:pPr algn="r">
+              <a:lnSpc>
+                <a:spcPct val="130000"/>
+              </a:lnSpc>
+              <a:defRPr sz="1000"/>
+            </a:pPr>
+            <a:r>
+              <a:rPr sz="1000" b="0" u="none">
+                <a:solidFill>
+                  <a:srgbClr val="8A94A6"/>
+                </a:solidFill>
+                <a:latin typeface="Times New Roman"/>
+                <a:ea typeface="微软雅黑"/>
+              </a:rPr>
+              <a:t>11</a:t>
+            </a:r>
+          </a:p>
+        </p:txBody>
+      </p:sp>
+    </p:spTree>
+  </p:cSld>
+  <p:clrMapOvr>
+    <a:masterClrMapping/>
+  </p:clrMapOvr>
+</p:sld>
+</file>
+
+<file path=ppt/slides/slide12.xml><?xml version="1.0" encoding="utf-8"?>
+<p:sld xmlns:a="http://schemas.openxmlformats.org/drawingml/2006/main" xmlns:p="http://schemas.openxmlformats.org/presentationml/2006/main" xmlns:r="http://schemas.openxmlformats.org/officeDocument/2006/relationships">
+  <p:cSld>
+    <p:spTree>
+      <p:nvGrpSpPr>
+        <p:cNvPr id="1" name=""/>
+        <p:cNvGrpSpPr/>
+        <p:nvPr/>
+      </p:nvGrpSpPr>
+      <p:grpSpPr/>
+      <p:sp>
+        <p:nvSpPr>
+          <p:cNvPr id="2" name="Rectangle 1"/>
+          <p:cNvSpPr/>
+          <p:nvPr/>
+        </p:nvSpPr>
+        <p:spPr>
+          <a:xfrm>
+            <a:off x="0" y="0"/>
+            <a:ext cx="12191695" cy="822960"/>
+          </a:xfrm>
+          <a:prstGeom prst="rect">
+            <a:avLst/>
+          </a:prstGeom>
+          <a:solidFill>
+            <a:srgbClr val="1F2937"/>
+          </a:solidFill>
+          <a:ln>
+            <a:noFill/>
+          </a:ln>
+          <a:effectLst/>
+        </p:spPr>
+        <p:style>
+          <a:lnRef idx="1">
+            <a:schemeClr val="accent1"/>
+          </a:lnRef>
+          <a:fillRef idx="3">
+            <a:schemeClr val="accent1"/>
+          </a:fillRef>
+          <a:effectRef idx="2">
+            <a:schemeClr val="accent1"/>
+          </a:effectRef>
+          <a:fontRef idx="minor">
+            <a:schemeClr val="lt1"/>
+          </a:fontRef>
+        </p:style>
+        <p:txBody>
+          <a:bodyPr rtlCol="0" anchor="ctr"/>
+          <a:lstStyle/>
+          <a:p>
+            <a:pPr algn="ctr"/>
+          </a:p>
+        </p:txBody>
+      </p:sp>
+      <p:sp>
+        <p:nvSpPr>
+          <p:cNvPr id="3" name="Rectangle 2"/>
+          <p:cNvSpPr/>
+          <p:nvPr/>
+        </p:nvSpPr>
+        <p:spPr>
+          <a:xfrm>
+            <a:off x="0" y="822960"/>
+            <a:ext cx="12191695" cy="45720"/>
+          </a:xfrm>
+          <a:prstGeom prst="rect">
+            <a:avLst/>
+          </a:prstGeom>
+          <a:solidFill>
+            <a:srgbClr val="475569"/>
+          </a:solidFill>
+          <a:ln>
+            <a:noFill/>
+          </a:ln>
+          <a:effectLst/>
+        </p:spPr>
+        <p:style>
+          <a:lnRef idx="1">
+            <a:schemeClr val="accent1"/>
+          </a:lnRef>
+          <a:fillRef idx="3">
+            <a:schemeClr val="accent1"/>
+          </a:fillRef>
+          <a:effectRef idx="2">
+            <a:schemeClr val="accent1"/>
+          </a:effectRef>
+          <a:fontRef idx="minor">
+            <a:schemeClr val="lt1"/>
+          </a:fontRef>
+        </p:style>
+        <p:txBody>
+          <a:bodyPr rtlCol="0" anchor="ctr"/>
+          <a:lstStyle/>
+          <a:p>
+            <a:pPr algn="ctr"/>
+          </a:p>
+        </p:txBody>
+      </p:sp>
+      <p:sp>
+        <p:nvSpPr>
+          <p:cNvPr id="4" name="TextBox 3"/>
+          <p:cNvSpPr txBox="1"/>
+          <p:nvPr/>
+        </p:nvSpPr>
+        <p:spPr>
+          <a:xfrm>
+            <a:off x="548640" y="137160"/>
+            <a:ext cx="8442656" cy="548640"/>
+          </a:xfrm>
+          <a:prstGeom prst="rect">
+            <a:avLst/>
+          </a:prstGeom>
+          <a:noFill/>
+        </p:spPr>
+        <p:txBody>
+          <a:bodyPr wrap="square" anchor="ctr" lIns="54864" rIns="54864" tIns="0" bIns="0">
+            <a:spAutoFit/>
+          </a:bodyPr>
+          <a:lstStyle/>
+          <a:p>
+            <a:pPr algn="l">
+              <a:lnSpc>
+                <a:spcPct val="130000"/>
+              </a:lnSpc>
+              <a:defRPr sz="2600"/>
+            </a:pPr>
+            <a:r>
+              <a:rPr sz="2600" b="1" u="none">
+                <a:solidFill>
+                  <a:srgbClr val="FFFFFF"/>
+                </a:solidFill>
+                <a:latin typeface="Times New Roman"/>
+                <a:ea typeface="微软雅黑"/>
+              </a:rPr>
+              <a:t>第 5 题</a:t>
+            </a:r>
+          </a:p>
+        </p:txBody>
+      </p:sp>
+      <p:sp>
+        <p:nvSpPr>
+          <p:cNvPr id="5" name="Rounded Rectangle 4"/>
+          <p:cNvSpPr/>
+          <p:nvPr/>
+        </p:nvSpPr>
+        <p:spPr>
+          <a:xfrm>
+            <a:off x="10097719" y="219456"/>
+            <a:ext cx="1545336" cy="365760"/>
+          </a:xfrm>
+          <a:prstGeom prst="roundRect">
+            <a:avLst>
+              <a:gd name="adj" fmla="val 30000"/>
+            </a:avLst>
+          </a:prstGeom>
+          <a:solidFill>
+            <a:srgbClr val="2E4A78"/>
+          </a:solidFill>
+          <a:ln>
+            <a:noFill/>
+          </a:ln>
+          <a:effectLst/>
+        </p:spPr>
+        <p:style>
+          <a:lnRef idx="1">
+            <a:schemeClr val="accent1"/>
+          </a:lnRef>
+          <a:fillRef idx="3">
+            <a:schemeClr val="accent1"/>
+          </a:fillRef>
+          <a:effectRef idx="2">
+            <a:schemeClr val="accent1"/>
+          </a:effectRef>
+          <a:fontRef idx="minor">
+            <a:schemeClr val="lt1"/>
+          </a:fontRef>
+        </p:style>
+        <p:txBody>
+          <a:bodyPr rtlCol="0" anchor="ctr"/>
+          <a:lstStyle/>
+          <a:p>
+            <a:pPr algn="ctr"/>
+          </a:p>
+        </p:txBody>
+      </p:sp>
+      <p:sp>
+        <p:nvSpPr>
+          <p:cNvPr id="6" name="TextBox 5"/>
+          <p:cNvSpPr txBox="1"/>
+          <p:nvPr/>
+        </p:nvSpPr>
+        <p:spPr>
+          <a:xfrm>
+            <a:off x="10097719" y="237744"/>
+            <a:ext cx="1545336" cy="329184"/>
+          </a:xfrm>
+          <a:prstGeom prst="rect">
+            <a:avLst/>
+          </a:prstGeom>
+          <a:noFill/>
+        </p:spPr>
+        <p:txBody>
+          <a:bodyPr wrap="square" anchor="ctr" lIns="54864" rIns="54864" tIns="0" bIns="0">
+            <a:spAutoFit/>
+          </a:bodyPr>
+          <a:lstStyle/>
+          <a:p>
+            <a:pPr algn="ctr">
+              <a:lnSpc>
+                <a:spcPct val="130000"/>
+              </a:lnSpc>
+              <a:defRPr sz="1100"/>
+            </a:pPr>
+            <a:r>
+              <a:rPr sz="1100" b="1" u="none">
+                <a:solidFill>
+                  <a:srgbClr val="FFFFFF"/>
+                </a:solidFill>
+                <a:latin typeface="Times New Roman"/>
+                <a:ea typeface="微软雅黑"/>
+              </a:rPr>
+              <a:t>二、多项选择题</a:t>
+            </a:r>
+          </a:p>
+        </p:txBody>
+      </p:sp>
+      <p:sp>
+        <p:nvSpPr>
+          <p:cNvPr id="7" name="Rectangle 6"/>
+          <p:cNvSpPr/>
+          <p:nvPr/>
+        </p:nvSpPr>
+        <p:spPr>
+          <a:xfrm>
+            <a:off x="548640" y="1097280"/>
+            <a:ext cx="64008" cy="566928"/>
+          </a:xfrm>
+          <a:prstGeom prst="rect">
+            <a:avLst/>
+          </a:prstGeom>
+          <a:solidFill>
+            <a:srgbClr val="16A34A"/>
+          </a:solidFill>
+          <a:ln>
+            <a:noFill/>
+          </a:ln>
+          <a:effectLst/>
+        </p:spPr>
+        <p:style>
+          <a:lnRef idx="1">
+            <a:schemeClr val="accent1"/>
+          </a:lnRef>
+          <a:fillRef idx="3">
+            <a:schemeClr val="accent1"/>
+          </a:fillRef>
+          <a:effectRef idx="2">
+            <a:schemeClr val="accent1"/>
+          </a:effectRef>
+          <a:fontRef idx="minor">
+            <a:schemeClr val="lt1"/>
+          </a:fontRef>
+        </p:style>
+        <p:txBody>
+          <a:bodyPr rtlCol="0" anchor="ctr"/>
+          <a:lstStyle/>
+          <a:p>
+            <a:pPr algn="ctr"/>
+          </a:p>
+        </p:txBody>
+      </p:sp>
+      <p:sp>
+        <p:nvSpPr>
+          <p:cNvPr id="8" name="TextBox 7"/>
+          <p:cNvSpPr txBox="1"/>
+          <p:nvPr/>
+        </p:nvSpPr>
+        <p:spPr>
+          <a:xfrm>
+            <a:off x="731520" y="1097280"/>
+            <a:ext cx="10911535" cy="566928"/>
+          </a:xfrm>
+          <a:prstGeom prst="rect">
+            <a:avLst/>
+          </a:prstGeom>
+          <a:noFill/>
+        </p:spPr>
+        <p:txBody>
+          <a:bodyPr wrap="square" anchor="t" lIns="54864" rIns="54864" tIns="0" bIns="0">
+            <a:spAutoFit/>
+          </a:bodyPr>
+          <a:lstStyle/>
+          <a:p>
+            <a:pPr algn="l">
+              <a:lnSpc>
+                <a:spcPct val="135000"/>
+              </a:lnSpc>
+              <a:defRPr sz="2200"/>
+            </a:pPr>
+            <a:r>
+              <a:rPr sz="2200" b="1" u="none">
+                <a:solidFill>
+                  <a:srgbClr val="15803D"/>
+                </a:solidFill>
+                <a:latin typeface="Times New Roman"/>
+                <a:ea typeface="微软雅黑"/>
+              </a:rPr>
+              <a:t>答案：</a:t>
+            </a:r>
+            <a:r>
+              <a:rPr sz="2200" b="0" u="none">
+                <a:solidFill>
+                  <a:srgbClr val="15803D"/>
+                </a:solidFill>
+                <a:latin typeface="Times New Roman"/>
+                <a:ea typeface="微软雅黑"/>
+              </a:rPr>
+              <a:t>BC</a:t>
+            </a:r>
+          </a:p>
+        </p:txBody>
+      </p:sp>
+      <p:sp>
+        <p:nvSpPr>
+          <p:cNvPr id="9" name="TextBox 8"/>
+          <p:cNvSpPr txBox="1"/>
+          <p:nvPr/>
+        </p:nvSpPr>
+        <p:spPr>
+          <a:xfrm>
+            <a:off x="566928" y="1828800"/>
+            <a:ext cx="11048695" cy="4389120"/>
+          </a:xfrm>
+          <a:prstGeom prst="rect">
+            <a:avLst/>
+          </a:prstGeom>
+          <a:noFill/>
+        </p:spPr>
+        <p:txBody>
+          <a:bodyPr wrap="square" anchor="t" lIns="54864" rIns="54864" tIns="0" bIns="0">
+            <a:spAutoFit/>
+          </a:bodyPr>
+          <a:lstStyle/>
+          <a:p>
+            <a:pPr algn="l">
+              <a:lnSpc>
+                <a:spcPct val="145000"/>
+              </a:lnSpc>
+              <a:defRPr sz="2000"/>
+            </a:pPr>
+            <a:r>
+              <a:rPr sz="2000" b="1" u="none">
+                <a:solidFill>
+                  <a:srgbClr val="475569"/>
+                </a:solidFill>
+                <a:latin typeface="Times New Roman"/>
+                <a:ea typeface="微软雅黑"/>
+              </a:rPr>
+              <a:t>解析　</a:t>
+            </a:r>
+            <a:r>
+              <a:rPr sz="2000" b="0" u="none">
+                <a:solidFill>
+                  <a:srgbClr val="111827"/>
+                </a:solidFill>
+                <a:latin typeface="Times New Roman"/>
+                <a:ea typeface="微软雅黑"/>
+              </a:rPr>
+              <a:t>自由落体是初速度为零、只受重力的匀加速直线运动；同一地点 g 相同；位移与时间的平方成正比，不是与时间成正比。</a:t>
+            </a:r>
+          </a:p>
+        </p:txBody>
+      </p:sp>
+      <p:sp>
+        <p:nvSpPr>
+          <p:cNvPr id="10" name="Rectangle 9"/>
+          <p:cNvSpPr/>
+          <p:nvPr/>
+        </p:nvSpPr>
+        <p:spPr>
+          <a:xfrm>
+            <a:off x="0" y="6739128"/>
+            <a:ext cx="12191695" cy="118872"/>
+          </a:xfrm>
+          <a:prstGeom prst="rect">
+            <a:avLst/>
+          </a:prstGeom>
+          <a:solidFill>
+            <a:srgbClr val="475569"/>
+          </a:solidFill>
+          <a:ln>
+            <a:noFill/>
+          </a:ln>
+          <a:effectLst/>
+        </p:spPr>
+        <p:style>
+          <a:lnRef idx="1">
+            <a:schemeClr val="accent1"/>
+          </a:lnRef>
+          <a:fillRef idx="3">
+            <a:schemeClr val="accent1"/>
+          </a:fillRef>
+          <a:effectRef idx="2">
+            <a:schemeClr val="accent1"/>
+          </a:effectRef>
+          <a:fontRef idx="minor">
+            <a:schemeClr val="lt1"/>
+          </a:fontRef>
+        </p:style>
+        <p:txBody>
+          <a:bodyPr rtlCol="0" anchor="ctr"/>
+          <a:lstStyle/>
+          <a:p>
+            <a:pPr algn="ctr"/>
+          </a:p>
+        </p:txBody>
+      </p:sp>
+      <p:sp>
+        <p:nvSpPr>
+          <p:cNvPr id="11" name="TextBox 10"/>
+          <p:cNvSpPr txBox="1"/>
+          <p:nvPr/>
+        </p:nvSpPr>
+        <p:spPr>
+          <a:xfrm>
+            <a:off x="548640" y="6345936"/>
+            <a:ext cx="8595360" cy="274320"/>
+          </a:xfrm>
+          <a:prstGeom prst="rect">
+            <a:avLst/>
+          </a:prstGeom>
+          <a:noFill/>
+        </p:spPr>
+        <p:txBody>
+          <a:bodyPr wrap="square" anchor="t" lIns="54864" rIns="54864" tIns="0" bIns="0">
+            <a:spAutoFit/>
+          </a:bodyPr>
+          <a:lstStyle/>
+          <a:p>
+            <a:pPr algn="l">
+              <a:lnSpc>
+                <a:spcPct val="130000"/>
+              </a:lnSpc>
+              <a:defRPr sz="1000"/>
+            </a:pPr>
+            <a:r>
+              <a:rPr sz="1000" b="0" u="none">
+                <a:solidFill>
+                  <a:srgbClr val="8A94A6"/>
+                </a:solidFill>
+                <a:latin typeface="Times New Roman"/>
+                <a:ea typeface="微软雅黑"/>
+              </a:rPr>
+              <a:t>胶州四中高三级部物理学科单元达标评测题</a:t>
+            </a:r>
+          </a:p>
+        </p:txBody>
+      </p:sp>
+      <p:sp>
+        <p:nvSpPr>
+          <p:cNvPr id="12" name="TextBox 11"/>
+          <p:cNvSpPr txBox="1"/>
+          <p:nvPr/>
+        </p:nvSpPr>
+        <p:spPr>
+          <a:xfrm>
+            <a:off x="11048695" y="6345936"/>
+            <a:ext cx="685800" cy="274320"/>
+          </a:xfrm>
+          <a:prstGeom prst="rect">
+            <a:avLst/>
+          </a:prstGeom>
+          <a:noFill/>
+        </p:spPr>
+        <p:txBody>
+          <a:bodyPr wrap="square" anchor="t" lIns="54864" rIns="54864" tIns="0" bIns="0">
+            <a:spAutoFit/>
+          </a:bodyPr>
+          <a:lstStyle/>
+          <a:p>
+            <a:pPr algn="r">
+              <a:lnSpc>
+                <a:spcPct val="130000"/>
+              </a:lnSpc>
+              <a:defRPr sz="1000"/>
+            </a:pPr>
+            <a:r>
+              <a:rPr sz="1000" b="0" u="none">
+                <a:solidFill>
+                  <a:srgbClr val="8A94A6"/>
+                </a:solidFill>
+                <a:latin typeface="Times New Roman"/>
+                <a:ea typeface="微软雅黑"/>
+              </a:rPr>
+              <a:t>12</a:t>
+            </a:r>
+          </a:p>
+        </p:txBody>
+      </p:sp>
+    </p:spTree>
+  </p:cSld>
+  <p:clrMapOvr>
+    <a:masterClrMapping/>
+  </p:clrMapOvr>
+</p:sld>
+</file>
+
+<file path=ppt/slides/slide13.xml><?xml version="1.0" encoding="utf-8"?>
+<p:sld xmlns:a="http://schemas.openxmlformats.org/drawingml/2006/main" xmlns:p="http://schemas.openxmlformats.org/presentationml/2006/main" xmlns:r="http://schemas.openxmlformats.org/officeDocument/2006/relationships">
+  <p:cSld>
+    <p:spTree>
+      <p:nvGrpSpPr>
+        <p:cNvPr id="1" name=""/>
+        <p:cNvGrpSpPr/>
+        <p:nvPr/>
+      </p:nvGrpSpPr>
+      <p:grpSpPr/>
+      <p:sp>
+        <p:nvSpPr>
+          <p:cNvPr id="2" name="Rectangle 1"/>
+          <p:cNvSpPr/>
+          <p:nvPr/>
+        </p:nvSpPr>
+        <p:spPr>
+          <a:xfrm>
+            <a:off x="0" y="0"/>
+            <a:ext cx="12191695" cy="822960"/>
+          </a:xfrm>
+          <a:prstGeom prst="rect">
+            <a:avLst/>
+          </a:prstGeom>
+          <a:solidFill>
+            <a:srgbClr val="1F2937"/>
+          </a:solidFill>
+          <a:ln>
+            <a:noFill/>
+          </a:ln>
+          <a:effectLst/>
+        </p:spPr>
+        <p:style>
+          <a:lnRef idx="1">
+            <a:schemeClr val="accent1"/>
+          </a:lnRef>
+          <a:fillRef idx="3">
+            <a:schemeClr val="accent1"/>
+          </a:fillRef>
+          <a:effectRef idx="2">
+            <a:schemeClr val="accent1"/>
+          </a:effectRef>
+          <a:fontRef idx="minor">
+            <a:schemeClr val="lt1"/>
+          </a:fontRef>
+        </p:style>
+        <p:txBody>
+          <a:bodyPr rtlCol="0" anchor="ctr"/>
+          <a:lstStyle/>
+          <a:p>
+            <a:pPr algn="ctr"/>
+          </a:p>
+        </p:txBody>
+      </p:sp>
+      <p:sp>
+        <p:nvSpPr>
+          <p:cNvPr id="3" name="Rectangle 2"/>
+          <p:cNvSpPr/>
+          <p:nvPr/>
+        </p:nvSpPr>
+        <p:spPr>
+          <a:xfrm>
+            <a:off x="0" y="822960"/>
+            <a:ext cx="12191695" cy="45720"/>
+          </a:xfrm>
+          <a:prstGeom prst="rect">
+            <a:avLst/>
+          </a:prstGeom>
+          <a:solidFill>
+            <a:srgbClr val="475569"/>
+          </a:solidFill>
+          <a:ln>
+            <a:noFill/>
+          </a:ln>
+          <a:effectLst/>
+        </p:spPr>
+        <p:style>
+          <a:lnRef idx="1">
+            <a:schemeClr val="accent1"/>
+          </a:lnRef>
+          <a:fillRef idx="3">
+            <a:schemeClr val="accent1"/>
+          </a:fillRef>
+          <a:effectRef idx="2">
+            <a:schemeClr val="accent1"/>
+          </a:effectRef>
+          <a:fontRef idx="minor">
+            <a:schemeClr val="lt1"/>
+          </a:fontRef>
+        </p:style>
+        <p:txBody>
+          <a:bodyPr rtlCol="0" anchor="ctr"/>
+          <a:lstStyle/>
+          <a:p>
+            <a:pPr algn="ctr"/>
+          </a:p>
+        </p:txBody>
+      </p:sp>
+      <p:sp>
+        <p:nvSpPr>
+          <p:cNvPr id="4" name="TextBox 3"/>
+          <p:cNvSpPr txBox="1"/>
+          <p:nvPr/>
+        </p:nvSpPr>
+        <p:spPr>
+          <a:xfrm>
+            <a:off x="548640" y="137160"/>
+            <a:ext cx="8442656" cy="548640"/>
+          </a:xfrm>
+          <a:prstGeom prst="rect">
+            <a:avLst/>
+          </a:prstGeom>
+          <a:noFill/>
+        </p:spPr>
+        <p:txBody>
+          <a:bodyPr wrap="square" anchor="ctr" lIns="54864" rIns="54864" tIns="0" bIns="0">
+            <a:spAutoFit/>
+          </a:bodyPr>
+          <a:lstStyle/>
+          <a:p>
+            <a:pPr algn="l">
+              <a:lnSpc>
+                <a:spcPct val="130000"/>
+              </a:lnSpc>
+              <a:defRPr sz="2600"/>
+            </a:pPr>
+            <a:r>
+              <a:rPr sz="2600" b="1" u="none">
+                <a:solidFill>
+                  <a:srgbClr val="FFFFFF"/>
+                </a:solidFill>
+                <a:latin typeface="Times New Roman"/>
+                <a:ea typeface="微软雅黑"/>
+              </a:rPr>
+              <a:t>第 6 题</a:t>
+            </a:r>
+          </a:p>
+        </p:txBody>
+      </p:sp>
+      <p:sp>
+        <p:nvSpPr>
+          <p:cNvPr id="5" name="Rounded Rectangle 4"/>
+          <p:cNvSpPr/>
+          <p:nvPr/>
+        </p:nvSpPr>
+        <p:spPr>
+          <a:xfrm>
+            <a:off x="10271455" y="219456"/>
+            <a:ext cx="1371600" cy="365760"/>
+          </a:xfrm>
+          <a:prstGeom prst="roundRect">
+            <a:avLst>
+              <a:gd name="adj" fmla="val 30000"/>
+            </a:avLst>
+          </a:prstGeom>
+          <a:solidFill>
+            <a:srgbClr val="2E4A78"/>
+          </a:solidFill>
+          <a:ln>
+            <a:noFill/>
+          </a:ln>
+          <a:effectLst/>
+        </p:spPr>
+        <p:style>
+          <a:lnRef idx="1">
+            <a:schemeClr val="accent1"/>
+          </a:lnRef>
+          <a:fillRef idx="3">
+            <a:schemeClr val="accent1"/>
+          </a:fillRef>
+          <a:effectRef idx="2">
+            <a:schemeClr val="accent1"/>
+          </a:effectRef>
+          <a:fontRef idx="minor">
+            <a:schemeClr val="lt1"/>
+          </a:fontRef>
+        </p:style>
+        <p:txBody>
+          <a:bodyPr rtlCol="0" anchor="ctr"/>
+          <a:lstStyle/>
+          <a:p>
+            <a:pPr algn="ctr"/>
+          </a:p>
+        </p:txBody>
+      </p:sp>
+      <p:sp>
+        <p:nvSpPr>
+          <p:cNvPr id="6" name="TextBox 5"/>
+          <p:cNvSpPr txBox="1"/>
+          <p:nvPr/>
+        </p:nvSpPr>
+        <p:spPr>
+          <a:xfrm>
+            <a:off x="10271455" y="237744"/>
+            <a:ext cx="1371600" cy="329184"/>
+          </a:xfrm>
+          <a:prstGeom prst="rect">
+            <a:avLst/>
+          </a:prstGeom>
+          <a:noFill/>
+        </p:spPr>
+        <p:txBody>
+          <a:bodyPr wrap="square" anchor="ctr" lIns="54864" rIns="54864" tIns="0" bIns="0">
+            <a:spAutoFit/>
+          </a:bodyPr>
+          <a:lstStyle/>
+          <a:p>
+            <a:pPr algn="ctr">
+              <a:lnSpc>
+                <a:spcPct val="130000"/>
+              </a:lnSpc>
+              <a:defRPr sz="1100"/>
+            </a:pPr>
+            <a:r>
+              <a:rPr sz="1100" b="1" u="none">
+                <a:solidFill>
+                  <a:srgbClr val="FFFFFF"/>
+                </a:solidFill>
+                <a:latin typeface="Times New Roman"/>
+                <a:ea typeface="微软雅黑"/>
+              </a:rPr>
+              <a:t>三、非选择题</a:t>
+            </a:r>
+          </a:p>
+        </p:txBody>
+      </p:sp>
+      <p:sp>
+        <p:nvSpPr>
+          <p:cNvPr id="7" name="TextBox 6"/>
+          <p:cNvSpPr txBox="1"/>
+          <p:nvPr/>
+        </p:nvSpPr>
+        <p:spPr>
+          <a:xfrm>
+            <a:off x="548640" y="1078992"/>
+            <a:ext cx="11094415" cy="2103120"/>
+          </a:xfrm>
+          <a:prstGeom prst="rect">
+            <a:avLst/>
+          </a:prstGeom>
+          <a:noFill/>
+        </p:spPr>
+        <p:txBody>
+          <a:bodyPr wrap="square" anchor="t" lIns="54864" rIns="54864" tIns="0" bIns="0">
+            <a:spAutoFit/>
+          </a:bodyPr>
+          <a:lstStyle/>
+          <a:p>
+            <a:pPr algn="l">
+              <a:lnSpc>
+                <a:spcPct val="145000"/>
+              </a:lnSpc>
+              <a:defRPr sz="2200"/>
+            </a:pPr>
+            <a:r>
+              <a:rPr sz="2200" b="0" u="none">
+                <a:solidFill>
+                  <a:srgbClr val="111827"/>
+                </a:solidFill>
+                <a:latin typeface="Times New Roman"/>
+                <a:ea typeface="微软雅黑"/>
+              </a:rPr>
+              <a:t>（12分）一物体从静止开始做匀加速直线运动，加速度a=2 m/s²。求： （1）3 s末的速度； （2）前4 s内的位移； （3）第4 s内的位移。</a:t>
+            </a:r>
+          </a:p>
+        </p:txBody>
+      </p:sp>
+      <p:sp>
+        <p:nvSpPr>
+          <p:cNvPr id="8" name="Rectangle 7"/>
+          <p:cNvSpPr/>
+          <p:nvPr/>
+        </p:nvSpPr>
+        <p:spPr>
+          <a:xfrm>
+            <a:off x="0" y="6739128"/>
+            <a:ext cx="12191695" cy="118872"/>
+          </a:xfrm>
+          <a:prstGeom prst="rect">
+            <a:avLst/>
+          </a:prstGeom>
+          <a:solidFill>
+            <a:srgbClr val="475569"/>
+          </a:solidFill>
+          <a:ln>
+            <a:noFill/>
+          </a:ln>
+          <a:effectLst/>
+        </p:spPr>
+        <p:style>
+          <a:lnRef idx="1">
+            <a:schemeClr val="accent1"/>
+          </a:lnRef>
+          <a:fillRef idx="3">
+            <a:schemeClr val="accent1"/>
+          </a:fillRef>
+          <a:effectRef idx="2">
+            <a:schemeClr val="accent1"/>
+          </a:effectRef>
+          <a:fontRef idx="minor">
+            <a:schemeClr val="lt1"/>
+          </a:fontRef>
+        </p:style>
+        <p:txBody>
+          <a:bodyPr rtlCol="0" anchor="ctr"/>
+          <a:lstStyle/>
+          <a:p>
+            <a:pPr algn="ctr"/>
+          </a:p>
+        </p:txBody>
+      </p:sp>
+      <p:sp>
+        <p:nvSpPr>
+          <p:cNvPr id="9" name="TextBox 8"/>
+          <p:cNvSpPr txBox="1"/>
+          <p:nvPr/>
+        </p:nvSpPr>
+        <p:spPr>
+          <a:xfrm>
+            <a:off x="548640" y="6345936"/>
+            <a:ext cx="8595360" cy="274320"/>
+          </a:xfrm>
+          <a:prstGeom prst="rect">
+            <a:avLst/>
+          </a:prstGeom>
+          <a:noFill/>
+        </p:spPr>
+        <p:txBody>
+          <a:bodyPr wrap="square" anchor="t" lIns="54864" rIns="54864" tIns="0" bIns="0">
+            <a:spAutoFit/>
+          </a:bodyPr>
+          <a:lstStyle/>
+          <a:p>
+            <a:pPr algn="l">
+              <a:lnSpc>
+                <a:spcPct val="130000"/>
+              </a:lnSpc>
+              <a:defRPr sz="1000"/>
+            </a:pPr>
+            <a:r>
+              <a:rPr sz="1000" b="0" u="none">
+                <a:solidFill>
+                  <a:srgbClr val="8A94A6"/>
+                </a:solidFill>
+                <a:latin typeface="Times New Roman"/>
+                <a:ea typeface="微软雅黑"/>
+              </a:rPr>
+              <a:t>胶州四中高三级部物理学科单元达标评测题</a:t>
+            </a:r>
+          </a:p>
+        </p:txBody>
+      </p:sp>
+      <p:sp>
+        <p:nvSpPr>
+          <p:cNvPr id="10" name="TextBox 9"/>
+          <p:cNvSpPr txBox="1"/>
+          <p:nvPr/>
+        </p:nvSpPr>
+        <p:spPr>
+          <a:xfrm>
+            <a:off x="11048695" y="6345936"/>
+            <a:ext cx="685800" cy="274320"/>
+          </a:xfrm>
+          <a:prstGeom prst="rect">
+            <a:avLst/>
+          </a:prstGeom>
+          <a:noFill/>
+        </p:spPr>
+        <p:txBody>
+          <a:bodyPr wrap="square" anchor="t" lIns="54864" rIns="54864" tIns="0" bIns="0">
+            <a:spAutoFit/>
+          </a:bodyPr>
+          <a:lstStyle/>
+          <a:p>
+            <a:pPr algn="r">
+              <a:lnSpc>
+                <a:spcPct val="130000"/>
+              </a:lnSpc>
+              <a:defRPr sz="1000"/>
+            </a:pPr>
+            <a:r>
+              <a:rPr sz="1000" b="0" u="none">
+                <a:solidFill>
+                  <a:srgbClr val="8A94A6"/>
+                </a:solidFill>
+                <a:latin typeface="Times New Roman"/>
+                <a:ea typeface="微软雅黑"/>
+              </a:rPr>
+              <a:t>13</a:t>
+            </a:r>
+          </a:p>
+        </p:txBody>
+      </p:sp>
+    </p:spTree>
+  </p:cSld>
+  <p:clrMapOvr>
+    <a:masterClrMapping/>
+  </p:clrMapOvr>
+</p:sld>
+</file>
+
+<file path=ppt/slides/slide14.xml><?xml version="1.0" encoding="utf-8"?>
+<p:sld xmlns:a="http://schemas.openxmlformats.org/drawingml/2006/main" xmlns:p="http://schemas.openxmlformats.org/presentationml/2006/main" xmlns:r="http://schemas.openxmlformats.org/officeDocument/2006/relationships">
+  <p:cSld>
+    <p:spTree>
+      <p:nvGrpSpPr>
+        <p:cNvPr id="1" name=""/>
+        <p:cNvGrpSpPr/>
+        <p:nvPr/>
+      </p:nvGrpSpPr>
+      <p:grpSpPr/>
+      <p:sp>
+        <p:nvSpPr>
+          <p:cNvPr id="2" name="Rectangle 1"/>
+          <p:cNvSpPr/>
+          <p:nvPr/>
+        </p:nvSpPr>
+        <p:spPr>
+          <a:xfrm>
+            <a:off x="0" y="0"/>
+            <a:ext cx="12191695" cy="822960"/>
+          </a:xfrm>
+          <a:prstGeom prst="rect">
+            <a:avLst/>
+          </a:prstGeom>
+          <a:solidFill>
+            <a:srgbClr val="1F2937"/>
+          </a:solidFill>
+          <a:ln>
+            <a:noFill/>
+          </a:ln>
+          <a:effectLst/>
+        </p:spPr>
+        <p:style>
+          <a:lnRef idx="1">
+            <a:schemeClr val="accent1"/>
+          </a:lnRef>
+          <a:fillRef idx="3">
+            <a:schemeClr val="accent1"/>
+          </a:fillRef>
+          <a:effectRef idx="2">
+            <a:schemeClr val="accent1"/>
+          </a:effectRef>
+          <a:fontRef idx="minor">
+            <a:schemeClr val="lt1"/>
+          </a:fontRef>
+        </p:style>
+        <p:txBody>
+          <a:bodyPr rtlCol="0" anchor="ctr"/>
+          <a:lstStyle/>
+          <a:p>
+            <a:pPr algn="ctr"/>
+          </a:p>
+        </p:txBody>
+      </p:sp>
+      <p:sp>
+        <p:nvSpPr>
+          <p:cNvPr id="3" name="Rectangle 2"/>
+          <p:cNvSpPr/>
+          <p:nvPr/>
+        </p:nvSpPr>
+        <p:spPr>
+          <a:xfrm>
+            <a:off x="0" y="822960"/>
+            <a:ext cx="12191695" cy="45720"/>
+          </a:xfrm>
+          <a:prstGeom prst="rect">
+            <a:avLst/>
+          </a:prstGeom>
+          <a:solidFill>
+            <a:srgbClr val="475569"/>
+          </a:solidFill>
+          <a:ln>
+            <a:noFill/>
+          </a:ln>
+          <a:effectLst/>
+        </p:spPr>
+        <p:style>
+          <a:lnRef idx="1">
+            <a:schemeClr val="accent1"/>
+          </a:lnRef>
+          <a:fillRef idx="3">
+            <a:schemeClr val="accent1"/>
+          </a:fillRef>
+          <a:effectRef idx="2">
+            <a:schemeClr val="accent1"/>
+          </a:effectRef>
+          <a:fontRef idx="minor">
+            <a:schemeClr val="lt1"/>
+          </a:fontRef>
+        </p:style>
+        <p:txBody>
+          <a:bodyPr rtlCol="0" anchor="ctr"/>
+          <a:lstStyle/>
+          <a:p>
+            <a:pPr algn="ctr"/>
+          </a:p>
+        </p:txBody>
+      </p:sp>
+      <p:sp>
+        <p:nvSpPr>
+          <p:cNvPr id="4" name="TextBox 3"/>
+          <p:cNvSpPr txBox="1"/>
+          <p:nvPr/>
+        </p:nvSpPr>
+        <p:spPr>
+          <a:xfrm>
+            <a:off x="548640" y="137160"/>
+            <a:ext cx="8442656" cy="548640"/>
+          </a:xfrm>
+          <a:prstGeom prst="rect">
+            <a:avLst/>
+          </a:prstGeom>
+          <a:noFill/>
+        </p:spPr>
+        <p:txBody>
+          <a:bodyPr wrap="square" anchor="ctr" lIns="54864" rIns="54864" tIns="0" bIns="0">
+            <a:spAutoFit/>
+          </a:bodyPr>
+          <a:lstStyle/>
+          <a:p>
+            <a:pPr algn="l">
+              <a:lnSpc>
+                <a:spcPct val="130000"/>
+              </a:lnSpc>
+              <a:defRPr sz="2600"/>
+            </a:pPr>
+            <a:r>
+              <a:rPr sz="2600" b="1" u="none">
+                <a:solidFill>
+                  <a:srgbClr val="FFFFFF"/>
+                </a:solidFill>
+                <a:latin typeface="Times New Roman"/>
+                <a:ea typeface="微软雅黑"/>
+              </a:rPr>
+              <a:t>第 6 题</a:t>
+            </a:r>
+          </a:p>
+        </p:txBody>
+      </p:sp>
+      <p:sp>
+        <p:nvSpPr>
+          <p:cNvPr id="5" name="Rounded Rectangle 4"/>
+          <p:cNvSpPr/>
+          <p:nvPr/>
+        </p:nvSpPr>
+        <p:spPr>
+          <a:xfrm>
+            <a:off x="10271455" y="219456"/>
+            <a:ext cx="1371600" cy="365760"/>
+          </a:xfrm>
+          <a:prstGeom prst="roundRect">
+            <a:avLst>
+              <a:gd name="adj" fmla="val 30000"/>
+            </a:avLst>
+          </a:prstGeom>
+          <a:solidFill>
+            <a:srgbClr val="2E4A78"/>
+          </a:solidFill>
+          <a:ln>
+            <a:noFill/>
+          </a:ln>
+          <a:effectLst/>
+        </p:spPr>
+        <p:style>
+          <a:lnRef idx="1">
+            <a:schemeClr val="accent1"/>
+          </a:lnRef>
+          <a:fillRef idx="3">
+            <a:schemeClr val="accent1"/>
+          </a:fillRef>
+          <a:effectRef idx="2">
+            <a:schemeClr val="accent1"/>
+          </a:effectRef>
+          <a:fontRef idx="minor">
+            <a:schemeClr val="lt1"/>
+          </a:fontRef>
+        </p:style>
+        <p:txBody>
+          <a:bodyPr rtlCol="0" anchor="ctr"/>
+          <a:lstStyle/>
+          <a:p>
+            <a:pPr algn="ctr"/>
+          </a:p>
+        </p:txBody>
+      </p:sp>
+      <p:sp>
+        <p:nvSpPr>
+          <p:cNvPr id="6" name="TextBox 5"/>
+          <p:cNvSpPr txBox="1"/>
+          <p:nvPr/>
+        </p:nvSpPr>
+        <p:spPr>
+          <a:xfrm>
+            <a:off x="10271455" y="237744"/>
+            <a:ext cx="1371600" cy="329184"/>
+          </a:xfrm>
+          <a:prstGeom prst="rect">
+            <a:avLst/>
+          </a:prstGeom>
+          <a:noFill/>
+        </p:spPr>
+        <p:txBody>
+          <a:bodyPr wrap="square" anchor="ctr" lIns="54864" rIns="54864" tIns="0" bIns="0">
+            <a:spAutoFit/>
+          </a:bodyPr>
+          <a:lstStyle/>
+          <a:p>
+            <a:pPr algn="ctr">
+              <a:lnSpc>
+                <a:spcPct val="130000"/>
+              </a:lnSpc>
+              <a:defRPr sz="1100"/>
+            </a:pPr>
+            <a:r>
+              <a:rPr sz="1100" b="1" u="none">
+                <a:solidFill>
+                  <a:srgbClr val="FFFFFF"/>
+                </a:solidFill>
+                <a:latin typeface="Times New Roman"/>
+                <a:ea typeface="微软雅黑"/>
+              </a:rPr>
+              <a:t>三、非选择题</a:t>
+            </a:r>
+          </a:p>
+        </p:txBody>
+      </p:sp>
+      <p:sp>
+        <p:nvSpPr>
+          <p:cNvPr id="7" name="Rectangle 6"/>
+          <p:cNvSpPr/>
+          <p:nvPr/>
+        </p:nvSpPr>
+        <p:spPr>
+          <a:xfrm>
+            <a:off x="548640" y="1097280"/>
+            <a:ext cx="64008" cy="960120"/>
+          </a:xfrm>
+          <a:prstGeom prst="rect">
+            <a:avLst/>
+          </a:prstGeom>
+          <a:solidFill>
+            <a:srgbClr val="16A34A"/>
+          </a:solidFill>
+          <a:ln>
+            <a:noFill/>
+          </a:ln>
+          <a:effectLst/>
+        </p:spPr>
+        <p:style>
+          <a:lnRef idx="1">
+            <a:schemeClr val="accent1"/>
+          </a:lnRef>
+          <a:fillRef idx="3">
+            <a:schemeClr val="accent1"/>
+          </a:fillRef>
+          <a:effectRef idx="2">
+            <a:schemeClr val="accent1"/>
+          </a:effectRef>
+          <a:fontRef idx="minor">
+            <a:schemeClr val="lt1"/>
+          </a:fontRef>
+        </p:style>
+        <p:txBody>
+          <a:bodyPr rtlCol="0" anchor="ctr"/>
+          <a:lstStyle/>
+          <a:p>
+            <a:pPr algn="ctr"/>
+          </a:p>
+        </p:txBody>
+      </p:sp>
+      <p:sp>
+        <p:nvSpPr>
+          <p:cNvPr id="8" name="TextBox 7"/>
+          <p:cNvSpPr txBox="1"/>
+          <p:nvPr/>
+        </p:nvSpPr>
+        <p:spPr>
+          <a:xfrm>
+            <a:off x="731520" y="1097280"/>
+            <a:ext cx="10911535" cy="960120"/>
+          </a:xfrm>
+          <a:prstGeom prst="rect">
+            <a:avLst/>
+          </a:prstGeom>
+          <a:noFill/>
+        </p:spPr>
+        <p:txBody>
+          <a:bodyPr wrap="square" anchor="t" lIns="54864" rIns="54864" tIns="0" bIns="0">
+            <a:spAutoFit/>
+          </a:bodyPr>
+          <a:lstStyle/>
+          <a:p>
+            <a:pPr algn="l">
+              <a:lnSpc>
+                <a:spcPct val="135000"/>
+              </a:lnSpc>
+              <a:defRPr sz="1900"/>
+            </a:pPr>
+            <a:r>
+              <a:rPr sz="1900" b="1" u="none">
+                <a:solidFill>
+                  <a:srgbClr val="15803D"/>
+                </a:solidFill>
+                <a:latin typeface="Times New Roman"/>
+                <a:ea typeface="微软雅黑"/>
+              </a:rPr>
+              <a:t>答案：</a:t>
+            </a:r>
+            <a:r>
+              <a:rPr sz="1900" b="0" u="none">
+                <a:solidFill>
+                  <a:srgbClr val="15803D"/>
+                </a:solidFill>
+                <a:latin typeface="Times New Roman"/>
+                <a:ea typeface="微软雅黑"/>
+              </a:rPr>
+              <a:t>（1）v=at=6 m/s；（2）x=½at²=16 m；（3）第4 s内位移=x4−x3=16−9=7 m。</a:t>
+            </a:r>
+          </a:p>
+        </p:txBody>
+      </p:sp>
+      <p:sp>
+        <p:nvSpPr>
+          <p:cNvPr id="9" name="Rectangle 8"/>
+          <p:cNvSpPr/>
+          <p:nvPr/>
+        </p:nvSpPr>
+        <p:spPr>
+          <a:xfrm>
+            <a:off x="0" y="6739128"/>
+            <a:ext cx="12191695" cy="118872"/>
+          </a:xfrm>
+          <a:prstGeom prst="rect">
+            <a:avLst/>
+          </a:prstGeom>
+          <a:solidFill>
+            <a:srgbClr val="475569"/>
+          </a:solidFill>
+          <a:ln>
+            <a:noFill/>
+          </a:ln>
+          <a:effectLst/>
+        </p:spPr>
+        <p:style>
+          <a:lnRef idx="1">
+            <a:schemeClr val="accent1"/>
+          </a:lnRef>
+          <a:fillRef idx="3">
+            <a:schemeClr val="accent1"/>
+          </a:fillRef>
+          <a:effectRef idx="2">
+            <a:schemeClr val="accent1"/>
+          </a:effectRef>
+          <a:fontRef idx="minor">
+            <a:schemeClr val="lt1"/>
+          </a:fontRef>
+        </p:style>
+        <p:txBody>
+          <a:bodyPr rtlCol="0" anchor="ctr"/>
+          <a:lstStyle/>
+          <a:p>
+            <a:pPr algn="ctr"/>
+          </a:p>
+        </p:txBody>
+      </p:sp>
+      <p:sp>
+        <p:nvSpPr>
+          <p:cNvPr id="10" name="TextBox 9"/>
+          <p:cNvSpPr txBox="1"/>
+          <p:nvPr/>
+        </p:nvSpPr>
+        <p:spPr>
+          <a:xfrm>
+            <a:off x="548640" y="6345936"/>
+            <a:ext cx="8595360" cy="274320"/>
+          </a:xfrm>
+          <a:prstGeom prst="rect">
+            <a:avLst/>
+          </a:prstGeom>
+          <a:noFill/>
+        </p:spPr>
+        <p:txBody>
+          <a:bodyPr wrap="square" anchor="t" lIns="54864" rIns="54864" tIns="0" bIns="0">
+            <a:spAutoFit/>
+          </a:bodyPr>
+          <a:lstStyle/>
+          <a:p>
+            <a:pPr algn="l">
+              <a:lnSpc>
+                <a:spcPct val="130000"/>
+              </a:lnSpc>
+              <a:defRPr sz="1000"/>
+            </a:pPr>
+            <a:r>
+              <a:rPr sz="1000" b="0" u="none">
+                <a:solidFill>
+                  <a:srgbClr val="8A94A6"/>
+                </a:solidFill>
+                <a:latin typeface="Times New Roman"/>
+                <a:ea typeface="微软雅黑"/>
+              </a:rPr>
+              <a:t>胶州四中高三级部物理学科单元达标评测题</a:t>
+            </a:r>
+          </a:p>
+        </p:txBody>
+      </p:sp>
+      <p:sp>
+        <p:nvSpPr>
+          <p:cNvPr id="11" name="TextBox 10"/>
+          <p:cNvSpPr txBox="1"/>
+          <p:nvPr/>
+        </p:nvSpPr>
+        <p:spPr>
+          <a:xfrm>
+            <a:off x="11048695" y="6345936"/>
+            <a:ext cx="685800" cy="274320"/>
+          </a:xfrm>
+          <a:prstGeom prst="rect">
+            <a:avLst/>
+          </a:prstGeom>
+          <a:noFill/>
+        </p:spPr>
+        <p:txBody>
+          <a:bodyPr wrap="square" anchor="t" lIns="54864" rIns="54864" tIns="0" bIns="0">
+            <a:spAutoFit/>
+          </a:bodyPr>
+          <a:lstStyle/>
+          <a:p>
+            <a:pPr algn="r">
+              <a:lnSpc>
+                <a:spcPct val="130000"/>
+              </a:lnSpc>
+              <a:defRPr sz="1000"/>
+            </a:pPr>
+            <a:r>
+              <a:rPr sz="1000" b="0" u="none">
+                <a:solidFill>
+                  <a:srgbClr val="8A94A6"/>
+                </a:solidFill>
+                <a:latin typeface="Times New Roman"/>
+                <a:ea typeface="微软雅黑"/>
+              </a:rPr>
+              <a:t>14</a:t>
+            </a:r>
+          </a:p>
+        </p:txBody>
+      </p:sp>
+    </p:spTree>
+  </p:cSld>
+  <p:clrMapOvr>
+    <a:masterClrMapping/>
+  </p:clrMapOvr>
+</p:sld>
+</file>
+
+<file path=ppt/slides/slide15.xml><?xml version="1.0" encoding="utf-8"?>
+<p:sld xmlns:a="http://schemas.openxmlformats.org/drawingml/2006/main" xmlns:p="http://schemas.openxmlformats.org/presentationml/2006/main" xmlns:r="http://schemas.openxmlformats.org/officeDocument/2006/relationships">
+  <p:cSld>
+    <p:spTree>
+      <p:nvGrpSpPr>
+        <p:cNvPr id="1" name=""/>
+        <p:cNvGrpSpPr/>
+        <p:nvPr/>
+      </p:nvGrpSpPr>
+      <p:grpSpPr/>
+      <p:sp>
+        <p:nvSpPr>
+          <p:cNvPr id="2" name="Rectangle 1"/>
+          <p:cNvSpPr/>
+          <p:nvPr/>
+        </p:nvSpPr>
+        <p:spPr>
+          <a:xfrm>
+            <a:off x="0" y="0"/>
+            <a:ext cx="12191695" cy="822960"/>
+          </a:xfrm>
+          <a:prstGeom prst="rect">
+            <a:avLst/>
+          </a:prstGeom>
+          <a:solidFill>
+            <a:srgbClr val="1F2937"/>
+          </a:solidFill>
+          <a:ln>
+            <a:noFill/>
+          </a:ln>
+          <a:effectLst/>
+        </p:spPr>
+        <p:style>
+          <a:lnRef idx="1">
+            <a:schemeClr val="accent1"/>
+          </a:lnRef>
+          <a:fillRef idx="3">
+            <a:schemeClr val="accent1"/>
+          </a:fillRef>
+          <a:effectRef idx="2">
+            <a:schemeClr val="accent1"/>
+          </a:effectRef>
+          <a:fontRef idx="minor">
+            <a:schemeClr val="lt1"/>
+          </a:fontRef>
+        </p:style>
+        <p:txBody>
+          <a:bodyPr rtlCol="0" anchor="ctr"/>
+          <a:lstStyle/>
+          <a:p>
+            <a:pPr algn="ctr"/>
+          </a:p>
+        </p:txBody>
+      </p:sp>
+      <p:sp>
+        <p:nvSpPr>
+          <p:cNvPr id="3" name="Rectangle 2"/>
+          <p:cNvSpPr/>
+          <p:nvPr/>
+        </p:nvSpPr>
+        <p:spPr>
+          <a:xfrm>
+            <a:off x="0" y="822960"/>
+            <a:ext cx="12191695" cy="45720"/>
+          </a:xfrm>
+          <a:prstGeom prst="rect">
+            <a:avLst/>
+          </a:prstGeom>
+          <a:solidFill>
+            <a:srgbClr val="475569"/>
+          </a:solidFill>
+          <a:ln>
+            <a:noFill/>
+          </a:ln>
+          <a:effectLst/>
+        </p:spPr>
+        <p:style>
+          <a:lnRef idx="1">
+            <a:schemeClr val="accent1"/>
+          </a:lnRef>
+          <a:fillRef idx="3">
+            <a:schemeClr val="accent1"/>
+          </a:fillRef>
+          <a:effectRef idx="2">
+            <a:schemeClr val="accent1"/>
+          </a:effectRef>
+          <a:fontRef idx="minor">
+            <a:schemeClr val="lt1"/>
+          </a:fontRef>
+        </p:style>
+        <p:txBody>
+          <a:bodyPr rtlCol="0" anchor="ctr"/>
+          <a:lstStyle/>
+          <a:p>
+            <a:pPr algn="ctr"/>
+          </a:p>
+        </p:txBody>
+      </p:sp>
+      <p:sp>
+        <p:nvSpPr>
+          <p:cNvPr id="4" name="TextBox 3"/>
+          <p:cNvSpPr txBox="1"/>
+          <p:nvPr/>
+        </p:nvSpPr>
+        <p:spPr>
+          <a:xfrm>
+            <a:off x="548640" y="137160"/>
+            <a:ext cx="8442656" cy="548640"/>
+          </a:xfrm>
+          <a:prstGeom prst="rect">
+            <a:avLst/>
+          </a:prstGeom>
+          <a:noFill/>
+        </p:spPr>
+        <p:txBody>
+          <a:bodyPr wrap="square" anchor="ctr" lIns="54864" rIns="54864" tIns="0" bIns="0">
+            <a:spAutoFit/>
+          </a:bodyPr>
+          <a:lstStyle/>
+          <a:p>
+            <a:pPr algn="l">
+              <a:lnSpc>
+                <a:spcPct val="130000"/>
+              </a:lnSpc>
+              <a:defRPr sz="2600"/>
+            </a:pPr>
+            <a:r>
+              <a:rPr sz="2600" b="1" u="none">
+                <a:solidFill>
+                  <a:srgbClr val="FFFFFF"/>
+                </a:solidFill>
+                <a:latin typeface="Times New Roman"/>
+                <a:ea typeface="微软雅黑"/>
+              </a:rPr>
+              <a:t>第 7 题</a:t>
+            </a:r>
+          </a:p>
+        </p:txBody>
+      </p:sp>
+      <p:sp>
+        <p:nvSpPr>
+          <p:cNvPr id="5" name="Rounded Rectangle 4"/>
+          <p:cNvSpPr/>
+          <p:nvPr/>
+        </p:nvSpPr>
+        <p:spPr>
+          <a:xfrm>
+            <a:off x="10271455" y="219456"/>
+            <a:ext cx="1371600" cy="365760"/>
+          </a:xfrm>
+          <a:prstGeom prst="roundRect">
+            <a:avLst>
+              <a:gd name="adj" fmla="val 30000"/>
+            </a:avLst>
+          </a:prstGeom>
+          <a:solidFill>
+            <a:srgbClr val="2E4A78"/>
+          </a:solidFill>
+          <a:ln>
+            <a:noFill/>
+          </a:ln>
+          <a:effectLst/>
+        </p:spPr>
+        <p:style>
+          <a:lnRef idx="1">
+            <a:schemeClr val="accent1"/>
+          </a:lnRef>
+          <a:fillRef idx="3">
+            <a:schemeClr val="accent1"/>
+          </a:fillRef>
+          <a:effectRef idx="2">
+            <a:schemeClr val="accent1"/>
+          </a:effectRef>
+          <a:fontRef idx="minor">
+            <a:schemeClr val="lt1"/>
+          </a:fontRef>
+        </p:style>
+        <p:txBody>
+          <a:bodyPr rtlCol="0" anchor="ctr"/>
+          <a:lstStyle/>
+          <a:p>
+            <a:pPr algn="ctr"/>
+          </a:p>
+        </p:txBody>
+      </p:sp>
+      <p:sp>
+        <p:nvSpPr>
+          <p:cNvPr id="6" name="TextBox 5"/>
+          <p:cNvSpPr txBox="1"/>
+          <p:nvPr/>
+        </p:nvSpPr>
+        <p:spPr>
+          <a:xfrm>
+            <a:off x="10271455" y="237744"/>
+            <a:ext cx="1371600" cy="329184"/>
+          </a:xfrm>
+          <a:prstGeom prst="rect">
+            <a:avLst/>
+          </a:prstGeom>
+          <a:noFill/>
+        </p:spPr>
+        <p:txBody>
+          <a:bodyPr wrap="square" anchor="ctr" lIns="54864" rIns="54864" tIns="0" bIns="0">
+            <a:spAutoFit/>
+          </a:bodyPr>
+          <a:lstStyle/>
+          <a:p>
+            <a:pPr algn="ctr">
+              <a:lnSpc>
+                <a:spcPct val="130000"/>
+              </a:lnSpc>
+              <a:defRPr sz="1100"/>
+            </a:pPr>
+            <a:r>
+              <a:rPr sz="1100" b="1" u="none">
+                <a:solidFill>
+                  <a:srgbClr val="FFFFFF"/>
+                </a:solidFill>
+                <a:latin typeface="Times New Roman"/>
+                <a:ea typeface="微软雅黑"/>
+              </a:rPr>
+              <a:t>三、非选择题</a:t>
+            </a:r>
+          </a:p>
+        </p:txBody>
+      </p:sp>
+      <p:sp>
+        <p:nvSpPr>
+          <p:cNvPr id="7" name="TextBox 6"/>
+          <p:cNvSpPr txBox="1"/>
+          <p:nvPr/>
+        </p:nvSpPr>
+        <p:spPr>
+          <a:xfrm>
+            <a:off x="548640" y="1078992"/>
+            <a:ext cx="11094415" cy="2103120"/>
+          </a:xfrm>
+          <a:prstGeom prst="rect">
+            <a:avLst/>
+          </a:prstGeom>
+          <a:noFill/>
+        </p:spPr>
+        <p:txBody>
+          <a:bodyPr wrap="square" anchor="t" lIns="54864" rIns="54864" tIns="0" bIns="0">
+            <a:spAutoFit/>
+          </a:bodyPr>
+          <a:lstStyle/>
+          <a:p>
+            <a:pPr algn="l">
+              <a:lnSpc>
+                <a:spcPct val="145000"/>
+              </a:lnSpc>
+              <a:defRPr sz="2200"/>
+            </a:pPr>
+            <a:r>
+              <a:rPr sz="2200" b="0" u="none">
+                <a:solidFill>
+                  <a:srgbClr val="111827"/>
+                </a:solidFill>
+                <a:latin typeface="Times New Roman"/>
+                <a:ea typeface="微软雅黑"/>
+              </a:rPr>
+              <a:t>（14分）汽车以v0=20 m/s的速度匀速行驶，司机发现前方障碍后经0.5 s反应时间开始刹车，刹车加速度大小为5 m/s²。求： （1）从发现障碍到停止所用的总时间； （2）从发现障碍到停止所通过的总距离。</a:t>
+            </a:r>
+          </a:p>
+        </p:txBody>
+      </p:sp>
+      <p:sp>
+        <p:nvSpPr>
+          <p:cNvPr id="8" name="Rectangle 7"/>
+          <p:cNvSpPr/>
+          <p:nvPr/>
+        </p:nvSpPr>
+        <p:spPr>
+          <a:xfrm>
+            <a:off x="0" y="6739128"/>
+            <a:ext cx="12191695" cy="118872"/>
+          </a:xfrm>
+          <a:prstGeom prst="rect">
+            <a:avLst/>
+          </a:prstGeom>
+          <a:solidFill>
+            <a:srgbClr val="475569"/>
+          </a:solidFill>
+          <a:ln>
+            <a:noFill/>
+          </a:ln>
+          <a:effectLst/>
+        </p:spPr>
+        <p:style>
+          <a:lnRef idx="1">
+            <a:schemeClr val="accent1"/>
+          </a:lnRef>
+          <a:fillRef idx="3">
+            <a:schemeClr val="accent1"/>
+          </a:fillRef>
+          <a:effectRef idx="2">
+            <a:schemeClr val="accent1"/>
+          </a:effectRef>
+          <a:fontRef idx="minor">
+            <a:schemeClr val="lt1"/>
+          </a:fontRef>
+        </p:style>
+        <p:txBody>
+          <a:bodyPr rtlCol="0" anchor="ctr"/>
+          <a:lstStyle/>
+          <a:p>
+            <a:pPr algn="ctr"/>
+          </a:p>
+        </p:txBody>
+      </p:sp>
+      <p:sp>
+        <p:nvSpPr>
+          <p:cNvPr id="9" name="TextBox 8"/>
+          <p:cNvSpPr txBox="1"/>
+          <p:nvPr/>
+        </p:nvSpPr>
+        <p:spPr>
+          <a:xfrm>
+            <a:off x="548640" y="6345936"/>
+            <a:ext cx="8595360" cy="274320"/>
+          </a:xfrm>
+          <a:prstGeom prst="rect">
+            <a:avLst/>
+          </a:prstGeom>
+          <a:noFill/>
+        </p:spPr>
+        <p:txBody>
+          <a:bodyPr wrap="square" anchor="t" lIns="54864" rIns="54864" tIns="0" bIns="0">
+            <a:spAutoFit/>
+          </a:bodyPr>
+          <a:lstStyle/>
+          <a:p>
+            <a:pPr algn="l">
+              <a:lnSpc>
+                <a:spcPct val="130000"/>
+              </a:lnSpc>
+              <a:defRPr sz="1000"/>
+            </a:pPr>
+            <a:r>
+              <a:rPr sz="1000" b="0" u="none">
+                <a:solidFill>
+                  <a:srgbClr val="8A94A6"/>
+                </a:solidFill>
+                <a:latin typeface="Times New Roman"/>
+                <a:ea typeface="微软雅黑"/>
+              </a:rPr>
+              <a:t>胶州四中高三级部物理学科单元达标评测题</a:t>
+            </a:r>
+          </a:p>
+        </p:txBody>
+      </p:sp>
+      <p:sp>
+        <p:nvSpPr>
+          <p:cNvPr id="10" name="TextBox 9"/>
+          <p:cNvSpPr txBox="1"/>
+          <p:nvPr/>
+        </p:nvSpPr>
+        <p:spPr>
+          <a:xfrm>
+            <a:off x="11048695" y="6345936"/>
+            <a:ext cx="685800" cy="274320"/>
+          </a:xfrm>
+          <a:prstGeom prst="rect">
+            <a:avLst/>
+          </a:prstGeom>
+          <a:noFill/>
+        </p:spPr>
+        <p:txBody>
+          <a:bodyPr wrap="square" anchor="t" lIns="54864" rIns="54864" tIns="0" bIns="0">
+            <a:spAutoFit/>
+          </a:bodyPr>
+          <a:lstStyle/>
+          <a:p>
+            <a:pPr algn="r">
+              <a:lnSpc>
+                <a:spcPct val="130000"/>
+              </a:lnSpc>
+              <a:defRPr sz="1000"/>
+            </a:pPr>
+            <a:r>
+              <a:rPr sz="1000" b="0" u="none">
+                <a:solidFill>
+                  <a:srgbClr val="8A94A6"/>
+                </a:solidFill>
+                <a:latin typeface="Times New Roman"/>
+                <a:ea typeface="微软雅黑"/>
+              </a:rPr>
+              <a:t>15</a:t>
+            </a:r>
+          </a:p>
+        </p:txBody>
+      </p:sp>
+    </p:spTree>
+  </p:cSld>
+  <p:clrMapOvr>
+    <a:masterClrMapping/>
+  </p:clrMapOvr>
+</p:sld>
+</file>
+
+<file path=ppt/slides/slide16.xml><?xml version="1.0" encoding="utf-8"?>
+<p:sld xmlns:a="http://schemas.openxmlformats.org/drawingml/2006/main" xmlns:p="http://schemas.openxmlformats.org/presentationml/2006/main" xmlns:r="http://schemas.openxmlformats.org/officeDocument/2006/relationships">
+  <p:cSld>
+    <p:spTree>
+      <p:nvGrpSpPr>
+        <p:cNvPr id="1" name=""/>
+        <p:cNvGrpSpPr/>
+        <p:nvPr/>
+      </p:nvGrpSpPr>
+      <p:grpSpPr/>
+      <p:sp>
+        <p:nvSpPr>
+          <p:cNvPr id="2" name="Rectangle 1"/>
+          <p:cNvSpPr/>
+          <p:nvPr/>
+        </p:nvSpPr>
+        <p:spPr>
+          <a:xfrm>
+            <a:off x="0" y="0"/>
+            <a:ext cx="12191695" cy="822960"/>
+          </a:xfrm>
+          <a:prstGeom prst="rect">
+            <a:avLst/>
+          </a:prstGeom>
+          <a:solidFill>
+            <a:srgbClr val="1F2937"/>
+          </a:solidFill>
+          <a:ln>
+            <a:noFill/>
+          </a:ln>
+          <a:effectLst/>
+        </p:spPr>
+        <p:style>
+          <a:lnRef idx="1">
+            <a:schemeClr val="accent1"/>
+          </a:lnRef>
+          <a:fillRef idx="3">
+            <a:schemeClr val="accent1"/>
+          </a:fillRef>
+          <a:effectRef idx="2">
+            <a:schemeClr val="accent1"/>
+          </a:effectRef>
+          <a:fontRef idx="minor">
+            <a:schemeClr val="lt1"/>
+          </a:fontRef>
+        </p:style>
+        <p:txBody>
+          <a:bodyPr rtlCol="0" anchor="ctr"/>
+          <a:lstStyle/>
+          <a:p>
+            <a:pPr algn="ctr"/>
+          </a:p>
+        </p:txBody>
+      </p:sp>
+      <p:sp>
+        <p:nvSpPr>
+          <p:cNvPr id="3" name="Rectangle 2"/>
+          <p:cNvSpPr/>
+          <p:nvPr/>
+        </p:nvSpPr>
+        <p:spPr>
+          <a:xfrm>
+            <a:off x="0" y="822960"/>
+            <a:ext cx="12191695" cy="45720"/>
+          </a:xfrm>
+          <a:prstGeom prst="rect">
+            <a:avLst/>
+          </a:prstGeom>
+          <a:solidFill>
+            <a:srgbClr val="475569"/>
+          </a:solidFill>
+          <a:ln>
+            <a:noFill/>
+          </a:ln>
+          <a:effectLst/>
+        </p:spPr>
+        <p:style>
+          <a:lnRef idx="1">
+            <a:schemeClr val="accent1"/>
+          </a:lnRef>
+          <a:fillRef idx="3">
+            <a:schemeClr val="accent1"/>
+          </a:fillRef>
+          <a:effectRef idx="2">
+            <a:schemeClr val="accent1"/>
+          </a:effectRef>
+          <a:fontRef idx="minor">
+            <a:schemeClr val="lt1"/>
+          </a:fontRef>
+        </p:style>
+        <p:txBody>
+          <a:bodyPr rtlCol="0" anchor="ctr"/>
+          <a:lstStyle/>
+          <a:p>
+            <a:pPr algn="ctr"/>
+          </a:p>
+        </p:txBody>
+      </p:sp>
+      <p:sp>
+        <p:nvSpPr>
+          <p:cNvPr id="4" name="TextBox 3"/>
+          <p:cNvSpPr txBox="1"/>
+          <p:nvPr/>
+        </p:nvSpPr>
+        <p:spPr>
+          <a:xfrm>
+            <a:off x="548640" y="137160"/>
+            <a:ext cx="8442656" cy="548640"/>
+          </a:xfrm>
+          <a:prstGeom prst="rect">
+            <a:avLst/>
+          </a:prstGeom>
+          <a:noFill/>
+        </p:spPr>
+        <p:txBody>
+          <a:bodyPr wrap="square" anchor="ctr" lIns="54864" rIns="54864" tIns="0" bIns="0">
+            <a:spAutoFit/>
+          </a:bodyPr>
+          <a:lstStyle/>
+          <a:p>
+            <a:pPr algn="l">
+              <a:lnSpc>
+                <a:spcPct val="130000"/>
+              </a:lnSpc>
+              <a:defRPr sz="2600"/>
+            </a:pPr>
+            <a:r>
+              <a:rPr sz="2600" b="1" u="none">
+                <a:solidFill>
+                  <a:srgbClr val="FFFFFF"/>
+                </a:solidFill>
+                <a:latin typeface="Times New Roman"/>
+                <a:ea typeface="微软雅黑"/>
+              </a:rPr>
+              <a:t>第 7 题</a:t>
+            </a:r>
+          </a:p>
+        </p:txBody>
+      </p:sp>
+      <p:sp>
+        <p:nvSpPr>
+          <p:cNvPr id="5" name="Rounded Rectangle 4"/>
+          <p:cNvSpPr/>
+          <p:nvPr/>
+        </p:nvSpPr>
+        <p:spPr>
+          <a:xfrm>
+            <a:off x="10271455" y="219456"/>
+            <a:ext cx="1371600" cy="365760"/>
+          </a:xfrm>
+          <a:prstGeom prst="roundRect">
+            <a:avLst>
+              <a:gd name="adj" fmla="val 30000"/>
+            </a:avLst>
+          </a:prstGeom>
+          <a:solidFill>
+            <a:srgbClr val="2E4A78"/>
+          </a:solidFill>
+          <a:ln>
+            <a:noFill/>
+          </a:ln>
+          <a:effectLst/>
+        </p:spPr>
+        <p:style>
+          <a:lnRef idx="1">
+            <a:schemeClr val="accent1"/>
+          </a:lnRef>
+          <a:fillRef idx="3">
+            <a:schemeClr val="accent1"/>
+          </a:fillRef>
+          <a:effectRef idx="2">
+            <a:schemeClr val="accent1"/>
+          </a:effectRef>
+          <a:fontRef idx="minor">
+            <a:schemeClr val="lt1"/>
+          </a:fontRef>
+        </p:style>
+        <p:txBody>
+          <a:bodyPr rtlCol="0" anchor="ctr"/>
+          <a:lstStyle/>
+          <a:p>
+            <a:pPr algn="ctr"/>
+          </a:p>
+        </p:txBody>
+      </p:sp>
+      <p:sp>
+        <p:nvSpPr>
+          <p:cNvPr id="6" name="TextBox 5"/>
+          <p:cNvSpPr txBox="1"/>
+          <p:nvPr/>
+        </p:nvSpPr>
+        <p:spPr>
+          <a:xfrm>
+            <a:off x="10271455" y="237744"/>
+            <a:ext cx="1371600" cy="329184"/>
+          </a:xfrm>
+          <a:prstGeom prst="rect">
+            <a:avLst/>
+          </a:prstGeom>
+          <a:noFill/>
+        </p:spPr>
+        <p:txBody>
+          <a:bodyPr wrap="square" anchor="ctr" lIns="54864" rIns="54864" tIns="0" bIns="0">
+            <a:spAutoFit/>
+          </a:bodyPr>
+          <a:lstStyle/>
+          <a:p>
+            <a:pPr algn="ctr">
+              <a:lnSpc>
+                <a:spcPct val="130000"/>
+              </a:lnSpc>
+              <a:defRPr sz="1100"/>
+            </a:pPr>
+            <a:r>
+              <a:rPr sz="1100" b="1" u="none">
+                <a:solidFill>
+                  <a:srgbClr val="FFFFFF"/>
+                </a:solidFill>
+                <a:latin typeface="Times New Roman"/>
+                <a:ea typeface="微软雅黑"/>
+              </a:rPr>
+              <a:t>三、非选择题</a:t>
+            </a:r>
+          </a:p>
+        </p:txBody>
+      </p:sp>
+      <p:sp>
+        <p:nvSpPr>
+          <p:cNvPr id="7" name="Rectangle 6"/>
+          <p:cNvSpPr/>
+          <p:nvPr/>
+        </p:nvSpPr>
+        <p:spPr>
+          <a:xfrm>
+            <a:off x="548640" y="1097280"/>
+            <a:ext cx="64008" cy="960120"/>
+          </a:xfrm>
+          <a:prstGeom prst="rect">
+            <a:avLst/>
+          </a:prstGeom>
+          <a:solidFill>
+            <a:srgbClr val="16A34A"/>
+          </a:solidFill>
+          <a:ln>
+            <a:noFill/>
+          </a:ln>
+          <a:effectLst/>
+        </p:spPr>
+        <p:style>
+          <a:lnRef idx="1">
+            <a:schemeClr val="accent1"/>
+          </a:lnRef>
+          <a:fillRef idx="3">
+            <a:schemeClr val="accent1"/>
+          </a:fillRef>
+          <a:effectRef idx="2">
+            <a:schemeClr val="accent1"/>
+          </a:effectRef>
+          <a:fontRef idx="minor">
+            <a:schemeClr val="lt1"/>
+          </a:fontRef>
+        </p:style>
+        <p:txBody>
+          <a:bodyPr rtlCol="0" anchor="ctr"/>
+          <a:lstStyle/>
+          <a:p>
+            <a:pPr algn="ctr"/>
+          </a:p>
+        </p:txBody>
+      </p:sp>
+      <p:sp>
+        <p:nvSpPr>
+          <p:cNvPr id="8" name="TextBox 7"/>
+          <p:cNvSpPr txBox="1"/>
+          <p:nvPr/>
+        </p:nvSpPr>
+        <p:spPr>
+          <a:xfrm>
+            <a:off x="731520" y="1097280"/>
+            <a:ext cx="10911535" cy="960120"/>
+          </a:xfrm>
+          <a:prstGeom prst="rect">
+            <a:avLst/>
+          </a:prstGeom>
+          <a:noFill/>
+        </p:spPr>
+        <p:txBody>
+          <a:bodyPr wrap="square" anchor="t" lIns="54864" rIns="54864" tIns="0" bIns="0">
+            <a:spAutoFit/>
+          </a:bodyPr>
+          <a:lstStyle/>
+          <a:p>
+            <a:pPr algn="l">
+              <a:lnSpc>
+                <a:spcPct val="135000"/>
+              </a:lnSpc>
+              <a:defRPr sz="1900"/>
+            </a:pPr>
+            <a:r>
+              <a:rPr sz="1900" b="1" u="none">
+                <a:solidFill>
+                  <a:srgbClr val="15803D"/>
+                </a:solidFill>
+                <a:latin typeface="Times New Roman"/>
+                <a:ea typeface="微软雅黑"/>
+              </a:rPr>
+              <a:t>答案：</a:t>
+            </a:r>
+            <a:r>
+              <a:rPr sz="1900" b="0" u="none">
+                <a:solidFill>
+                  <a:srgbClr val="15803D"/>
+                </a:solidFill>
+                <a:latin typeface="Times New Roman"/>
+                <a:ea typeface="微软雅黑"/>
+              </a:rPr>
+              <a:t>（1）反应时间0.5 s，刹车时间t=v0/a=4 s，总时间4.5 s；（2）反应距离10 m，刹车距离40 m，总距离50 m。</a:t>
+            </a:r>
+          </a:p>
+        </p:txBody>
+      </p:sp>
+      <p:sp>
+        <p:nvSpPr>
+          <p:cNvPr id="9" name="Rectangle 8"/>
+          <p:cNvSpPr/>
+          <p:nvPr/>
+        </p:nvSpPr>
+        <p:spPr>
+          <a:xfrm>
+            <a:off x="0" y="6739128"/>
+            <a:ext cx="12191695" cy="118872"/>
+          </a:xfrm>
+          <a:prstGeom prst="rect">
+            <a:avLst/>
+          </a:prstGeom>
+          <a:solidFill>
+            <a:srgbClr val="475569"/>
+          </a:solidFill>
+          <a:ln>
+            <a:noFill/>
+          </a:ln>
+          <a:effectLst/>
+        </p:spPr>
+        <p:style>
+          <a:lnRef idx="1">
+            <a:schemeClr val="accent1"/>
+          </a:lnRef>
+          <a:fillRef idx="3">
+            <a:schemeClr val="accent1"/>
+          </a:fillRef>
+          <a:effectRef idx="2">
+            <a:schemeClr val="accent1"/>
+          </a:effectRef>
+          <a:fontRef idx="minor">
+            <a:schemeClr val="lt1"/>
+          </a:fontRef>
+        </p:style>
+        <p:txBody>
+          <a:bodyPr rtlCol="0" anchor="ctr"/>
+          <a:lstStyle/>
+          <a:p>
+            <a:pPr algn="ctr"/>
+          </a:p>
+        </p:txBody>
+      </p:sp>
+      <p:sp>
+        <p:nvSpPr>
+          <p:cNvPr id="10" name="TextBox 9"/>
+          <p:cNvSpPr txBox="1"/>
+          <p:nvPr/>
+        </p:nvSpPr>
+        <p:spPr>
+          <a:xfrm>
+            <a:off x="548640" y="6345936"/>
+            <a:ext cx="8595360" cy="274320"/>
+          </a:xfrm>
+          <a:prstGeom prst="rect">
+            <a:avLst/>
+          </a:prstGeom>
+          <a:noFill/>
+        </p:spPr>
+        <p:txBody>
+          <a:bodyPr wrap="square" anchor="t" lIns="54864" rIns="54864" tIns="0" bIns="0">
+            <a:spAutoFit/>
+          </a:bodyPr>
+          <a:lstStyle/>
+          <a:p>
+            <a:pPr algn="l">
+              <a:lnSpc>
+                <a:spcPct val="130000"/>
+              </a:lnSpc>
+              <a:defRPr sz="1000"/>
+            </a:pPr>
+            <a:r>
+              <a:rPr sz="1000" b="0" u="none">
+                <a:solidFill>
+                  <a:srgbClr val="8A94A6"/>
+                </a:solidFill>
+                <a:latin typeface="Times New Roman"/>
+                <a:ea typeface="微软雅黑"/>
+              </a:rPr>
+              <a:t>胶州四中高三级部物理学科单元达标评测题</a:t>
+            </a:r>
+          </a:p>
+        </p:txBody>
+      </p:sp>
+      <p:sp>
+        <p:nvSpPr>
+          <p:cNvPr id="11" name="TextBox 10"/>
+          <p:cNvSpPr txBox="1"/>
+          <p:nvPr/>
+        </p:nvSpPr>
+        <p:spPr>
+          <a:xfrm>
+            <a:off x="11048695" y="6345936"/>
+            <a:ext cx="685800" cy="274320"/>
+          </a:xfrm>
+          <a:prstGeom prst="rect">
+            <a:avLst/>
+          </a:prstGeom>
+          <a:noFill/>
+        </p:spPr>
+        <p:txBody>
+          <a:bodyPr wrap="square" anchor="t" lIns="54864" rIns="54864" tIns="0" bIns="0">
+            <a:spAutoFit/>
+          </a:bodyPr>
+          <a:lstStyle/>
+          <a:p>
+            <a:pPr algn="r">
+              <a:lnSpc>
+                <a:spcPct val="130000"/>
+              </a:lnSpc>
+              <a:defRPr sz="1000"/>
+            </a:pPr>
+            <a:r>
+              <a:rPr sz="1000" b="0" u="none">
+                <a:solidFill>
+                  <a:srgbClr val="8A94A6"/>
+                </a:solidFill>
+                <a:latin typeface="Times New Roman"/>
+                <a:ea typeface="微软雅黑"/>
+              </a:rPr>
+              <a:t>16</a:t>
+            </a:r>
+          </a:p>
+        </p:txBody>
+      </p:sp>
+    </p:spTree>
+  </p:cSld>
+  <p:clrMapOvr>
+    <a:masterClrMapping/>
+  </p:clrMapOvr>
+</p:sld>
+</file>
+
+<file path=ppt/slides/slide17.xml><?xml version="1.0" encoding="utf-8"?>
+<p:sld xmlns:a="http://schemas.openxmlformats.org/drawingml/2006/main" xmlns:p="http://schemas.openxmlformats.org/presentationml/2006/main" xmlns:r="http://schemas.openxmlformats.org/officeDocument/2006/relationships">
+  <p:cSld>
+    <p:spTree>
+      <p:nvGrpSpPr>
+        <p:cNvPr id="1" name=""/>
+        <p:cNvGrpSpPr/>
+        <p:nvPr/>
+      </p:nvGrpSpPr>
+      <p:grpSpPr/>
+      <p:sp>
+        <p:nvSpPr>
+          <p:cNvPr id="2" name="Rectangle 1"/>
+          <p:cNvSpPr/>
+          <p:nvPr/>
+        </p:nvSpPr>
+        <p:spPr>
+          <a:xfrm>
+            <a:off x="0" y="0"/>
             <a:ext cx="12191695" cy="6858000"/>
           </a:xfrm>
           <a:prstGeom prst="rect">
@@ -3591,13 +6686,13 @@
         <p:spPr>
           <a:xfrm>
             <a:off x="0" y="0"/>
-            <a:ext cx="12191695" cy="128016"/>
+            <a:ext cx="12191695" cy="109728"/>
           </a:xfrm>
           <a:prstGeom prst="rect">
             <a:avLst/>
           </a:prstGeom>
           <a:solidFill>
-            <a:srgbClr val="4B5563"/>
+            <a:srgbClr val="1F2937"/>
           </a:solidFill>
           <a:ln>
             <a:noFill/>
@@ -3628,14 +6723,58 @@
       </p:sp>
       <p:sp>
         <p:nvSpPr>
-          <p:cNvPr id="4" name="TextBox 3"/>
+          <p:cNvPr id="4" name="Rectangle 3"/>
+          <p:cNvSpPr/>
+          <p:nvPr/>
+        </p:nvSpPr>
+        <p:spPr>
+          <a:xfrm>
+            <a:off x="0" y="6748272"/>
+            <a:ext cx="12191695" cy="109728"/>
+          </a:xfrm>
+          <a:prstGeom prst="rect">
+            <a:avLst/>
+          </a:prstGeom>
+          <a:solidFill>
+            <a:srgbClr val="475569"/>
+          </a:solidFill>
+          <a:ln>
+            <a:noFill/>
+          </a:ln>
+          <a:effectLst/>
+        </p:spPr>
+        <p:style>
+          <a:lnRef idx="1">
+            <a:schemeClr val="accent1"/>
+          </a:lnRef>
+          <a:fillRef idx="3">
+            <a:schemeClr val="accent1"/>
+          </a:fillRef>
+          <a:effectRef idx="2">
+            <a:schemeClr val="accent1"/>
+          </a:effectRef>
+          <a:fontRef idx="minor">
+            <a:schemeClr val="lt1"/>
+          </a:fontRef>
+        </p:style>
+        <p:txBody>
+          <a:bodyPr rtlCol="0" anchor="ctr"/>
+          <a:lstStyle/>
+          <a:p>
+            <a:pPr algn="ctr"/>
+          </a:p>
+        </p:txBody>
+      </p:sp>
+      <p:sp>
+        <p:nvSpPr>
+          <p:cNvPr id="5" name="TextBox 4"/>
           <p:cNvSpPr txBox="1"/>
           <p:nvPr/>
         </p:nvSpPr>
         <p:spPr>
           <a:xfrm>
-            <a:off x="822960" y="822960"/>
-            <a:ext cx="10545775" cy="914400"/>
+            <a:off x="777240" y="731520"/>
+            <a:ext cx="10637215" cy="822960"/>
           </a:xfrm>
           <a:prstGeom prst="rect">
             <a:avLst/>
@@ -3643,18 +6782,19 @@
           <a:noFill/>
         </p:spPr>
         <p:txBody>
-          <a:bodyPr wrap="square" anchor="t" lIns="45720" rIns="45720" tIns="0" bIns="0">
+          <a:bodyPr wrap="square" anchor="t" lIns="54864" rIns="54864" tIns="0" bIns="0">
             <a:spAutoFit/>
           </a:bodyPr>
           <a:lstStyle/>
           <a:p>
             <a:pPr algn="l">
               <a:lnSpc>
-                <a:spcPct val="125000"/>
+                <a:spcPct val="130000"/>
               </a:lnSpc>
+              <a:defRPr sz="3800"/>
             </a:pPr>
             <a:r>
-              <a:rPr sz="4000" b="1">
+              <a:rPr sz="3800" b="1" u="none">
                 <a:solidFill>
                   <a:srgbClr val="1F2937"/>
                 </a:solidFill>
@@ -3668,14 +6808,14 @@
       </p:sp>
       <p:sp>
         <p:nvSpPr>
-          <p:cNvPr id="5" name="TextBox 4"/>
+          <p:cNvPr id="6" name="TextBox 5"/>
           <p:cNvSpPr txBox="1"/>
           <p:nvPr/>
         </p:nvSpPr>
         <p:spPr>
           <a:xfrm>
-            <a:off x="914400" y="2011680"/>
-            <a:ext cx="10362895" cy="4114800"/>
+            <a:off x="868680" y="1783080"/>
+            <a:ext cx="10454335" cy="4251960"/>
           </a:xfrm>
           <a:prstGeom prst="rect">
             <a:avLst/>
@@ -3683,90 +6823,94 @@
           <a:noFill/>
         </p:spPr>
         <p:txBody>
-          <a:bodyPr wrap="square" anchor="t" lIns="45720" rIns="45720" tIns="0" bIns="0">
+          <a:bodyPr wrap="square" anchor="t" lIns="54864" rIns="54864" tIns="0" bIns="0">
             <a:spAutoFit/>
           </a:bodyPr>
           <a:lstStyle/>
           <a:p>
-            <a:pPr algn="l">
+            <a:pPr algn="l" marL="411480" indent="-411480">
               <a:lnSpc>
-                <a:spcPct val="140000"/>
+                <a:spcPct val="135000"/>
               </a:lnSpc>
+              <a:defRPr sz="2300"/>
             </a:pPr>
             <a:r>
-              <a:rPr sz="2400" b="0">
-                <a:solidFill>
-                  <a:srgbClr val="4B5563"/>
+              <a:rPr sz="2300" b="0" u="none">
+                <a:solidFill>
+                  <a:srgbClr val="475569"/>
                 </a:solidFill>
                 <a:latin typeface="Times New Roman"/>
                 <a:ea typeface="微软雅黑"/>
               </a:rPr>
-              <a:t>✔  </a:t>
-            </a:r>
-            <a:r>
-              <a:rPr sz="2400" b="0">
+              <a:t>✔ </a:t>
+            </a:r>
+            <a:r>
+              <a:rPr sz="2300" b="0" u="none">
                 <a:solidFill>
                   <a:srgbClr val="111827"/>
                 </a:solidFill>
                 <a:latin typeface="Times New Roman"/>
+                <a:ea typeface="微软雅黑"/>
               </a:rPr>
               <a:t>审题：圈出限定词（正确的是 / 不正确的是 / 最多 / 至少）</a:t>
             </a:r>
           </a:p>
           <a:p>
-            <a:pPr>
+            <a:pPr algn="l" marL="411480" indent="-411480">
               <a:lnSpc>
-                <a:spcPct val="140000"/>
+                <a:spcPct val="135000"/>
               </a:lnSpc>
               <a:spcBef>
                 <a:spcPts val="1000"/>
               </a:spcBef>
             </a:pPr>
             <a:r>
-              <a:rPr sz="2400" b="0">
-                <a:solidFill>
-                  <a:srgbClr val="4B5563"/>
+              <a:rPr sz="2300" b="0" u="none">
+                <a:solidFill>
+                  <a:srgbClr val="475569"/>
                 </a:solidFill>
                 <a:latin typeface="Times New Roman"/>
                 <a:ea typeface="微软雅黑"/>
               </a:rPr>
-              <a:t>✔  </a:t>
-            </a:r>
-            <a:r>
-              <a:rPr sz="2400" b="0">
+              <a:t>✔ </a:t>
+            </a:r>
+            <a:r>
+              <a:rPr sz="2300" b="0" u="none">
                 <a:solidFill>
                   <a:srgbClr val="111827"/>
                 </a:solidFill>
                 <a:latin typeface="Times New Roman"/>
+                <a:ea typeface="微软雅黑"/>
               </a:rPr>
               <a:t>规范：写出依据公式，再代入数据，最后带单位</a:t>
             </a:r>
           </a:p>
           <a:p>
-            <a:pPr>
+            <a:pPr algn="l" marL="411480" indent="-411480">
               <a:lnSpc>
-                <a:spcPct val="140000"/>
+                <a:spcPct val="135000"/>
               </a:lnSpc>
               <a:spcBef>
                 <a:spcPts val="1000"/>
               </a:spcBef>
             </a:pPr>
             <a:r>
-              <a:rPr sz="2400" b="0">
-                <a:solidFill>
-                  <a:srgbClr val="4B5563"/>
+              <a:rPr sz="2300" b="0" u="none">
+                <a:solidFill>
+                  <a:srgbClr val="475569"/>
                 </a:solidFill>
                 <a:latin typeface="Times New Roman"/>
                 <a:ea typeface="微软雅黑"/>
               </a:rPr>
-              <a:t>✔  </a:t>
-            </a:r>
-            <a:r>
-              <a:rPr sz="2400" b="0">
+              <a:t>✔ </a:t>
+            </a:r>
+            <a:r>
+              <a:rPr sz="2300" b="0" u="none">
                 <a:solidFill>
                   <a:srgbClr val="111827"/>
                 </a:solidFill>
                 <a:latin typeface="Times New Roman"/>
+                <a:ea typeface="微软雅黑"/>
               </a:rPr>
               <a:t>复盘：把错题按知识点归档，三天后重做一遍</a:t>
             </a:r>
@@ -3775,14 +6919,14 @@
       </p:sp>
       <p:sp>
         <p:nvSpPr>
-          <p:cNvPr id="6" name="TextBox 5"/>
+          <p:cNvPr id="7" name="TextBox 6"/>
           <p:cNvSpPr txBox="1"/>
           <p:nvPr/>
         </p:nvSpPr>
         <p:spPr>
           <a:xfrm>
-            <a:off x="914400" y="5852160"/>
-            <a:ext cx="10362895" cy="457200"/>
+            <a:off x="868680" y="5989320"/>
+            <a:ext cx="10454335" cy="347472"/>
           </a:xfrm>
           <a:prstGeom prst="rect">
             <a:avLst/>
@@ -3790,18 +6934,19 @@
           <a:noFill/>
         </p:spPr>
         <p:txBody>
-          <a:bodyPr wrap="square" anchor="t" lIns="45720" rIns="45720" tIns="0" bIns="0">
+          <a:bodyPr wrap="square" anchor="t" lIns="54864" rIns="54864" tIns="0" bIns="0">
             <a:spAutoFit/>
           </a:bodyPr>
           <a:lstStyle/>
           <a:p>
             <a:pPr algn="l">
               <a:lnSpc>
-                <a:spcPct val="125000"/>
+                <a:spcPct val="130000"/>
               </a:lnSpc>
+              <a:defRPr sz="1400"/>
             </a:pPr>
             <a:r>
-              <a:rPr sz="1600" b="0">
+              <a:rPr sz="1400" b="0" u="none">
                 <a:solidFill>
                   <a:srgbClr val="64748B"/>
                 </a:solidFill>
@@ -3809,6 +6954,47 @@
                 <a:ea typeface="微软雅黑"/>
               </a:rPr>
               <a:t>胶州四中</a:t>
+            </a:r>
+          </a:p>
+        </p:txBody>
+      </p:sp>
+      <p:sp>
+        <p:nvSpPr>
+          <p:cNvPr id="8" name="TextBox 7"/>
+          <p:cNvSpPr txBox="1"/>
+          <p:nvPr/>
+        </p:nvSpPr>
+        <p:spPr>
+          <a:xfrm>
+            <a:off x="11048695" y="5989320"/>
+            <a:ext cx="685800" cy="347472"/>
+          </a:xfrm>
+          <a:prstGeom prst="rect">
+            <a:avLst/>
+          </a:prstGeom>
+          <a:noFill/>
+        </p:spPr>
+        <p:txBody>
+          <a:bodyPr wrap="square" anchor="t" lIns="54864" rIns="54864" tIns="0" bIns="0">
+            <a:spAutoFit/>
+          </a:bodyPr>
+          <a:lstStyle/>
+          <a:p>
+            <a:pPr algn="r">
+              <a:lnSpc>
+                <a:spcPct val="130000"/>
+              </a:lnSpc>
+              <a:defRPr sz="1400"/>
+            </a:pPr>
+            <a:r>
+              <a:rPr sz="1400" b="0" u="none">
+                <a:solidFill>
+                  <a:srgbClr val="64748B"/>
+                </a:solidFill>
+                <a:latin typeface="Times New Roman"/>
+                <a:ea typeface="微软雅黑"/>
+              </a:rPr>
+              <a:t>17</a:t>
             </a:r>
           </a:p>
         </p:txBody>
@@ -3840,7 +7026,7 @@
         <p:spPr>
           <a:xfrm>
             <a:off x="0" y="0"/>
-            <a:ext cx="12191695" cy="109728"/>
+            <a:ext cx="12191695" cy="91440"/>
           </a:xfrm>
           <a:prstGeom prst="rect">
             <a:avLst/>
@@ -3883,14 +7069,14 @@
         </p:nvSpPr>
         <p:spPr>
           <a:xfrm>
-            <a:off x="548640" y="502920"/>
-            <a:ext cx="118872" cy="566928"/>
+            <a:off x="530352" y="438912"/>
+            <a:ext cx="109728" cy="530352"/>
           </a:xfrm>
           <a:prstGeom prst="rect">
             <a:avLst/>
           </a:prstGeom>
           <a:solidFill>
-            <a:srgbClr val="4B5563"/>
+            <a:srgbClr val="475569"/>
           </a:solidFill>
           <a:ln>
             <a:noFill/>
@@ -3927,8 +7113,8 @@
         </p:nvSpPr>
         <p:spPr>
           <a:xfrm>
-            <a:off x="786384" y="457200"/>
-            <a:ext cx="10728655" cy="685800"/>
+            <a:off x="749808" y="384048"/>
+            <a:ext cx="9722815" cy="640080"/>
           </a:xfrm>
           <a:prstGeom prst="rect">
             <a:avLst/>
@@ -3936,18 +7122,19 @@
           <a:noFill/>
         </p:spPr>
         <p:txBody>
-          <a:bodyPr wrap="square" anchor="ctr" lIns="45720" rIns="45720" tIns="0" bIns="0">
+          <a:bodyPr wrap="square" anchor="ctr" lIns="54864" rIns="54864" tIns="0" bIns="0">
             <a:spAutoFit/>
           </a:bodyPr>
           <a:lstStyle/>
           <a:p>
             <a:pPr algn="l">
               <a:lnSpc>
-                <a:spcPct val="125000"/>
+                <a:spcPct val="130000"/>
               </a:lnSpc>
+              <a:defRPr sz="2800"/>
             </a:pPr>
             <a:r>
-              <a:rPr sz="3000" b="1">
+              <a:rPr sz="2800" b="1" u="none">
                 <a:solidFill>
                   <a:srgbClr val="1F2937"/>
                 </a:solidFill>
@@ -3967,11 +7154,13 @@
         </p:nvSpPr>
         <p:spPr>
           <a:xfrm>
-            <a:off x="10966399" y="530352"/>
-            <a:ext cx="676656" cy="384048"/>
+            <a:off x="11039551" y="457200"/>
+            <a:ext cx="649224" cy="365760"/>
           </a:xfrm>
           <a:prstGeom prst="roundRect">
-            <a:avLst/>
+            <a:avLst>
+              <a:gd name="adj" fmla="val 35000"/>
+            </a:avLst>
           </a:prstGeom>
           <a:solidFill>
             <a:srgbClr val="F1F3F6"/>
@@ -4011,8 +7200,8 @@
         </p:nvSpPr>
         <p:spPr>
           <a:xfrm>
-            <a:off x="10966399" y="548640"/>
-            <a:ext cx="676656" cy="365760"/>
+            <a:off x="11039551" y="475488"/>
+            <a:ext cx="649224" cy="329184"/>
           </a:xfrm>
           <a:prstGeom prst="rect">
             <a:avLst/>
@@ -4020,20 +7209,21 @@
           <a:noFill/>
         </p:spPr>
         <p:txBody>
-          <a:bodyPr wrap="square" anchor="ctr" lIns="45720" rIns="45720" tIns="0" bIns="0">
+          <a:bodyPr wrap="square" anchor="ctr" lIns="54864" rIns="54864" tIns="0" bIns="0">
             <a:spAutoFit/>
           </a:bodyPr>
           <a:lstStyle/>
           <a:p>
             <a:pPr algn="ctr">
               <a:lnSpc>
-                <a:spcPct val="125000"/>
+                <a:spcPct val="130000"/>
               </a:lnSpc>
+              <a:defRPr sz="1100"/>
             </a:pPr>
             <a:r>
-              <a:rPr sz="1200" b="1">
-                <a:solidFill>
-                  <a:srgbClr val="4B5563"/>
+              <a:rPr sz="1100" b="1" u="none">
+                <a:solidFill>
+                  <a:srgbClr val="475569"/>
                 </a:solidFill>
                 <a:latin typeface="Times New Roman"/>
                 <a:ea typeface="微软雅黑"/>
@@ -4051,8 +7241,8 @@
         </p:nvSpPr>
         <p:spPr>
           <a:xfrm>
-            <a:off x="777240" y="1481328"/>
-            <a:ext cx="10728655" cy="4736592"/>
+            <a:off x="777240" y="1325880"/>
+            <a:ext cx="10637215" cy="4873752"/>
           </a:xfrm>
           <a:prstGeom prst="rect">
             <a:avLst/>
@@ -4060,20 +7250,21 @@
           <a:noFill/>
         </p:spPr>
         <p:txBody>
-          <a:bodyPr wrap="square" anchor="t" lIns="45720" rIns="45720" tIns="0" bIns="0">
+          <a:bodyPr wrap="square" anchor="t" lIns="54864" rIns="54864" tIns="0" bIns="0">
             <a:spAutoFit/>
           </a:bodyPr>
           <a:lstStyle/>
           <a:p>
-            <a:pPr algn="l" marL="502920" indent="-502920">
+            <a:pPr algn="l" marL="475488" indent="-475488">
               <a:lnSpc>
                 <a:spcPct val="135000"/>
               </a:lnSpc>
+              <a:defRPr sz="2600"/>
             </a:pPr>
             <a:r>
-              <a:rPr sz="2600" b="0">
-                <a:solidFill>
-                  <a:srgbClr val="4B5563"/>
+              <a:rPr sz="2600" b="0" u="none">
+                <a:solidFill>
+                  <a:srgbClr val="475569"/>
                 </a:solidFill>
                 <a:latin typeface="Times New Roman"/>
                 <a:ea typeface="微软雅黑"/>
@@ -4081,17 +7272,18 @@
               <a:t>▪ </a:t>
             </a:r>
             <a:r>
-              <a:rPr sz="2600" b="0">
+              <a:rPr sz="2600" b="0" u="none">
                 <a:solidFill>
                   <a:srgbClr val="111827"/>
                 </a:solidFill>
                 <a:latin typeface="Times New Roman"/>
+                <a:ea typeface="微软雅黑"/>
               </a:rPr>
-              <a:t>共 7 题，满分 —，考试时间 90分钟 | 满分：100分</a:t>
-            </a:r>
-          </a:p>
-          <a:p>
-            <a:pPr marL="502920" indent="-502920">
+              <a:t>共 7 题，满分 100分，考试时间 90分钟</a:t>
+            </a:r>
+          </a:p>
+          <a:p>
+            <a:pPr algn="l" marL="475488" indent="-475488">
               <a:lnSpc>
                 <a:spcPct val="135000"/>
               </a:lnSpc>
@@ -4100,9 +7292,9 @@
               </a:spcBef>
             </a:pPr>
             <a:r>
-              <a:rPr sz="2600" b="0">
-                <a:solidFill>
-                  <a:srgbClr val="4B5563"/>
+              <a:rPr sz="2600" b="0" u="none">
+                <a:solidFill>
+                  <a:srgbClr val="475569"/>
                 </a:solidFill>
                 <a:latin typeface="Times New Roman"/>
                 <a:ea typeface="微软雅黑"/>
@@ -4110,54 +7302,59 @@
               <a:t>▪ </a:t>
             </a:r>
             <a:r>
-              <a:rPr sz="2600" b="0">
+              <a:rPr sz="2600" b="0" u="none">
                 <a:solidFill>
                   <a:srgbClr val="111827"/>
-                </a:solidFill>
-                <a:latin typeface="Times New Roman"/>
-              </a:rPr>
-              <a:t>先看错题分布，再按题型归因：概念不清 / 审题失误 / 计算错误 / 表达不规范</a:t>
-            </a:r>
-          </a:p>
-        </p:txBody>
-      </p:sp>
-      <p:sp>
-        <p:nvSpPr>
-          <p:cNvPr id="8" name="TextBox 7"/>
-          <p:cNvSpPr txBox="1"/>
-          <p:nvPr/>
-        </p:nvSpPr>
-        <p:spPr>
-          <a:xfrm>
-            <a:off x="548640" y="6473952"/>
-            <a:ext cx="8229600" cy="274320"/>
-          </a:xfrm>
-          <a:prstGeom prst="rect">
-            <a:avLst/>
-          </a:prstGeom>
-          <a:noFill/>
-        </p:spPr>
-        <p:txBody>
-          <a:bodyPr wrap="square" anchor="t" lIns="45720" rIns="45720" tIns="0" bIns="0">
-            <a:spAutoFit/>
-          </a:bodyPr>
-          <a:lstStyle/>
-          <a:p>
-            <a:pPr algn="l">
-              <a:lnSpc>
-                <a:spcPct val="125000"/>
-              </a:lnSpc>
-            </a:pPr>
-            <a:r>
-              <a:rPr sz="1000" b="0">
-                <a:solidFill>
-                  <a:srgbClr val="8A94A6"/>
                 </a:solidFill>
                 <a:latin typeface="Times New Roman"/>
                 <a:ea typeface="微软雅黑"/>
               </a:rPr>
-              <a:t>胶州四中 · 试卷结构</a:t>
-            </a:r>
+              <a:t>先看错题分布，再按题型归因：概念不清 / 审题失误 / 计算错误 / 表达不规范</a:t>
+            </a:r>
+          </a:p>
+        </p:txBody>
+      </p:sp>
+      <p:sp>
+        <p:nvSpPr>
+          <p:cNvPr id="8" name="Rectangle 7"/>
+          <p:cNvSpPr/>
+          <p:nvPr/>
+        </p:nvSpPr>
+        <p:spPr>
+          <a:xfrm>
+            <a:off x="0" y="6739128"/>
+            <a:ext cx="12191695" cy="118872"/>
+          </a:xfrm>
+          <a:prstGeom prst="rect">
+            <a:avLst/>
+          </a:prstGeom>
+          <a:solidFill>
+            <a:srgbClr val="475569"/>
+          </a:solidFill>
+          <a:ln>
+            <a:noFill/>
+          </a:ln>
+          <a:effectLst/>
+        </p:spPr>
+        <p:style>
+          <a:lnRef idx="1">
+            <a:schemeClr val="accent1"/>
+          </a:lnRef>
+          <a:fillRef idx="3">
+            <a:schemeClr val="accent1"/>
+          </a:fillRef>
+          <a:effectRef idx="2">
+            <a:schemeClr val="accent1"/>
+          </a:effectRef>
+          <a:fontRef idx="minor">
+            <a:schemeClr val="lt1"/>
+          </a:fontRef>
+        </p:style>
+        <p:txBody>
+          <a:bodyPr rtlCol="0" anchor="ctr"/>
+          <a:lstStyle/>
+          <a:p>
+            <a:pPr algn="ctr"/>
           </a:p>
         </p:txBody>
       </p:sp>
@@ -4169,8 +7366,8 @@
         </p:nvSpPr>
         <p:spPr>
           <a:xfrm>
-            <a:off x="11002975" y="6473952"/>
-            <a:ext cx="731520" cy="274320"/>
+            <a:off x="548640" y="6345936"/>
+            <a:ext cx="8595360" cy="274320"/>
           </a:xfrm>
           <a:prstGeom prst="rect">
             <a:avLst/>
@@ -4178,18 +7375,60 @@
           <a:noFill/>
         </p:spPr>
         <p:txBody>
-          <a:bodyPr wrap="square" anchor="t" lIns="45720" rIns="45720" tIns="0" bIns="0">
+          <a:bodyPr wrap="square" anchor="t" lIns="54864" rIns="54864" tIns="0" bIns="0">
             <a:spAutoFit/>
           </a:bodyPr>
           <a:lstStyle/>
           <a:p>
+            <a:pPr algn="l">
+              <a:lnSpc>
+                <a:spcPct val="130000"/>
+              </a:lnSpc>
+              <a:defRPr sz="1000"/>
+            </a:pPr>
+            <a:r>
+              <a:rPr sz="1000" b="0" u="none">
+                <a:solidFill>
+                  <a:srgbClr val="8A94A6"/>
+                </a:solidFill>
+                <a:latin typeface="Times New Roman"/>
+                <a:ea typeface="微软雅黑"/>
+              </a:rPr>
+              <a:t>胶州四中高三级部物理学科单元达标评测题</a:t>
+            </a:r>
+          </a:p>
+        </p:txBody>
+      </p:sp>
+      <p:sp>
+        <p:nvSpPr>
+          <p:cNvPr id="10" name="TextBox 9"/>
+          <p:cNvSpPr txBox="1"/>
+          <p:nvPr/>
+        </p:nvSpPr>
+        <p:spPr>
+          <a:xfrm>
+            <a:off x="11048695" y="6345936"/>
+            <a:ext cx="685800" cy="274320"/>
+          </a:xfrm>
+          <a:prstGeom prst="rect">
+            <a:avLst/>
+          </a:prstGeom>
+          <a:noFill/>
+        </p:spPr>
+        <p:txBody>
+          <a:bodyPr wrap="square" anchor="t" lIns="54864" rIns="54864" tIns="0" bIns="0">
+            <a:spAutoFit/>
+          </a:bodyPr>
+          <a:lstStyle/>
+          <a:p>
             <a:pPr algn="r">
               <a:lnSpc>
-                <a:spcPct val="125000"/>
+                <a:spcPct val="130000"/>
               </a:lnSpc>
+              <a:defRPr sz="1000"/>
             </a:pPr>
             <a:r>
-              <a:rPr sz="1000" b="0">
+              <a:rPr sz="1000" b="0" u="none">
                 <a:solidFill>
                   <a:srgbClr val="8A94A6"/>
                 </a:solidFill>
@@ -4228,7 +7467,7 @@
         <p:spPr>
           <a:xfrm>
             <a:off x="0" y="0"/>
-            <a:ext cx="12191695" cy="109728"/>
+            <a:ext cx="12191695" cy="822960"/>
           </a:xfrm>
           <a:prstGeom prst="rect">
             <a:avLst/>
@@ -4271,14 +7510,14 @@
         </p:nvSpPr>
         <p:spPr>
           <a:xfrm>
-            <a:off x="548640" y="502920"/>
-            <a:ext cx="118872" cy="566928"/>
+            <a:off x="0" y="822960"/>
+            <a:ext cx="12191695" cy="45720"/>
           </a:xfrm>
           <a:prstGeom prst="rect">
             <a:avLst/>
           </a:prstGeom>
           <a:solidFill>
-            <a:srgbClr val="4B5563"/>
+            <a:srgbClr val="475569"/>
           </a:solidFill>
           <a:ln>
             <a:noFill/>
@@ -4315,8 +7554,8 @@
         </p:nvSpPr>
         <p:spPr>
           <a:xfrm>
-            <a:off x="786384" y="457200"/>
-            <a:ext cx="10728655" cy="685800"/>
+            <a:off x="548640" y="137160"/>
+            <a:ext cx="8442656" cy="548640"/>
           </a:xfrm>
           <a:prstGeom prst="rect">
             <a:avLst/>
@@ -4324,20 +7563,21 @@
           <a:noFill/>
         </p:spPr>
         <p:txBody>
-          <a:bodyPr wrap="square" anchor="ctr" lIns="45720" rIns="45720" tIns="0" bIns="0">
+          <a:bodyPr wrap="square" anchor="ctr" lIns="54864" rIns="54864" tIns="0" bIns="0">
             <a:spAutoFit/>
           </a:bodyPr>
           <a:lstStyle/>
           <a:p>
             <a:pPr algn="l">
               <a:lnSpc>
-                <a:spcPct val="125000"/>
+                <a:spcPct val="130000"/>
               </a:lnSpc>
+              <a:defRPr sz="2600"/>
             </a:pPr>
             <a:r>
-              <a:rPr sz="3000" b="1">
-                <a:solidFill>
-                  <a:srgbClr val="1F2937"/>
+              <a:rPr sz="2600" b="1" u="none">
+                <a:solidFill>
+                  <a:srgbClr val="FFFFFF"/>
                 </a:solidFill>
                 <a:latin typeface="Times New Roman"/>
                 <a:ea typeface="微软雅黑"/>
@@ -4355,14 +7595,16 @@
         </p:nvSpPr>
         <p:spPr>
           <a:xfrm>
-            <a:off x="9137599" y="530352"/>
-            <a:ext cx="2505456" cy="384048"/>
+            <a:off x="10097719" y="219456"/>
+            <a:ext cx="1545336" cy="365760"/>
           </a:xfrm>
           <a:prstGeom prst="roundRect">
-            <a:avLst/>
+            <a:avLst>
+              <a:gd name="adj" fmla="val 30000"/>
+            </a:avLst>
           </a:prstGeom>
           <a:solidFill>
-            <a:srgbClr val="F1F3F6"/>
+            <a:srgbClr val="2E4A78"/>
           </a:solidFill>
           <a:ln>
             <a:noFill/>
@@ -4399,8 +7641,8 @@
         </p:nvSpPr>
         <p:spPr>
           <a:xfrm>
-            <a:off x="9137599" y="548640"/>
-            <a:ext cx="2505456" cy="365760"/>
+            <a:off x="10097719" y="237744"/>
+            <a:ext cx="1545336" cy="329184"/>
           </a:xfrm>
           <a:prstGeom prst="rect">
             <a:avLst/>
@@ -4408,25 +7650,26 @@
           <a:noFill/>
         </p:spPr>
         <p:txBody>
-          <a:bodyPr wrap="square" anchor="ctr" lIns="45720" rIns="45720" tIns="0" bIns="0">
+          <a:bodyPr wrap="square" anchor="ctr" lIns="54864" rIns="54864" tIns="0" bIns="0">
             <a:spAutoFit/>
           </a:bodyPr>
           <a:lstStyle/>
           <a:p>
             <a:pPr algn="ctr">
               <a:lnSpc>
-                <a:spcPct val="125000"/>
+                <a:spcPct val="130000"/>
               </a:lnSpc>
+              <a:defRPr sz="1100"/>
             </a:pPr>
             <a:r>
-              <a:rPr sz="1200" b="1">
-                <a:solidFill>
-                  <a:srgbClr val="4B5563"/>
+              <a:rPr sz="1100" b="1" u="none">
+                <a:solidFill>
+                  <a:srgbClr val="FFFFFF"/>
                 </a:solidFill>
                 <a:latin typeface="Times New Roman"/>
                 <a:ea typeface="微软雅黑"/>
               </a:rPr>
-              <a:t>一、单项选择题：本题共8</a:t>
+              <a:t>一、单项选择题</a:t>
             </a:r>
           </a:p>
         </p:txBody>
@@ -4439,8 +7682,8 @@
         </p:nvSpPr>
         <p:spPr>
           <a:xfrm>
-            <a:off x="822960" y="1554480"/>
-            <a:ext cx="10545775" cy="2377440"/>
+            <a:off x="548640" y="1078992"/>
+            <a:ext cx="11094415" cy="2103120"/>
           </a:xfrm>
           <a:prstGeom prst="rect">
             <a:avLst/>
@@ -4448,7 +7691,7 @@
           <a:noFill/>
         </p:spPr>
         <p:txBody>
-          <a:bodyPr wrap="square" anchor="t" lIns="45720" rIns="45720" tIns="0" bIns="0">
+          <a:bodyPr wrap="square" anchor="t" lIns="54864" rIns="54864" tIns="0" bIns="0">
             <a:spAutoFit/>
           </a:bodyPr>
           <a:lstStyle/>
@@ -4457,56 +7700,62 @@
               <a:lnSpc>
                 <a:spcPct val="145000"/>
               </a:lnSpc>
+              <a:defRPr sz="2200"/>
             </a:pPr>
             <a:r>
-              <a:rPr sz="2400" b="0">
+              <a:rPr sz="2200" b="0" u="none">
                 <a:solidFill>
                   <a:srgbClr val="111827"/>
-                </a:solidFill>
-                <a:latin typeface="Times New Roman"/>
-              </a:rPr>
-              <a:t>关于匀变速直线运动，下列说法正确的是（　　） A. 速度随时间均匀变化　B. 加速度随时间均匀变化　C. 位移随时间均匀变化　D. 加速度方向与速度方向一定相同</a:t>
-            </a:r>
-          </a:p>
-        </p:txBody>
-      </p:sp>
-      <p:sp>
-        <p:nvSpPr>
-          <p:cNvPr id="8" name="TextBox 7"/>
-          <p:cNvSpPr txBox="1"/>
-          <p:nvPr/>
-        </p:nvSpPr>
-        <p:spPr>
-          <a:xfrm>
-            <a:off x="548640" y="6473952"/>
-            <a:ext cx="8229600" cy="274320"/>
-          </a:xfrm>
-          <a:prstGeom prst="rect">
-            <a:avLst/>
-          </a:prstGeom>
-          <a:noFill/>
-        </p:spPr>
-        <p:txBody>
-          <a:bodyPr wrap="square" anchor="t" lIns="45720" rIns="45720" tIns="0" bIns="0">
-            <a:spAutoFit/>
-          </a:bodyPr>
-          <a:lstStyle/>
-          <a:p>
-            <a:pPr algn="l">
-              <a:lnSpc>
-                <a:spcPct val="125000"/>
-              </a:lnSpc>
-            </a:pPr>
-            <a:r>
-              <a:rPr sz="1000" b="0">
-                <a:solidFill>
-                  <a:srgbClr val="8A94A6"/>
                 </a:solidFill>
                 <a:latin typeface="Times New Roman"/>
                 <a:ea typeface="微软雅黑"/>
               </a:rPr>
-              <a:t>胶州四中 · 第 1 题</a:t>
-            </a:r>
+              <a:t>关于匀变速直线运动，下列说法正确的是（　　） A. 速度随时间均匀变化　B. 加速度随时间均匀变化　C. 位移随时间均匀变化　D. 加速度方向与速度方向一定相同</a:t>
+            </a:r>
+          </a:p>
+        </p:txBody>
+      </p:sp>
+      <p:sp>
+        <p:nvSpPr>
+          <p:cNvPr id="8" name="Rectangle 7"/>
+          <p:cNvSpPr/>
+          <p:nvPr/>
+        </p:nvSpPr>
+        <p:spPr>
+          <a:xfrm>
+            <a:off x="0" y="6739128"/>
+            <a:ext cx="12191695" cy="118872"/>
+          </a:xfrm>
+          <a:prstGeom prst="rect">
+            <a:avLst/>
+          </a:prstGeom>
+          <a:solidFill>
+            <a:srgbClr val="475569"/>
+          </a:solidFill>
+          <a:ln>
+            <a:noFill/>
+          </a:ln>
+          <a:effectLst/>
+        </p:spPr>
+        <p:style>
+          <a:lnRef idx="1">
+            <a:schemeClr val="accent1"/>
+          </a:lnRef>
+          <a:fillRef idx="3">
+            <a:schemeClr val="accent1"/>
+          </a:fillRef>
+          <a:effectRef idx="2">
+            <a:schemeClr val="accent1"/>
+          </a:effectRef>
+          <a:fontRef idx="minor">
+            <a:schemeClr val="lt1"/>
+          </a:fontRef>
+        </p:style>
+        <p:txBody>
+          <a:bodyPr rtlCol="0" anchor="ctr"/>
+          <a:lstStyle/>
+          <a:p>
+            <a:pPr algn="ctr"/>
           </a:p>
         </p:txBody>
       </p:sp>
@@ -4518,8 +7767,8 @@
         </p:nvSpPr>
         <p:spPr>
           <a:xfrm>
-            <a:off x="11002975" y="6473952"/>
-            <a:ext cx="731520" cy="274320"/>
+            <a:off x="548640" y="6345936"/>
+            <a:ext cx="8595360" cy="274320"/>
           </a:xfrm>
           <a:prstGeom prst="rect">
             <a:avLst/>
@@ -4527,18 +7776,60 @@
           <a:noFill/>
         </p:spPr>
         <p:txBody>
-          <a:bodyPr wrap="square" anchor="t" lIns="45720" rIns="45720" tIns="0" bIns="0">
+          <a:bodyPr wrap="square" anchor="t" lIns="54864" rIns="54864" tIns="0" bIns="0">
             <a:spAutoFit/>
           </a:bodyPr>
           <a:lstStyle/>
           <a:p>
+            <a:pPr algn="l">
+              <a:lnSpc>
+                <a:spcPct val="130000"/>
+              </a:lnSpc>
+              <a:defRPr sz="1000"/>
+            </a:pPr>
+            <a:r>
+              <a:rPr sz="1000" b="0" u="none">
+                <a:solidFill>
+                  <a:srgbClr val="8A94A6"/>
+                </a:solidFill>
+                <a:latin typeface="Times New Roman"/>
+                <a:ea typeface="微软雅黑"/>
+              </a:rPr>
+              <a:t>胶州四中高三级部物理学科单元达标评测题</a:t>
+            </a:r>
+          </a:p>
+        </p:txBody>
+      </p:sp>
+      <p:sp>
+        <p:nvSpPr>
+          <p:cNvPr id="10" name="TextBox 9"/>
+          <p:cNvSpPr txBox="1"/>
+          <p:nvPr/>
+        </p:nvSpPr>
+        <p:spPr>
+          <a:xfrm>
+            <a:off x="11048695" y="6345936"/>
+            <a:ext cx="685800" cy="274320"/>
+          </a:xfrm>
+          <a:prstGeom prst="rect">
+            <a:avLst/>
+          </a:prstGeom>
+          <a:noFill/>
+        </p:spPr>
+        <p:txBody>
+          <a:bodyPr wrap="square" anchor="t" lIns="54864" rIns="54864" tIns="0" bIns="0">
+            <a:spAutoFit/>
+          </a:bodyPr>
+          <a:lstStyle/>
+          <a:p>
             <a:pPr algn="r">
               <a:lnSpc>
-                <a:spcPct val="125000"/>
+                <a:spcPct val="130000"/>
               </a:lnSpc>
+              <a:defRPr sz="1000"/>
             </a:pPr>
             <a:r>
-              <a:rPr sz="1000" b="0">
+              <a:rPr sz="1000" b="0" u="none">
                 <a:solidFill>
                   <a:srgbClr val="8A94A6"/>
                 </a:solidFill>
@@ -4577,7 +7868,7 @@
         <p:spPr>
           <a:xfrm>
             <a:off x="0" y="0"/>
-            <a:ext cx="12191695" cy="109728"/>
+            <a:ext cx="12191695" cy="822960"/>
           </a:xfrm>
           <a:prstGeom prst="rect">
             <a:avLst/>
@@ -4620,14 +7911,14 @@
         </p:nvSpPr>
         <p:spPr>
           <a:xfrm>
-            <a:off x="548640" y="502920"/>
-            <a:ext cx="118872" cy="566928"/>
+            <a:off x="0" y="822960"/>
+            <a:ext cx="12191695" cy="45720"/>
           </a:xfrm>
           <a:prstGeom prst="rect">
             <a:avLst/>
           </a:prstGeom>
           <a:solidFill>
-            <a:srgbClr val="4B5563"/>
+            <a:srgbClr val="475569"/>
           </a:solidFill>
           <a:ln>
             <a:noFill/>
@@ -4664,8 +7955,8 @@
         </p:nvSpPr>
         <p:spPr>
           <a:xfrm>
-            <a:off x="786384" y="457200"/>
-            <a:ext cx="10728655" cy="685800"/>
+            <a:off x="548640" y="137160"/>
+            <a:ext cx="8442656" cy="548640"/>
           </a:xfrm>
           <a:prstGeom prst="rect">
             <a:avLst/>
@@ -4673,25 +7964,26 @@
           <a:noFill/>
         </p:spPr>
         <p:txBody>
-          <a:bodyPr wrap="square" anchor="ctr" lIns="45720" rIns="45720" tIns="0" bIns="0">
+          <a:bodyPr wrap="square" anchor="ctr" lIns="54864" rIns="54864" tIns="0" bIns="0">
             <a:spAutoFit/>
           </a:bodyPr>
           <a:lstStyle/>
           <a:p>
             <a:pPr algn="l">
               <a:lnSpc>
-                <a:spcPct val="125000"/>
+                <a:spcPct val="130000"/>
               </a:lnSpc>
+              <a:defRPr sz="2600"/>
             </a:pPr>
             <a:r>
-              <a:rPr sz="3000" b="1">
-                <a:solidFill>
-                  <a:srgbClr val="1F2937"/>
+              <a:rPr sz="2600" b="1" u="none">
+                <a:solidFill>
+                  <a:srgbClr val="FFFFFF"/>
                 </a:solidFill>
                 <a:latin typeface="Times New Roman"/>
                 <a:ea typeface="微软雅黑"/>
               </a:rPr>
-              <a:t>第 2 题</a:t>
+              <a:t>第 1 题</a:t>
             </a:r>
           </a:p>
         </p:txBody>
@@ -4704,14 +7996,16 @@
         </p:nvSpPr>
         <p:spPr>
           <a:xfrm>
-            <a:off x="9137599" y="530352"/>
-            <a:ext cx="2505456" cy="384048"/>
+            <a:off x="10097719" y="219456"/>
+            <a:ext cx="1545336" cy="365760"/>
           </a:xfrm>
           <a:prstGeom prst="roundRect">
-            <a:avLst/>
+            <a:avLst>
+              <a:gd name="adj" fmla="val 30000"/>
+            </a:avLst>
           </a:prstGeom>
           <a:solidFill>
-            <a:srgbClr val="F1F3F6"/>
+            <a:srgbClr val="2E4A78"/>
           </a:solidFill>
           <a:ln>
             <a:noFill/>
@@ -4748,8 +8042,8 @@
         </p:nvSpPr>
         <p:spPr>
           <a:xfrm>
-            <a:off x="9137599" y="548640"/>
-            <a:ext cx="2505456" cy="365760"/>
+            <a:off x="10097719" y="237744"/>
+            <a:ext cx="1545336" cy="329184"/>
           </a:xfrm>
           <a:prstGeom prst="rect">
             <a:avLst/>
@@ -4757,39 +8051,84 @@
           <a:noFill/>
         </p:spPr>
         <p:txBody>
-          <a:bodyPr wrap="square" anchor="ctr" lIns="45720" rIns="45720" tIns="0" bIns="0">
+          <a:bodyPr wrap="square" anchor="ctr" lIns="54864" rIns="54864" tIns="0" bIns="0">
             <a:spAutoFit/>
           </a:bodyPr>
           <a:lstStyle/>
           <a:p>
             <a:pPr algn="ctr">
               <a:lnSpc>
-                <a:spcPct val="125000"/>
+                <a:spcPct val="130000"/>
               </a:lnSpc>
+              <a:defRPr sz="1100"/>
             </a:pPr>
             <a:r>
-              <a:rPr sz="1200" b="1">
-                <a:solidFill>
-                  <a:srgbClr val="4B5563"/>
+              <a:rPr sz="1100" b="1" u="none">
+                <a:solidFill>
+                  <a:srgbClr val="FFFFFF"/>
                 </a:solidFill>
                 <a:latin typeface="Times New Roman"/>
                 <a:ea typeface="微软雅黑"/>
               </a:rPr>
-              <a:t>一、单项选择题：本题共8</a:t>
-            </a:r>
-          </a:p>
-        </p:txBody>
-      </p:sp>
-      <p:sp>
-        <p:nvSpPr>
-          <p:cNvPr id="7" name="TextBox 6"/>
+              <a:t>一、单项选择题</a:t>
+            </a:r>
+          </a:p>
+        </p:txBody>
+      </p:sp>
+      <p:sp>
+        <p:nvSpPr>
+          <p:cNvPr id="7" name="Rectangle 6"/>
+          <p:cNvSpPr/>
+          <p:nvPr/>
+        </p:nvSpPr>
+        <p:spPr>
+          <a:xfrm>
+            <a:off x="548640" y="1097280"/>
+            <a:ext cx="64008" cy="566928"/>
+          </a:xfrm>
+          <a:prstGeom prst="rect">
+            <a:avLst/>
+          </a:prstGeom>
+          <a:solidFill>
+            <a:srgbClr val="16A34A"/>
+          </a:solidFill>
+          <a:ln>
+            <a:noFill/>
+          </a:ln>
+          <a:effectLst/>
+        </p:spPr>
+        <p:style>
+          <a:lnRef idx="1">
+            <a:schemeClr val="accent1"/>
+          </a:lnRef>
+          <a:fillRef idx="3">
+            <a:schemeClr val="accent1"/>
+          </a:fillRef>
+          <a:effectRef idx="2">
+            <a:schemeClr val="accent1"/>
+          </a:effectRef>
+          <a:fontRef idx="minor">
+            <a:schemeClr val="lt1"/>
+          </a:fontRef>
+        </p:style>
+        <p:txBody>
+          <a:bodyPr rtlCol="0" anchor="ctr"/>
+          <a:lstStyle/>
+          <a:p>
+            <a:pPr algn="ctr"/>
+          </a:p>
+        </p:txBody>
+      </p:sp>
+      <p:sp>
+        <p:nvSpPr>
+          <p:cNvPr id="8" name="TextBox 7"/>
           <p:cNvSpPr txBox="1"/>
           <p:nvPr/>
         </p:nvSpPr>
         <p:spPr>
           <a:xfrm>
-            <a:off x="822960" y="1554480"/>
-            <a:ext cx="10545775" cy="2377440"/>
+            <a:off x="731520" y="1097280"/>
+            <a:ext cx="10911535" cy="566928"/>
           </a:xfrm>
           <a:prstGeom prst="rect">
             <a:avLst/>
@@ -4797,88 +8136,94 @@
           <a:noFill/>
         </p:spPr>
         <p:txBody>
-          <a:bodyPr wrap="square" anchor="t" lIns="45720" rIns="45720" tIns="0" bIns="0">
+          <a:bodyPr wrap="square" anchor="t" lIns="54864" rIns="54864" tIns="0" bIns="0">
             <a:spAutoFit/>
           </a:bodyPr>
           <a:lstStyle/>
           <a:p>
             <a:pPr algn="l">
               <a:lnSpc>
-                <a:spcPct val="145000"/>
+                <a:spcPct val="135000"/>
               </a:lnSpc>
+              <a:defRPr sz="2200"/>
             </a:pPr>
             <a:r>
-              <a:rPr sz="2400" b="0">
-                <a:solidFill>
-                  <a:srgbClr val="111827"/>
-                </a:solidFill>
-                <a:latin typeface="Times New Roman"/>
-              </a:rPr>
-              <a:t>物体做初速度为零的匀加速直线运动，第1 s内、第2 s内、第3 s内的位移之比为（　　）</a:t>
-            </a:r>
-          </a:p>
-        </p:txBody>
-      </p:sp>
-      <p:sp>
-        <p:nvSpPr>
-          <p:cNvPr id="8" name="TextBox 7"/>
-          <p:cNvSpPr txBox="1"/>
-          <p:nvPr/>
-        </p:nvSpPr>
-        <p:spPr>
-          <a:xfrm>
-            <a:off x="868680" y="2788920"/>
-            <a:ext cx="10362895" cy="3429000"/>
-          </a:xfrm>
-          <a:prstGeom prst="rect">
-            <a:avLst/>
-          </a:prstGeom>
-          <a:noFill/>
-        </p:spPr>
-        <p:txBody>
-          <a:bodyPr wrap="square" anchor="t" lIns="45720" rIns="45720" tIns="0" bIns="0">
-            <a:spAutoFit/>
-          </a:bodyPr>
-          <a:lstStyle/>
-          <a:p>
-            <a:pPr algn="l">
-              <a:lnSpc>
-                <a:spcPct val="140000"/>
-              </a:lnSpc>
-            </a:pPr>
-            <a:r>
-              <a:rPr sz="2000" b="1">
-                <a:solidFill>
-                  <a:srgbClr val="4B5563"/>
+              <a:rPr sz="2200" b="1" u="none">
+                <a:solidFill>
+                  <a:srgbClr val="15803D"/>
                 </a:solidFill>
                 <a:latin typeface="Times New Roman"/>
                 <a:ea typeface="微软雅黑"/>
               </a:rPr>
-              <a:t>A．</a:t>
-            </a:r>
-            <a:r>
-              <a:rPr sz="2000" b="0">
-                <a:solidFill>
-                  <a:srgbClr val="111827"/>
+              <a:t>答案：</a:t>
+            </a:r>
+            <a:r>
+              <a:rPr sz="2200" b="0" u="none">
+                <a:solidFill>
+                  <a:srgbClr val="15803D"/>
                 </a:solidFill>
                 <a:latin typeface="Times New Roman"/>
                 <a:ea typeface="微软雅黑"/>
               </a:rPr>
-              <a:t>1∶2∶3　B. 1∶3∶5　C. 1∶4∶9　D. 1∶1∶1</a:t>
-            </a:r>
-          </a:p>
-        </p:txBody>
-      </p:sp>
-      <p:sp>
-        <p:nvSpPr>
-          <p:cNvPr id="9" name="TextBox 8"/>
+              <a:t>A</a:t>
+            </a:r>
+          </a:p>
+        </p:txBody>
+      </p:sp>
+      <p:sp>
+        <p:nvSpPr>
+          <p:cNvPr id="9" name="Rectangle 8"/>
+          <p:cNvSpPr/>
+          <p:nvPr/>
+        </p:nvSpPr>
+        <p:spPr>
+          <a:xfrm>
+            <a:off x="0" y="6739128"/>
+            <a:ext cx="12191695" cy="118872"/>
+          </a:xfrm>
+          <a:prstGeom prst="rect">
+            <a:avLst/>
+          </a:prstGeom>
+          <a:solidFill>
+            <a:srgbClr val="475569"/>
+          </a:solidFill>
+          <a:ln>
+            <a:noFill/>
+          </a:ln>
+          <a:effectLst/>
+        </p:spPr>
+        <p:style>
+          <a:lnRef idx="1">
+            <a:schemeClr val="accent1"/>
+          </a:lnRef>
+          <a:fillRef idx="3">
+            <a:schemeClr val="accent1"/>
+          </a:fillRef>
+          <a:effectRef idx="2">
+            <a:schemeClr val="accent1"/>
+          </a:effectRef>
+          <a:fontRef idx="minor">
+            <a:schemeClr val="lt1"/>
+          </a:fontRef>
+        </p:style>
+        <p:txBody>
+          <a:bodyPr rtlCol="0" anchor="ctr"/>
+          <a:lstStyle/>
+          <a:p>
+            <a:pPr algn="ctr"/>
+          </a:p>
+        </p:txBody>
+      </p:sp>
+      <p:sp>
+        <p:nvSpPr>
+          <p:cNvPr id="10" name="TextBox 9"/>
           <p:cNvSpPr txBox="1"/>
           <p:nvPr/>
         </p:nvSpPr>
         <p:spPr>
           <a:xfrm>
-            <a:off x="548640" y="6473952"/>
-            <a:ext cx="8229600" cy="274320"/>
+            <a:off x="548640" y="6345936"/>
+            <a:ext cx="8595360" cy="274320"/>
           </a:xfrm>
           <a:prstGeom prst="rect">
             <a:avLst/>
@@ -4886,39 +8231,40 @@
           <a:noFill/>
         </p:spPr>
         <p:txBody>
-          <a:bodyPr wrap="square" anchor="t" lIns="45720" rIns="45720" tIns="0" bIns="0">
+          <a:bodyPr wrap="square" anchor="t" lIns="54864" rIns="54864" tIns="0" bIns="0">
             <a:spAutoFit/>
           </a:bodyPr>
           <a:lstStyle/>
           <a:p>
             <a:pPr algn="l">
               <a:lnSpc>
-                <a:spcPct val="125000"/>
+                <a:spcPct val="130000"/>
               </a:lnSpc>
+              <a:defRPr sz="1000"/>
             </a:pPr>
             <a:r>
-              <a:rPr sz="1000" b="0">
+              <a:rPr sz="1000" b="0" u="none">
                 <a:solidFill>
                   <a:srgbClr val="8A94A6"/>
                 </a:solidFill>
                 <a:latin typeface="Times New Roman"/>
                 <a:ea typeface="微软雅黑"/>
               </a:rPr>
-              <a:t>胶州四中 · 第 2 题</a:t>
-            </a:r>
-          </a:p>
-        </p:txBody>
-      </p:sp>
-      <p:sp>
-        <p:nvSpPr>
-          <p:cNvPr id="10" name="TextBox 9"/>
+              <a:t>胶州四中高三级部物理学科单元达标评测题</a:t>
+            </a:r>
+          </a:p>
+        </p:txBody>
+      </p:sp>
+      <p:sp>
+        <p:nvSpPr>
+          <p:cNvPr id="11" name="TextBox 10"/>
           <p:cNvSpPr txBox="1"/>
           <p:nvPr/>
         </p:nvSpPr>
         <p:spPr>
           <a:xfrm>
-            <a:off x="11002975" y="6473952"/>
-            <a:ext cx="731520" cy="274320"/>
+            <a:off x="11048695" y="6345936"/>
+            <a:ext cx="685800" cy="274320"/>
           </a:xfrm>
           <a:prstGeom prst="rect">
             <a:avLst/>
@@ -4926,18 +8272,19 @@
           <a:noFill/>
         </p:spPr>
         <p:txBody>
-          <a:bodyPr wrap="square" anchor="t" lIns="45720" rIns="45720" tIns="0" bIns="0">
+          <a:bodyPr wrap="square" anchor="t" lIns="54864" rIns="54864" tIns="0" bIns="0">
             <a:spAutoFit/>
           </a:bodyPr>
           <a:lstStyle/>
           <a:p>
             <a:pPr algn="r">
               <a:lnSpc>
-                <a:spcPct val="125000"/>
+                <a:spcPct val="130000"/>
               </a:lnSpc>
+              <a:defRPr sz="1000"/>
             </a:pPr>
             <a:r>
-              <a:rPr sz="1000" b="0">
+              <a:rPr sz="1000" b="0" u="none">
                 <a:solidFill>
                   <a:srgbClr val="8A94A6"/>
                 </a:solidFill>
@@ -4976,7 +8323,7 @@
         <p:spPr>
           <a:xfrm>
             <a:off x="0" y="0"/>
-            <a:ext cx="12191695" cy="109728"/>
+            <a:ext cx="12191695" cy="822960"/>
           </a:xfrm>
           <a:prstGeom prst="rect">
             <a:avLst/>
@@ -5019,14 +8366,14 @@
         </p:nvSpPr>
         <p:spPr>
           <a:xfrm>
-            <a:off x="548640" y="502920"/>
-            <a:ext cx="118872" cy="566928"/>
+            <a:off x="0" y="822960"/>
+            <a:ext cx="12191695" cy="45720"/>
           </a:xfrm>
           <a:prstGeom prst="rect">
             <a:avLst/>
           </a:prstGeom>
           <a:solidFill>
-            <a:srgbClr val="4B5563"/>
+            <a:srgbClr val="475569"/>
           </a:solidFill>
           <a:ln>
             <a:noFill/>
@@ -5063,8 +8410,8 @@
         </p:nvSpPr>
         <p:spPr>
           <a:xfrm>
-            <a:off x="786384" y="457200"/>
-            <a:ext cx="10728655" cy="685800"/>
+            <a:off x="548640" y="137160"/>
+            <a:ext cx="8442656" cy="548640"/>
           </a:xfrm>
           <a:prstGeom prst="rect">
             <a:avLst/>
@@ -5072,25 +8419,26 @@
           <a:noFill/>
         </p:spPr>
         <p:txBody>
-          <a:bodyPr wrap="square" anchor="ctr" lIns="45720" rIns="45720" tIns="0" bIns="0">
+          <a:bodyPr wrap="square" anchor="ctr" lIns="54864" rIns="54864" tIns="0" bIns="0">
             <a:spAutoFit/>
           </a:bodyPr>
           <a:lstStyle/>
           <a:p>
             <a:pPr algn="l">
               <a:lnSpc>
-                <a:spcPct val="125000"/>
+                <a:spcPct val="130000"/>
               </a:lnSpc>
+              <a:defRPr sz="2600"/>
             </a:pPr>
             <a:r>
-              <a:rPr sz="3000" b="1">
-                <a:solidFill>
-                  <a:srgbClr val="1F2937"/>
+              <a:rPr sz="2600" b="1" u="none">
+                <a:solidFill>
+                  <a:srgbClr val="FFFFFF"/>
                 </a:solidFill>
                 <a:latin typeface="Times New Roman"/>
                 <a:ea typeface="微软雅黑"/>
               </a:rPr>
-              <a:t>第 3 题</a:t>
+              <a:t>第 2 题</a:t>
             </a:r>
           </a:p>
         </p:txBody>
@@ -5103,14 +8451,16 @@
         </p:nvSpPr>
         <p:spPr>
           <a:xfrm>
-            <a:off x="9137599" y="530352"/>
-            <a:ext cx="2505456" cy="384048"/>
+            <a:off x="10097719" y="219456"/>
+            <a:ext cx="1545336" cy="365760"/>
           </a:xfrm>
           <a:prstGeom prst="roundRect">
-            <a:avLst/>
+            <a:avLst>
+              <a:gd name="adj" fmla="val 30000"/>
+            </a:avLst>
           </a:prstGeom>
           <a:solidFill>
-            <a:srgbClr val="F1F3F6"/>
+            <a:srgbClr val="2E4A78"/>
           </a:solidFill>
           <a:ln>
             <a:noFill/>
@@ -5147,8 +8497,8 @@
         </p:nvSpPr>
         <p:spPr>
           <a:xfrm>
-            <a:off x="9137599" y="548640"/>
-            <a:ext cx="2505456" cy="365760"/>
+            <a:off x="10097719" y="237744"/>
+            <a:ext cx="1545336" cy="329184"/>
           </a:xfrm>
           <a:prstGeom prst="rect">
             <a:avLst/>
@@ -5156,25 +8506,26 @@
           <a:noFill/>
         </p:spPr>
         <p:txBody>
-          <a:bodyPr wrap="square" anchor="ctr" lIns="45720" rIns="45720" tIns="0" bIns="0">
+          <a:bodyPr wrap="square" anchor="ctr" lIns="54864" rIns="54864" tIns="0" bIns="0">
             <a:spAutoFit/>
           </a:bodyPr>
           <a:lstStyle/>
           <a:p>
             <a:pPr algn="ctr">
               <a:lnSpc>
-                <a:spcPct val="125000"/>
+                <a:spcPct val="130000"/>
               </a:lnSpc>
+              <a:defRPr sz="1100"/>
             </a:pPr>
             <a:r>
-              <a:rPr sz="1200" b="1">
-                <a:solidFill>
-                  <a:srgbClr val="4B5563"/>
+              <a:rPr sz="1100" b="1" u="none">
+                <a:solidFill>
+                  <a:srgbClr val="FFFFFF"/>
                 </a:solidFill>
                 <a:latin typeface="Times New Roman"/>
                 <a:ea typeface="微软雅黑"/>
               </a:rPr>
-              <a:t>一、单项选择题：本题共8</a:t>
+              <a:t>一、单项选择题</a:t>
             </a:r>
           </a:p>
         </p:txBody>
@@ -5187,8 +8538,8 @@
         </p:nvSpPr>
         <p:spPr>
           <a:xfrm>
-            <a:off x="822960" y="1554480"/>
-            <a:ext cx="10545775" cy="2377440"/>
+            <a:off x="548640" y="1078992"/>
+            <a:ext cx="11094415" cy="2103120"/>
           </a:xfrm>
           <a:prstGeom prst="rect">
             <a:avLst/>
@@ -5196,7 +8547,7 @@
           <a:noFill/>
         </p:spPr>
         <p:txBody>
-          <a:bodyPr wrap="square" anchor="t" lIns="45720" rIns="45720" tIns="0" bIns="0">
+          <a:bodyPr wrap="square" anchor="t" lIns="54864" rIns="54864" tIns="0" bIns="0">
             <a:spAutoFit/>
           </a:bodyPr>
           <a:lstStyle/>
@@ -5205,15 +8556,17 @@
               <a:lnSpc>
                 <a:spcPct val="145000"/>
               </a:lnSpc>
+              <a:defRPr sz="2200"/>
             </a:pPr>
             <a:r>
-              <a:rPr sz="2400" b="0">
+              <a:rPr sz="2200" b="0" u="none">
                 <a:solidFill>
                   <a:srgbClr val="111827"/>
                 </a:solidFill>
                 <a:latin typeface="Times New Roman"/>
+                <a:ea typeface="微软雅黑"/>
               </a:rPr>
-              <a:t>汽车以20 m/s的速度行驶，刹车后做匀减速直线运动，加速度大小为5 m/s²，则刹车后6 s内的位移为（　　）</a:t>
+              <a:t>物体做初速度为零的匀加速直线运动，第1 s内、第2 s内、第3 s内的位移之比为（　　）</a:t>
             </a:r>
           </a:p>
         </p:txBody>
@@ -5226,8 +8579,8 @@
         </p:nvSpPr>
         <p:spPr>
           <a:xfrm>
-            <a:off x="868680" y="2788920"/>
-            <a:ext cx="10362895" cy="3429000"/>
+            <a:off x="548640" y="2182876"/>
+            <a:ext cx="5437479" cy="548640"/>
           </a:xfrm>
           <a:prstGeom prst="rect">
             <a:avLst/>
@@ -5235,20 +8588,21 @@
           <a:noFill/>
         </p:spPr>
         <p:txBody>
-          <a:bodyPr wrap="square" anchor="t" lIns="45720" rIns="45720" tIns="0" bIns="0">
+          <a:bodyPr wrap="square" anchor="t" lIns="54864" rIns="54864" tIns="0" bIns="0">
             <a:spAutoFit/>
           </a:bodyPr>
           <a:lstStyle/>
           <a:p>
-            <a:pPr algn="l">
+            <a:pPr algn="l" marL="365760" indent="-365760">
               <a:lnSpc>
-                <a:spcPct val="140000"/>
+                <a:spcPct val="125000"/>
               </a:lnSpc>
+              <a:defRPr sz="1800"/>
             </a:pPr>
             <a:r>
-              <a:rPr sz="2000" b="1">
-                <a:solidFill>
-                  <a:srgbClr val="4B5563"/>
+              <a:rPr sz="1800" b="1" u="none">
+                <a:solidFill>
+                  <a:srgbClr val="475569"/>
                 </a:solidFill>
                 <a:latin typeface="Times New Roman"/>
                 <a:ea typeface="微软雅黑"/>
@@ -5256,28 +8610,72 @@
               <a:t>A．</a:t>
             </a:r>
             <a:r>
-              <a:rPr sz="2000" b="0">
+              <a:rPr sz="1800" b="0" u="none">
                 <a:solidFill>
                   <a:srgbClr val="111827"/>
                 </a:solidFill>
                 <a:latin typeface="Times New Roman"/>
                 <a:ea typeface="微软雅黑"/>
               </a:rPr>
-              <a:t>30 m　B. 40 m　C. 60 m　D. 120 m</a:t>
-            </a:r>
-          </a:p>
-        </p:txBody>
-      </p:sp>
-      <p:sp>
-        <p:nvSpPr>
-          <p:cNvPr id="9" name="TextBox 8"/>
+              <a:t>1∶2∶3　B. 1∶3∶5　C. 1∶4∶9　D. 1∶1∶1</a:t>
+            </a:r>
+          </a:p>
+        </p:txBody>
+      </p:sp>
+      <p:sp>
+        <p:nvSpPr>
+          <p:cNvPr id="9" name="Rectangle 8"/>
+          <p:cNvSpPr/>
+          <p:nvPr/>
+        </p:nvSpPr>
+        <p:spPr>
+          <a:xfrm>
+            <a:off x="0" y="6739128"/>
+            <a:ext cx="12191695" cy="118872"/>
+          </a:xfrm>
+          <a:prstGeom prst="rect">
+            <a:avLst/>
+          </a:prstGeom>
+          <a:solidFill>
+            <a:srgbClr val="475569"/>
+          </a:solidFill>
+          <a:ln>
+            <a:noFill/>
+          </a:ln>
+          <a:effectLst/>
+        </p:spPr>
+        <p:style>
+          <a:lnRef idx="1">
+            <a:schemeClr val="accent1"/>
+          </a:lnRef>
+          <a:fillRef idx="3">
+            <a:schemeClr val="accent1"/>
+          </a:fillRef>
+          <a:effectRef idx="2">
+            <a:schemeClr val="accent1"/>
+          </a:effectRef>
+          <a:fontRef idx="minor">
+            <a:schemeClr val="lt1"/>
+          </a:fontRef>
+        </p:style>
+        <p:txBody>
+          <a:bodyPr rtlCol="0" anchor="ctr"/>
+          <a:lstStyle/>
+          <a:p>
+            <a:pPr algn="ctr"/>
+          </a:p>
+        </p:txBody>
+      </p:sp>
+      <p:sp>
+        <p:nvSpPr>
+          <p:cNvPr id="10" name="TextBox 9"/>
           <p:cNvSpPr txBox="1"/>
           <p:nvPr/>
         </p:nvSpPr>
         <p:spPr>
           <a:xfrm>
-            <a:off x="548640" y="6473952"/>
-            <a:ext cx="8229600" cy="274320"/>
+            <a:off x="548640" y="6345936"/>
+            <a:ext cx="8595360" cy="274320"/>
           </a:xfrm>
           <a:prstGeom prst="rect">
             <a:avLst/>
@@ -5285,39 +8683,40 @@
           <a:noFill/>
         </p:spPr>
         <p:txBody>
-          <a:bodyPr wrap="square" anchor="t" lIns="45720" rIns="45720" tIns="0" bIns="0">
+          <a:bodyPr wrap="square" anchor="t" lIns="54864" rIns="54864" tIns="0" bIns="0">
             <a:spAutoFit/>
           </a:bodyPr>
           <a:lstStyle/>
           <a:p>
             <a:pPr algn="l">
               <a:lnSpc>
-                <a:spcPct val="125000"/>
+                <a:spcPct val="130000"/>
               </a:lnSpc>
+              <a:defRPr sz="1000"/>
             </a:pPr>
             <a:r>
-              <a:rPr sz="1000" b="0">
+              <a:rPr sz="1000" b="0" u="none">
                 <a:solidFill>
                   <a:srgbClr val="8A94A6"/>
                 </a:solidFill>
                 <a:latin typeface="Times New Roman"/>
                 <a:ea typeface="微软雅黑"/>
               </a:rPr>
-              <a:t>胶州四中 · 第 3 题</a:t>
-            </a:r>
-          </a:p>
-        </p:txBody>
-      </p:sp>
-      <p:sp>
-        <p:nvSpPr>
-          <p:cNvPr id="10" name="TextBox 9"/>
+              <a:t>胶州四中高三级部物理学科单元达标评测题</a:t>
+            </a:r>
+          </a:p>
+        </p:txBody>
+      </p:sp>
+      <p:sp>
+        <p:nvSpPr>
+          <p:cNvPr id="11" name="TextBox 10"/>
           <p:cNvSpPr txBox="1"/>
           <p:nvPr/>
         </p:nvSpPr>
         <p:spPr>
           <a:xfrm>
-            <a:off x="11002975" y="6473952"/>
-            <a:ext cx="731520" cy="274320"/>
+            <a:off x="11048695" y="6345936"/>
+            <a:ext cx="685800" cy="274320"/>
           </a:xfrm>
           <a:prstGeom prst="rect">
             <a:avLst/>
@@ -5325,18 +8724,19 @@
           <a:noFill/>
         </p:spPr>
         <p:txBody>
-          <a:bodyPr wrap="square" anchor="t" lIns="45720" rIns="45720" tIns="0" bIns="0">
+          <a:bodyPr wrap="square" anchor="t" lIns="54864" rIns="54864" tIns="0" bIns="0">
             <a:spAutoFit/>
           </a:bodyPr>
           <a:lstStyle/>
           <a:p>
             <a:pPr algn="r">
               <a:lnSpc>
-                <a:spcPct val="125000"/>
+                <a:spcPct val="130000"/>
               </a:lnSpc>
+              <a:defRPr sz="1000"/>
             </a:pPr>
             <a:r>
-              <a:rPr sz="1000" b="0">
+              <a:rPr sz="1000" b="0" u="none">
                 <a:solidFill>
                   <a:srgbClr val="8A94A6"/>
                 </a:solidFill>
@@ -5375,7 +8775,7 @@
         <p:spPr>
           <a:xfrm>
             <a:off x="0" y="0"/>
-            <a:ext cx="12191695" cy="109728"/>
+            <a:ext cx="12191695" cy="822960"/>
           </a:xfrm>
           <a:prstGeom prst="rect">
             <a:avLst/>
@@ -5418,14 +8818,14 @@
         </p:nvSpPr>
         <p:spPr>
           <a:xfrm>
-            <a:off x="548640" y="502920"/>
-            <a:ext cx="118872" cy="566928"/>
+            <a:off x="0" y="822960"/>
+            <a:ext cx="12191695" cy="45720"/>
           </a:xfrm>
           <a:prstGeom prst="rect">
             <a:avLst/>
           </a:prstGeom>
           <a:solidFill>
-            <a:srgbClr val="4B5563"/>
+            <a:srgbClr val="475569"/>
           </a:solidFill>
           <a:ln>
             <a:noFill/>
@@ -5462,8 +8862,8 @@
         </p:nvSpPr>
         <p:spPr>
           <a:xfrm>
-            <a:off x="786384" y="457200"/>
-            <a:ext cx="10728655" cy="685800"/>
+            <a:off x="548640" y="137160"/>
+            <a:ext cx="8442656" cy="548640"/>
           </a:xfrm>
           <a:prstGeom prst="rect">
             <a:avLst/>
@@ -5471,25 +8871,26 @@
           <a:noFill/>
         </p:spPr>
         <p:txBody>
-          <a:bodyPr wrap="square" anchor="ctr" lIns="45720" rIns="45720" tIns="0" bIns="0">
+          <a:bodyPr wrap="square" anchor="ctr" lIns="54864" rIns="54864" tIns="0" bIns="0">
             <a:spAutoFit/>
           </a:bodyPr>
           <a:lstStyle/>
           <a:p>
             <a:pPr algn="l">
               <a:lnSpc>
-                <a:spcPct val="125000"/>
+                <a:spcPct val="130000"/>
               </a:lnSpc>
+              <a:defRPr sz="2600"/>
             </a:pPr>
             <a:r>
-              <a:rPr sz="3000" b="1">
-                <a:solidFill>
-                  <a:srgbClr val="1F2937"/>
+              <a:rPr sz="2600" b="1" u="none">
+                <a:solidFill>
+                  <a:srgbClr val="FFFFFF"/>
                 </a:solidFill>
                 <a:latin typeface="Times New Roman"/>
                 <a:ea typeface="微软雅黑"/>
               </a:rPr>
-              <a:t>第 4 题</a:t>
+              <a:t>第 2 题</a:t>
             </a:r>
           </a:p>
         </p:txBody>
@@ -5502,14 +8903,16 @@
         </p:nvSpPr>
         <p:spPr>
           <a:xfrm>
-            <a:off x="9137599" y="530352"/>
-            <a:ext cx="2505456" cy="384048"/>
+            <a:off x="10097719" y="219456"/>
+            <a:ext cx="1545336" cy="365760"/>
           </a:xfrm>
           <a:prstGeom prst="roundRect">
-            <a:avLst/>
+            <a:avLst>
+              <a:gd name="adj" fmla="val 30000"/>
+            </a:avLst>
           </a:prstGeom>
           <a:solidFill>
-            <a:srgbClr val="F1F3F6"/>
+            <a:srgbClr val="2E4A78"/>
           </a:solidFill>
           <a:ln>
             <a:noFill/>
@@ -5546,8 +8949,8 @@
         </p:nvSpPr>
         <p:spPr>
           <a:xfrm>
-            <a:off x="9137599" y="548640"/>
-            <a:ext cx="2505456" cy="365760"/>
+            <a:off x="10097719" y="237744"/>
+            <a:ext cx="1545336" cy="329184"/>
           </a:xfrm>
           <a:prstGeom prst="rect">
             <a:avLst/>
@@ -5555,39 +8958,84 @@
           <a:noFill/>
         </p:spPr>
         <p:txBody>
-          <a:bodyPr wrap="square" anchor="ctr" lIns="45720" rIns="45720" tIns="0" bIns="0">
+          <a:bodyPr wrap="square" anchor="ctr" lIns="54864" rIns="54864" tIns="0" bIns="0">
             <a:spAutoFit/>
           </a:bodyPr>
           <a:lstStyle/>
           <a:p>
             <a:pPr algn="ctr">
               <a:lnSpc>
-                <a:spcPct val="125000"/>
+                <a:spcPct val="130000"/>
               </a:lnSpc>
+              <a:defRPr sz="1100"/>
             </a:pPr>
             <a:r>
-              <a:rPr sz="1200" b="1">
-                <a:solidFill>
-                  <a:srgbClr val="4B5563"/>
+              <a:rPr sz="1100" b="1" u="none">
+                <a:solidFill>
+                  <a:srgbClr val="FFFFFF"/>
                 </a:solidFill>
                 <a:latin typeface="Times New Roman"/>
                 <a:ea typeface="微软雅黑"/>
               </a:rPr>
-              <a:t>二、多项选择题：本题共4</a:t>
-            </a:r>
-          </a:p>
-        </p:txBody>
-      </p:sp>
-      <p:sp>
-        <p:nvSpPr>
-          <p:cNvPr id="7" name="TextBox 6"/>
+              <a:t>一、单项选择题</a:t>
+            </a:r>
+          </a:p>
+        </p:txBody>
+      </p:sp>
+      <p:sp>
+        <p:nvSpPr>
+          <p:cNvPr id="7" name="Rectangle 6"/>
+          <p:cNvSpPr/>
+          <p:nvPr/>
+        </p:nvSpPr>
+        <p:spPr>
+          <a:xfrm>
+            <a:off x="548640" y="1097280"/>
+            <a:ext cx="64008" cy="566928"/>
+          </a:xfrm>
+          <a:prstGeom prst="rect">
+            <a:avLst/>
+          </a:prstGeom>
+          <a:solidFill>
+            <a:srgbClr val="16A34A"/>
+          </a:solidFill>
+          <a:ln>
+            <a:noFill/>
+          </a:ln>
+          <a:effectLst/>
+        </p:spPr>
+        <p:style>
+          <a:lnRef idx="1">
+            <a:schemeClr val="accent1"/>
+          </a:lnRef>
+          <a:fillRef idx="3">
+            <a:schemeClr val="accent1"/>
+          </a:fillRef>
+          <a:effectRef idx="2">
+            <a:schemeClr val="accent1"/>
+          </a:effectRef>
+          <a:fontRef idx="minor">
+            <a:schemeClr val="lt1"/>
+          </a:fontRef>
+        </p:style>
+        <p:txBody>
+          <a:bodyPr rtlCol="0" anchor="ctr"/>
+          <a:lstStyle/>
+          <a:p>
+            <a:pPr algn="ctr"/>
+          </a:p>
+        </p:txBody>
+      </p:sp>
+      <p:sp>
+        <p:nvSpPr>
+          <p:cNvPr id="8" name="TextBox 7"/>
           <p:cNvSpPr txBox="1"/>
           <p:nvPr/>
         </p:nvSpPr>
         <p:spPr>
           <a:xfrm>
-            <a:off x="822960" y="1554480"/>
-            <a:ext cx="10545775" cy="2377440"/>
+            <a:off x="731520" y="1097280"/>
+            <a:ext cx="10911535" cy="566928"/>
           </a:xfrm>
           <a:prstGeom prst="rect">
             <a:avLst/>
@@ -5595,78 +9043,94 @@
           <a:noFill/>
         </p:spPr>
         <p:txBody>
-          <a:bodyPr wrap="square" anchor="t" lIns="45720" rIns="45720" tIns="0" bIns="0">
+          <a:bodyPr wrap="square" anchor="t" lIns="54864" rIns="54864" tIns="0" bIns="0">
             <a:spAutoFit/>
           </a:bodyPr>
           <a:lstStyle/>
           <a:p>
             <a:pPr algn="l">
               <a:lnSpc>
-                <a:spcPct val="145000"/>
+                <a:spcPct val="135000"/>
               </a:lnSpc>
+              <a:defRPr sz="2200"/>
             </a:pPr>
             <a:r>
-              <a:rPr sz="2400" b="0">
-                <a:solidFill>
-                  <a:srgbClr val="111827"/>
-                </a:solidFill>
-                <a:latin typeface="Times New Roman"/>
-              </a:rPr>
-              <a:t>甲、乙两物体从同一地点沿同一方向做直线运动，其v-t图像如图，下列说法正确的是（　　） A. 甲做匀加速直线运动 B. 乙做匀减速直线运动 C. t=2 s时两物体相遇 D. 0~4 s内乙的位移比甲大</a:t>
-            </a:r>
-          </a:p>
-        </p:txBody>
-      </p:sp>
-      <p:sp>
-        <p:nvSpPr>
-          <p:cNvPr id="8" name="TextBox 7"/>
-          <p:cNvSpPr txBox="1"/>
-          <p:nvPr/>
-        </p:nvSpPr>
-        <p:spPr>
-          <a:xfrm>
-            <a:off x="548640" y="6473952"/>
-            <a:ext cx="8229600" cy="274320"/>
-          </a:xfrm>
-          <a:prstGeom prst="rect">
-            <a:avLst/>
-          </a:prstGeom>
-          <a:noFill/>
-        </p:spPr>
-        <p:txBody>
-          <a:bodyPr wrap="square" anchor="t" lIns="45720" rIns="45720" tIns="0" bIns="0">
-            <a:spAutoFit/>
-          </a:bodyPr>
-          <a:lstStyle/>
-          <a:p>
-            <a:pPr algn="l">
-              <a:lnSpc>
-                <a:spcPct val="125000"/>
-              </a:lnSpc>
-            </a:pPr>
-            <a:r>
-              <a:rPr sz="1000" b="0">
-                <a:solidFill>
-                  <a:srgbClr val="8A94A6"/>
+              <a:rPr sz="2200" b="1" u="none">
+                <a:solidFill>
+                  <a:srgbClr val="15803D"/>
                 </a:solidFill>
                 <a:latin typeface="Times New Roman"/>
                 <a:ea typeface="微软雅黑"/>
               </a:rPr>
-              <a:t>胶州四中 · 第 4 题</a:t>
-            </a:r>
-          </a:p>
-        </p:txBody>
-      </p:sp>
-      <p:sp>
-        <p:nvSpPr>
-          <p:cNvPr id="9" name="TextBox 8"/>
+              <a:t>答案：</a:t>
+            </a:r>
+            <a:r>
+              <a:rPr sz="2200" b="0" u="none">
+                <a:solidFill>
+                  <a:srgbClr val="15803D"/>
+                </a:solidFill>
+                <a:latin typeface="Times New Roman"/>
+                <a:ea typeface="微软雅黑"/>
+              </a:rPr>
+              <a:t>B</a:t>
+            </a:r>
+          </a:p>
+        </p:txBody>
+      </p:sp>
+      <p:sp>
+        <p:nvSpPr>
+          <p:cNvPr id="9" name="Rectangle 8"/>
+          <p:cNvSpPr/>
+          <p:nvPr/>
+        </p:nvSpPr>
+        <p:spPr>
+          <a:xfrm>
+            <a:off x="0" y="6739128"/>
+            <a:ext cx="12191695" cy="118872"/>
+          </a:xfrm>
+          <a:prstGeom prst="rect">
+            <a:avLst/>
+          </a:prstGeom>
+          <a:solidFill>
+            <a:srgbClr val="475569"/>
+          </a:solidFill>
+          <a:ln>
+            <a:noFill/>
+          </a:ln>
+          <a:effectLst/>
+        </p:spPr>
+        <p:style>
+          <a:lnRef idx="1">
+            <a:schemeClr val="accent1"/>
+          </a:lnRef>
+          <a:fillRef idx="3">
+            <a:schemeClr val="accent1"/>
+          </a:fillRef>
+          <a:effectRef idx="2">
+            <a:schemeClr val="accent1"/>
+          </a:effectRef>
+          <a:fontRef idx="minor">
+            <a:schemeClr val="lt1"/>
+          </a:fontRef>
+        </p:style>
+        <p:txBody>
+          <a:bodyPr rtlCol="0" anchor="ctr"/>
+          <a:lstStyle/>
+          <a:p>
+            <a:pPr algn="ctr"/>
+          </a:p>
+        </p:txBody>
+      </p:sp>
+      <p:sp>
+        <p:nvSpPr>
+          <p:cNvPr id="10" name="TextBox 9"/>
           <p:cNvSpPr txBox="1"/>
           <p:nvPr/>
         </p:nvSpPr>
         <p:spPr>
           <a:xfrm>
-            <a:off x="11002975" y="6473952"/>
-            <a:ext cx="731520" cy="274320"/>
+            <a:off x="548640" y="6345936"/>
+            <a:ext cx="8595360" cy="274320"/>
           </a:xfrm>
           <a:prstGeom prst="rect">
             <a:avLst/>
@@ -5674,18 +9138,60 @@
           <a:noFill/>
         </p:spPr>
         <p:txBody>
-          <a:bodyPr wrap="square" anchor="t" lIns="45720" rIns="45720" tIns="0" bIns="0">
+          <a:bodyPr wrap="square" anchor="t" lIns="54864" rIns="54864" tIns="0" bIns="0">
             <a:spAutoFit/>
           </a:bodyPr>
           <a:lstStyle/>
           <a:p>
+            <a:pPr algn="l">
+              <a:lnSpc>
+                <a:spcPct val="130000"/>
+              </a:lnSpc>
+              <a:defRPr sz="1000"/>
+            </a:pPr>
+            <a:r>
+              <a:rPr sz="1000" b="0" u="none">
+                <a:solidFill>
+                  <a:srgbClr val="8A94A6"/>
+                </a:solidFill>
+                <a:latin typeface="Times New Roman"/>
+                <a:ea typeface="微软雅黑"/>
+              </a:rPr>
+              <a:t>胶州四中高三级部物理学科单元达标评测题</a:t>
+            </a:r>
+          </a:p>
+        </p:txBody>
+      </p:sp>
+      <p:sp>
+        <p:nvSpPr>
+          <p:cNvPr id="11" name="TextBox 10"/>
+          <p:cNvSpPr txBox="1"/>
+          <p:nvPr/>
+        </p:nvSpPr>
+        <p:spPr>
+          <a:xfrm>
+            <a:off x="11048695" y="6345936"/>
+            <a:ext cx="685800" cy="274320"/>
+          </a:xfrm>
+          <a:prstGeom prst="rect">
+            <a:avLst/>
+          </a:prstGeom>
+          <a:noFill/>
+        </p:spPr>
+        <p:txBody>
+          <a:bodyPr wrap="square" anchor="t" lIns="54864" rIns="54864" tIns="0" bIns="0">
+            <a:spAutoFit/>
+          </a:bodyPr>
+          <a:lstStyle/>
+          <a:p>
             <a:pPr algn="r">
               <a:lnSpc>
-                <a:spcPct val="125000"/>
+                <a:spcPct val="130000"/>
               </a:lnSpc>
+              <a:defRPr sz="1000"/>
             </a:pPr>
             <a:r>
-              <a:rPr sz="1000" b="0">
+              <a:rPr sz="1000" b="0" u="none">
                 <a:solidFill>
                   <a:srgbClr val="8A94A6"/>
                 </a:solidFill>
@@ -5724,7 +9230,7 @@
         <p:spPr>
           <a:xfrm>
             <a:off x="0" y="0"/>
-            <a:ext cx="12191695" cy="109728"/>
+            <a:ext cx="12191695" cy="822960"/>
           </a:xfrm>
           <a:prstGeom prst="rect">
             <a:avLst/>
@@ -5767,14 +9273,14 @@
         </p:nvSpPr>
         <p:spPr>
           <a:xfrm>
-            <a:off x="548640" y="502920"/>
-            <a:ext cx="118872" cy="566928"/>
+            <a:off x="0" y="822960"/>
+            <a:ext cx="12191695" cy="45720"/>
           </a:xfrm>
           <a:prstGeom prst="rect">
             <a:avLst/>
           </a:prstGeom>
           <a:solidFill>
-            <a:srgbClr val="4B5563"/>
+            <a:srgbClr val="475569"/>
           </a:solidFill>
           <a:ln>
             <a:noFill/>
@@ -5811,8 +9317,8 @@
         </p:nvSpPr>
         <p:spPr>
           <a:xfrm>
-            <a:off x="786384" y="457200"/>
-            <a:ext cx="10728655" cy="685800"/>
+            <a:off x="548640" y="137160"/>
+            <a:ext cx="8442656" cy="548640"/>
           </a:xfrm>
           <a:prstGeom prst="rect">
             <a:avLst/>
@@ -5820,25 +9326,26 @@
           <a:noFill/>
         </p:spPr>
         <p:txBody>
-          <a:bodyPr wrap="square" anchor="ctr" lIns="45720" rIns="45720" tIns="0" bIns="0">
+          <a:bodyPr wrap="square" anchor="ctr" lIns="54864" rIns="54864" tIns="0" bIns="0">
             <a:spAutoFit/>
           </a:bodyPr>
           <a:lstStyle/>
           <a:p>
             <a:pPr algn="l">
               <a:lnSpc>
-                <a:spcPct val="125000"/>
+                <a:spcPct val="130000"/>
               </a:lnSpc>
+              <a:defRPr sz="2600"/>
             </a:pPr>
             <a:r>
-              <a:rPr sz="3000" b="1">
-                <a:solidFill>
-                  <a:srgbClr val="1F2937"/>
+              <a:rPr sz="2600" b="1" u="none">
+                <a:solidFill>
+                  <a:srgbClr val="FFFFFF"/>
                 </a:solidFill>
                 <a:latin typeface="Times New Roman"/>
                 <a:ea typeface="微软雅黑"/>
               </a:rPr>
-              <a:t>第 5 题</a:t>
+              <a:t>第 3 题</a:t>
             </a:r>
           </a:p>
         </p:txBody>
@@ -5851,14 +9358,16 @@
         </p:nvSpPr>
         <p:spPr>
           <a:xfrm>
-            <a:off x="9137599" y="530352"/>
-            <a:ext cx="2505456" cy="384048"/>
+            <a:off x="10097719" y="219456"/>
+            <a:ext cx="1545336" cy="365760"/>
           </a:xfrm>
           <a:prstGeom prst="roundRect">
-            <a:avLst/>
+            <a:avLst>
+              <a:gd name="adj" fmla="val 30000"/>
+            </a:avLst>
           </a:prstGeom>
           <a:solidFill>
-            <a:srgbClr val="F1F3F6"/>
+            <a:srgbClr val="2E4A78"/>
           </a:solidFill>
           <a:ln>
             <a:noFill/>
@@ -5895,8 +9404,8 @@
         </p:nvSpPr>
         <p:spPr>
           <a:xfrm>
-            <a:off x="9137599" y="548640"/>
-            <a:ext cx="2505456" cy="365760"/>
+            <a:off x="10097719" y="237744"/>
+            <a:ext cx="1545336" cy="329184"/>
           </a:xfrm>
           <a:prstGeom prst="rect">
             <a:avLst/>
@@ -5904,25 +9413,26 @@
           <a:noFill/>
         </p:spPr>
         <p:txBody>
-          <a:bodyPr wrap="square" anchor="ctr" lIns="45720" rIns="45720" tIns="0" bIns="0">
+          <a:bodyPr wrap="square" anchor="ctr" lIns="54864" rIns="54864" tIns="0" bIns="0">
             <a:spAutoFit/>
           </a:bodyPr>
           <a:lstStyle/>
           <a:p>
             <a:pPr algn="ctr">
               <a:lnSpc>
-                <a:spcPct val="125000"/>
+                <a:spcPct val="130000"/>
               </a:lnSpc>
+              <a:defRPr sz="1100"/>
             </a:pPr>
             <a:r>
-              <a:rPr sz="1200" b="1">
-                <a:solidFill>
-                  <a:srgbClr val="4B5563"/>
+              <a:rPr sz="1100" b="1" u="none">
+                <a:solidFill>
+                  <a:srgbClr val="FFFFFF"/>
                 </a:solidFill>
                 <a:latin typeface="Times New Roman"/>
                 <a:ea typeface="微软雅黑"/>
               </a:rPr>
-              <a:t>二、多项选择题：本题共4</a:t>
+              <a:t>一、单项选择题</a:t>
             </a:r>
           </a:p>
         </p:txBody>
@@ -5935,8 +9445,8 @@
         </p:nvSpPr>
         <p:spPr>
           <a:xfrm>
-            <a:off x="822960" y="1554480"/>
-            <a:ext cx="10545775" cy="2377440"/>
+            <a:off x="548640" y="1078992"/>
+            <a:ext cx="11094415" cy="2103120"/>
           </a:xfrm>
           <a:prstGeom prst="rect">
             <a:avLst/>
@@ -5944,7 +9454,7 @@
           <a:noFill/>
         </p:spPr>
         <p:txBody>
-          <a:bodyPr wrap="square" anchor="t" lIns="45720" rIns="45720" tIns="0" bIns="0">
+          <a:bodyPr wrap="square" anchor="t" lIns="54864" rIns="54864" tIns="0" bIns="0">
             <a:spAutoFit/>
           </a:bodyPr>
           <a:lstStyle/>
@@ -5953,15 +9463,17 @@
               <a:lnSpc>
                 <a:spcPct val="145000"/>
               </a:lnSpc>
+              <a:defRPr sz="2200"/>
             </a:pPr>
             <a:r>
-              <a:rPr sz="2400" b="0">
+              <a:rPr sz="2200" b="0" u="none">
                 <a:solidFill>
                   <a:srgbClr val="111827"/>
                 </a:solidFill>
                 <a:latin typeface="Times New Roman"/>
+                <a:ea typeface="微软雅黑"/>
               </a:rPr>
-              <a:t>关于自由落体运动，下列说法正确的是（　　） A. 物体竖直向下的运动就是自由落体运动 B. 自由落体运动是初速度为零、加速度为g的匀加速直线运动 C. 在同一地点，一切物体自由下落的加速度都相同 D. 自由落体运动的位移与时间成正比</a:t>
+              <a:t>汽车以20 m/s的速度行驶，刹车后做匀减速直线运动，加速度大小为5 m/s²，则刹车后6 s内的位移为（　　）</a:t>
             </a:r>
           </a:p>
         </p:txBody>
@@ -5974,8 +9486,8 @@
         </p:nvSpPr>
         <p:spPr>
           <a:xfrm>
-            <a:off x="548640" y="6473952"/>
-            <a:ext cx="8229600" cy="274320"/>
+            <a:off x="548640" y="2182876"/>
+            <a:ext cx="5437479" cy="548640"/>
           </a:xfrm>
           <a:prstGeom prst="rect">
             <a:avLst/>
@@ -5983,39 +9495,94 @@
           <a:noFill/>
         </p:spPr>
         <p:txBody>
-          <a:bodyPr wrap="square" anchor="t" lIns="45720" rIns="45720" tIns="0" bIns="0">
+          <a:bodyPr wrap="square" anchor="t" lIns="54864" rIns="54864" tIns="0" bIns="0">
             <a:spAutoFit/>
           </a:bodyPr>
           <a:lstStyle/>
           <a:p>
-            <a:pPr algn="l">
+            <a:pPr algn="l" marL="365760" indent="-365760">
               <a:lnSpc>
                 <a:spcPct val="125000"/>
               </a:lnSpc>
+              <a:defRPr sz="1800"/>
             </a:pPr>
             <a:r>
-              <a:rPr sz="1000" b="0">
-                <a:solidFill>
-                  <a:srgbClr val="8A94A6"/>
+              <a:rPr sz="1800" b="1" u="none">
+                <a:solidFill>
+                  <a:srgbClr val="475569"/>
                 </a:solidFill>
                 <a:latin typeface="Times New Roman"/>
                 <a:ea typeface="微软雅黑"/>
               </a:rPr>
-              <a:t>胶州四中 · 第 5 题</a:t>
-            </a:r>
-          </a:p>
-        </p:txBody>
-      </p:sp>
-      <p:sp>
-        <p:nvSpPr>
-          <p:cNvPr id="9" name="TextBox 8"/>
+              <a:t>A．</a:t>
+            </a:r>
+            <a:r>
+              <a:rPr sz="1800" b="0" u="none">
+                <a:solidFill>
+                  <a:srgbClr val="111827"/>
+                </a:solidFill>
+                <a:latin typeface="Times New Roman"/>
+                <a:ea typeface="微软雅黑"/>
+              </a:rPr>
+              <a:t>30 m　B. 40 m　C. 60 m　D. 120 m</a:t>
+            </a:r>
+          </a:p>
+        </p:txBody>
+      </p:sp>
+      <p:sp>
+        <p:nvSpPr>
+          <p:cNvPr id="9" name="Rectangle 8"/>
+          <p:cNvSpPr/>
+          <p:nvPr/>
+        </p:nvSpPr>
+        <p:spPr>
+          <a:xfrm>
+            <a:off x="0" y="6739128"/>
+            <a:ext cx="12191695" cy="118872"/>
+          </a:xfrm>
+          <a:prstGeom prst="rect">
+            <a:avLst/>
+          </a:prstGeom>
+          <a:solidFill>
+            <a:srgbClr val="475569"/>
+          </a:solidFill>
+          <a:ln>
+            <a:noFill/>
+          </a:ln>
+          <a:effectLst/>
+        </p:spPr>
+        <p:style>
+          <a:lnRef idx="1">
+            <a:schemeClr val="accent1"/>
+          </a:lnRef>
+          <a:fillRef idx="3">
+            <a:schemeClr val="accent1"/>
+          </a:fillRef>
+          <a:effectRef idx="2">
+            <a:schemeClr val="accent1"/>
+          </a:effectRef>
+          <a:fontRef idx="minor">
+            <a:schemeClr val="lt1"/>
+          </a:fontRef>
+        </p:style>
+        <p:txBody>
+          <a:bodyPr rtlCol="0" anchor="ctr"/>
+          <a:lstStyle/>
+          <a:p>
+            <a:pPr algn="ctr"/>
+          </a:p>
+        </p:txBody>
+      </p:sp>
+      <p:sp>
+        <p:nvSpPr>
+          <p:cNvPr id="10" name="TextBox 9"/>
           <p:cNvSpPr txBox="1"/>
           <p:nvPr/>
         </p:nvSpPr>
         <p:spPr>
           <a:xfrm>
-            <a:off x="11002975" y="6473952"/>
-            <a:ext cx="731520" cy="274320"/>
+            <a:off x="548640" y="6345936"/>
+            <a:ext cx="8595360" cy="274320"/>
           </a:xfrm>
           <a:prstGeom prst="rect">
             <a:avLst/>
@@ -6023,18 +9590,60 @@
           <a:noFill/>
         </p:spPr>
         <p:txBody>
-          <a:bodyPr wrap="square" anchor="t" lIns="45720" rIns="45720" tIns="0" bIns="0">
+          <a:bodyPr wrap="square" anchor="t" lIns="54864" rIns="54864" tIns="0" bIns="0">
             <a:spAutoFit/>
           </a:bodyPr>
           <a:lstStyle/>
           <a:p>
+            <a:pPr algn="l">
+              <a:lnSpc>
+                <a:spcPct val="130000"/>
+              </a:lnSpc>
+              <a:defRPr sz="1000"/>
+            </a:pPr>
+            <a:r>
+              <a:rPr sz="1000" b="0" u="none">
+                <a:solidFill>
+                  <a:srgbClr val="8A94A6"/>
+                </a:solidFill>
+                <a:latin typeface="Times New Roman"/>
+                <a:ea typeface="微软雅黑"/>
+              </a:rPr>
+              <a:t>胶州四中高三级部物理学科单元达标评测题</a:t>
+            </a:r>
+          </a:p>
+        </p:txBody>
+      </p:sp>
+      <p:sp>
+        <p:nvSpPr>
+          <p:cNvPr id="11" name="TextBox 10"/>
+          <p:cNvSpPr txBox="1"/>
+          <p:nvPr/>
+        </p:nvSpPr>
+        <p:spPr>
+          <a:xfrm>
+            <a:off x="11048695" y="6345936"/>
+            <a:ext cx="685800" cy="274320"/>
+          </a:xfrm>
+          <a:prstGeom prst="rect">
+            <a:avLst/>
+          </a:prstGeom>
+          <a:noFill/>
+        </p:spPr>
+        <p:txBody>
+          <a:bodyPr wrap="square" anchor="t" lIns="54864" rIns="54864" tIns="0" bIns="0">
+            <a:spAutoFit/>
+          </a:bodyPr>
+          <a:lstStyle/>
+          <a:p>
             <a:pPr algn="r">
               <a:lnSpc>
-                <a:spcPct val="125000"/>
+                <a:spcPct val="130000"/>
               </a:lnSpc>
+              <a:defRPr sz="1000"/>
             </a:pPr>
             <a:r>
-              <a:rPr sz="1000" b="0">
+              <a:rPr sz="1000" b="0" u="none">
                 <a:solidFill>
                   <a:srgbClr val="8A94A6"/>
                 </a:solidFill>
@@ -6073,7 +9682,7 @@
         <p:spPr>
           <a:xfrm>
             <a:off x="0" y="0"/>
-            <a:ext cx="12191695" cy="109728"/>
+            <a:ext cx="12191695" cy="822960"/>
           </a:xfrm>
           <a:prstGeom prst="rect">
             <a:avLst/>
@@ -6116,14 +9725,14 @@
         </p:nvSpPr>
         <p:spPr>
           <a:xfrm>
-            <a:off x="548640" y="502920"/>
-            <a:ext cx="118872" cy="566928"/>
+            <a:off x="0" y="822960"/>
+            <a:ext cx="12191695" cy="45720"/>
           </a:xfrm>
           <a:prstGeom prst="rect">
             <a:avLst/>
           </a:prstGeom>
           <a:solidFill>
-            <a:srgbClr val="4B5563"/>
+            <a:srgbClr val="475569"/>
           </a:solidFill>
           <a:ln>
             <a:noFill/>
@@ -6160,8 +9769,8 @@
         </p:nvSpPr>
         <p:spPr>
           <a:xfrm>
-            <a:off x="786384" y="457200"/>
-            <a:ext cx="10728655" cy="685800"/>
+            <a:off x="548640" y="137160"/>
+            <a:ext cx="8442656" cy="548640"/>
           </a:xfrm>
           <a:prstGeom prst="rect">
             <a:avLst/>
@@ -6169,25 +9778,26 @@
           <a:noFill/>
         </p:spPr>
         <p:txBody>
-          <a:bodyPr wrap="square" anchor="ctr" lIns="45720" rIns="45720" tIns="0" bIns="0">
+          <a:bodyPr wrap="square" anchor="ctr" lIns="54864" rIns="54864" tIns="0" bIns="0">
             <a:spAutoFit/>
           </a:bodyPr>
           <a:lstStyle/>
           <a:p>
             <a:pPr algn="l">
               <a:lnSpc>
-                <a:spcPct val="125000"/>
+                <a:spcPct val="130000"/>
               </a:lnSpc>
+              <a:defRPr sz="2600"/>
             </a:pPr>
             <a:r>
-              <a:rPr sz="3000" b="1">
-                <a:solidFill>
-                  <a:srgbClr val="1F2937"/>
+              <a:rPr sz="2600" b="1" u="none">
+                <a:solidFill>
+                  <a:srgbClr val="FFFFFF"/>
                 </a:solidFill>
                 <a:latin typeface="Times New Roman"/>
                 <a:ea typeface="微软雅黑"/>
               </a:rPr>
-              <a:t>第 6 题</a:t>
+              <a:t>第 3 题</a:t>
             </a:r>
           </a:p>
         </p:txBody>
@@ -6200,14 +9810,16 @@
         </p:nvSpPr>
         <p:spPr>
           <a:xfrm>
-            <a:off x="9137599" y="530352"/>
-            <a:ext cx="2505456" cy="384048"/>
+            <a:off x="10097719" y="219456"/>
+            <a:ext cx="1545336" cy="365760"/>
           </a:xfrm>
           <a:prstGeom prst="roundRect">
-            <a:avLst/>
+            <a:avLst>
+              <a:gd name="adj" fmla="val 30000"/>
+            </a:avLst>
           </a:prstGeom>
           <a:solidFill>
-            <a:srgbClr val="F1F3F6"/>
+            <a:srgbClr val="2E4A78"/>
           </a:solidFill>
           <a:ln>
             <a:noFill/>
@@ -6244,8 +9856,8 @@
         </p:nvSpPr>
         <p:spPr>
           <a:xfrm>
-            <a:off x="9137599" y="548640"/>
-            <a:ext cx="2505456" cy="365760"/>
+            <a:off x="10097719" y="237744"/>
+            <a:ext cx="1545336" cy="329184"/>
           </a:xfrm>
           <a:prstGeom prst="rect">
             <a:avLst/>
@@ -6253,39 +9865,84 @@
           <a:noFill/>
         </p:spPr>
         <p:txBody>
-          <a:bodyPr wrap="square" anchor="ctr" lIns="45720" rIns="45720" tIns="0" bIns="0">
+          <a:bodyPr wrap="square" anchor="ctr" lIns="54864" rIns="54864" tIns="0" bIns="0">
             <a:spAutoFit/>
           </a:bodyPr>
           <a:lstStyle/>
           <a:p>
             <a:pPr algn="ctr">
               <a:lnSpc>
-                <a:spcPct val="125000"/>
+                <a:spcPct val="130000"/>
               </a:lnSpc>
+              <a:defRPr sz="1100"/>
             </a:pPr>
             <a:r>
-              <a:rPr sz="1200" b="1">
-                <a:solidFill>
-                  <a:srgbClr val="4B5563"/>
+              <a:rPr sz="1100" b="1" u="none">
+                <a:solidFill>
+                  <a:srgbClr val="FFFFFF"/>
                 </a:solidFill>
                 <a:latin typeface="Times New Roman"/>
                 <a:ea typeface="微软雅黑"/>
               </a:rPr>
-              <a:t>三、非选择题：本题共4小</a:t>
-            </a:r>
-          </a:p>
-        </p:txBody>
-      </p:sp>
-      <p:sp>
-        <p:nvSpPr>
-          <p:cNvPr id="7" name="TextBox 6"/>
+              <a:t>一、单项选择题</a:t>
+            </a:r>
+          </a:p>
+        </p:txBody>
+      </p:sp>
+      <p:sp>
+        <p:nvSpPr>
+          <p:cNvPr id="7" name="Rectangle 6"/>
+          <p:cNvSpPr/>
+          <p:nvPr/>
+        </p:nvSpPr>
+        <p:spPr>
+          <a:xfrm>
+            <a:off x="548640" y="1097280"/>
+            <a:ext cx="64008" cy="566928"/>
+          </a:xfrm>
+          <a:prstGeom prst="rect">
+            <a:avLst/>
+          </a:prstGeom>
+          <a:solidFill>
+            <a:srgbClr val="16A34A"/>
+          </a:solidFill>
+          <a:ln>
+            <a:noFill/>
+          </a:ln>
+          <a:effectLst/>
+        </p:spPr>
+        <p:style>
+          <a:lnRef idx="1">
+            <a:schemeClr val="accent1"/>
+          </a:lnRef>
+          <a:fillRef idx="3">
+            <a:schemeClr val="accent1"/>
+          </a:fillRef>
+          <a:effectRef idx="2">
+            <a:schemeClr val="accent1"/>
+          </a:effectRef>
+          <a:fontRef idx="minor">
+            <a:schemeClr val="lt1"/>
+          </a:fontRef>
+        </p:style>
+        <p:txBody>
+          <a:bodyPr rtlCol="0" anchor="ctr"/>
+          <a:lstStyle/>
+          <a:p>
+            <a:pPr algn="ctr"/>
+          </a:p>
+        </p:txBody>
+      </p:sp>
+      <p:sp>
+        <p:nvSpPr>
+          <p:cNvPr id="8" name="TextBox 7"/>
           <p:cNvSpPr txBox="1"/>
           <p:nvPr/>
         </p:nvSpPr>
         <p:spPr>
           <a:xfrm>
-            <a:off x="822960" y="1554480"/>
-            <a:ext cx="10545775" cy="2377440"/>
+            <a:off x="731520" y="1097280"/>
+            <a:ext cx="10911535" cy="566928"/>
           </a:xfrm>
           <a:prstGeom prst="rect">
             <a:avLst/>
@@ -6293,78 +9950,94 @@
           <a:noFill/>
         </p:spPr>
         <p:txBody>
-          <a:bodyPr wrap="square" anchor="t" lIns="45720" rIns="45720" tIns="0" bIns="0">
+          <a:bodyPr wrap="square" anchor="t" lIns="54864" rIns="54864" tIns="0" bIns="0">
             <a:spAutoFit/>
           </a:bodyPr>
           <a:lstStyle/>
           <a:p>
             <a:pPr algn="l">
               <a:lnSpc>
-                <a:spcPct val="145000"/>
+                <a:spcPct val="135000"/>
               </a:lnSpc>
+              <a:defRPr sz="2200"/>
             </a:pPr>
             <a:r>
-              <a:rPr sz="2400" b="0">
-                <a:solidFill>
-                  <a:srgbClr val="111827"/>
-                </a:solidFill>
-                <a:latin typeface="Times New Roman"/>
-              </a:rPr>
-              <a:t>（12分）一物体从静止开始做匀加速直线运动，加速度a=2 m/s²。求： （1）3 s末的速度； （2）前4 s内的位移； （3）第4 s内的位移。</a:t>
-            </a:r>
-          </a:p>
-        </p:txBody>
-      </p:sp>
-      <p:sp>
-        <p:nvSpPr>
-          <p:cNvPr id="8" name="TextBox 7"/>
-          <p:cNvSpPr txBox="1"/>
-          <p:nvPr/>
-        </p:nvSpPr>
-        <p:spPr>
-          <a:xfrm>
-            <a:off x="548640" y="6473952"/>
-            <a:ext cx="8229600" cy="274320"/>
-          </a:xfrm>
-          <a:prstGeom prst="rect">
-            <a:avLst/>
-          </a:prstGeom>
-          <a:noFill/>
-        </p:spPr>
-        <p:txBody>
-          <a:bodyPr wrap="square" anchor="t" lIns="45720" rIns="45720" tIns="0" bIns="0">
-            <a:spAutoFit/>
-          </a:bodyPr>
-          <a:lstStyle/>
-          <a:p>
-            <a:pPr algn="l">
-              <a:lnSpc>
-                <a:spcPct val="125000"/>
-              </a:lnSpc>
-            </a:pPr>
-            <a:r>
-              <a:rPr sz="1000" b="0">
-                <a:solidFill>
-                  <a:srgbClr val="8A94A6"/>
+              <a:rPr sz="2200" b="1" u="none">
+                <a:solidFill>
+                  <a:srgbClr val="15803D"/>
                 </a:solidFill>
                 <a:latin typeface="Times New Roman"/>
                 <a:ea typeface="微软雅黑"/>
               </a:rPr>
-              <a:t>胶州四中 · 第 6 题</a:t>
-            </a:r>
-          </a:p>
-        </p:txBody>
-      </p:sp>
-      <p:sp>
-        <p:nvSpPr>
-          <p:cNvPr id="9" name="TextBox 8"/>
+              <a:t>答案：</a:t>
+            </a:r>
+            <a:r>
+              <a:rPr sz="2200" b="0" u="none">
+                <a:solidFill>
+                  <a:srgbClr val="15803D"/>
+                </a:solidFill>
+                <a:latin typeface="Times New Roman"/>
+                <a:ea typeface="微软雅黑"/>
+              </a:rPr>
+              <a:t>B</a:t>
+            </a:r>
+          </a:p>
+        </p:txBody>
+      </p:sp>
+      <p:sp>
+        <p:nvSpPr>
+          <p:cNvPr id="9" name="Rectangle 8"/>
+          <p:cNvSpPr/>
+          <p:nvPr/>
+        </p:nvSpPr>
+        <p:spPr>
+          <a:xfrm>
+            <a:off x="0" y="6739128"/>
+            <a:ext cx="12191695" cy="118872"/>
+          </a:xfrm>
+          <a:prstGeom prst="rect">
+            <a:avLst/>
+          </a:prstGeom>
+          <a:solidFill>
+            <a:srgbClr val="475569"/>
+          </a:solidFill>
+          <a:ln>
+            <a:noFill/>
+          </a:ln>
+          <a:effectLst/>
+        </p:spPr>
+        <p:style>
+          <a:lnRef idx="1">
+            <a:schemeClr val="accent1"/>
+          </a:lnRef>
+          <a:fillRef idx="3">
+            <a:schemeClr val="accent1"/>
+          </a:fillRef>
+          <a:effectRef idx="2">
+            <a:schemeClr val="accent1"/>
+          </a:effectRef>
+          <a:fontRef idx="minor">
+            <a:schemeClr val="lt1"/>
+          </a:fontRef>
+        </p:style>
+        <p:txBody>
+          <a:bodyPr rtlCol="0" anchor="ctr"/>
+          <a:lstStyle/>
+          <a:p>
+            <a:pPr algn="ctr"/>
+          </a:p>
+        </p:txBody>
+      </p:sp>
+      <p:sp>
+        <p:nvSpPr>
+          <p:cNvPr id="10" name="TextBox 9"/>
           <p:cNvSpPr txBox="1"/>
           <p:nvPr/>
         </p:nvSpPr>
         <p:spPr>
           <a:xfrm>
-            <a:off x="11002975" y="6473952"/>
-            <a:ext cx="731520" cy="274320"/>
+            <a:off x="548640" y="6345936"/>
+            <a:ext cx="8595360" cy="274320"/>
           </a:xfrm>
           <a:prstGeom prst="rect">
             <a:avLst/>
@@ -6372,18 +10045,60 @@
           <a:noFill/>
         </p:spPr>
         <p:txBody>
-          <a:bodyPr wrap="square" anchor="t" lIns="45720" rIns="45720" tIns="0" bIns="0">
+          <a:bodyPr wrap="square" anchor="t" lIns="54864" rIns="54864" tIns="0" bIns="0">
             <a:spAutoFit/>
           </a:bodyPr>
           <a:lstStyle/>
           <a:p>
+            <a:pPr algn="l">
+              <a:lnSpc>
+                <a:spcPct val="130000"/>
+              </a:lnSpc>
+              <a:defRPr sz="1000"/>
+            </a:pPr>
+            <a:r>
+              <a:rPr sz="1000" b="0" u="none">
+                <a:solidFill>
+                  <a:srgbClr val="8A94A6"/>
+                </a:solidFill>
+                <a:latin typeface="Times New Roman"/>
+                <a:ea typeface="微软雅黑"/>
+              </a:rPr>
+              <a:t>胶州四中高三级部物理学科单元达标评测题</a:t>
+            </a:r>
+          </a:p>
+        </p:txBody>
+      </p:sp>
+      <p:sp>
+        <p:nvSpPr>
+          <p:cNvPr id="11" name="TextBox 10"/>
+          <p:cNvSpPr txBox="1"/>
+          <p:nvPr/>
+        </p:nvSpPr>
+        <p:spPr>
+          <a:xfrm>
+            <a:off x="11048695" y="6345936"/>
+            <a:ext cx="685800" cy="274320"/>
+          </a:xfrm>
+          <a:prstGeom prst="rect">
+            <a:avLst/>
+          </a:prstGeom>
+          <a:noFill/>
+        </p:spPr>
+        <p:txBody>
+          <a:bodyPr wrap="square" anchor="t" lIns="54864" rIns="54864" tIns="0" bIns="0">
+            <a:spAutoFit/>
+          </a:bodyPr>
+          <a:lstStyle/>
+          <a:p>
             <a:pPr algn="r">
               <a:lnSpc>
-                <a:spcPct val="125000"/>
+                <a:spcPct val="130000"/>
               </a:lnSpc>
+              <a:defRPr sz="1000"/>
             </a:pPr>
             <a:r>
-              <a:rPr sz="1000" b="0">
+              <a:rPr sz="1000" b="0" u="none">
                 <a:solidFill>
                   <a:srgbClr val="8A94A6"/>
                 </a:solidFill>
@@ -6422,7 +10137,7 @@
         <p:spPr>
           <a:xfrm>
             <a:off x="0" y="0"/>
-            <a:ext cx="12191695" cy="109728"/>
+            <a:ext cx="12191695" cy="822960"/>
           </a:xfrm>
           <a:prstGeom prst="rect">
             <a:avLst/>
@@ -6465,14 +10180,14 @@
         </p:nvSpPr>
         <p:spPr>
           <a:xfrm>
-            <a:off x="548640" y="502920"/>
-            <a:ext cx="118872" cy="566928"/>
+            <a:off x="0" y="822960"/>
+            <a:ext cx="12191695" cy="45720"/>
           </a:xfrm>
           <a:prstGeom prst="rect">
             <a:avLst/>
           </a:prstGeom>
           <a:solidFill>
-            <a:srgbClr val="4B5563"/>
+            <a:srgbClr val="475569"/>
           </a:solidFill>
           <a:ln>
             <a:noFill/>
@@ -6509,8 +10224,8 @@
         </p:nvSpPr>
         <p:spPr>
           <a:xfrm>
-            <a:off x="786384" y="457200"/>
-            <a:ext cx="10728655" cy="685800"/>
+            <a:off x="548640" y="137160"/>
+            <a:ext cx="8442656" cy="548640"/>
           </a:xfrm>
           <a:prstGeom prst="rect">
             <a:avLst/>
@@ -6518,25 +10233,26 @@
           <a:noFill/>
         </p:spPr>
         <p:txBody>
-          <a:bodyPr wrap="square" anchor="ctr" lIns="45720" rIns="45720" tIns="0" bIns="0">
+          <a:bodyPr wrap="square" anchor="ctr" lIns="54864" rIns="54864" tIns="0" bIns="0">
             <a:spAutoFit/>
           </a:bodyPr>
           <a:lstStyle/>
           <a:p>
             <a:pPr algn="l">
               <a:lnSpc>
-                <a:spcPct val="125000"/>
+                <a:spcPct val="130000"/>
               </a:lnSpc>
+              <a:defRPr sz="2600"/>
             </a:pPr>
             <a:r>
-              <a:rPr sz="3000" b="1">
-                <a:solidFill>
-                  <a:srgbClr val="1F2937"/>
+              <a:rPr sz="2600" b="1" u="none">
+                <a:solidFill>
+                  <a:srgbClr val="FFFFFF"/>
                 </a:solidFill>
                 <a:latin typeface="Times New Roman"/>
                 <a:ea typeface="微软雅黑"/>
               </a:rPr>
-              <a:t>第 7 题</a:t>
+              <a:t>第 4 题</a:t>
             </a:r>
           </a:p>
         </p:txBody>
@@ -6549,14 +10265,16 @@
         </p:nvSpPr>
         <p:spPr>
           <a:xfrm>
-            <a:off x="9137599" y="530352"/>
-            <a:ext cx="2505456" cy="384048"/>
+            <a:off x="10097719" y="219456"/>
+            <a:ext cx="1545336" cy="365760"/>
           </a:xfrm>
           <a:prstGeom prst="roundRect">
-            <a:avLst/>
+            <a:avLst>
+              <a:gd name="adj" fmla="val 30000"/>
+            </a:avLst>
           </a:prstGeom>
           <a:solidFill>
-            <a:srgbClr val="F1F3F6"/>
+            <a:srgbClr val="2E4A78"/>
           </a:solidFill>
           <a:ln>
             <a:noFill/>
@@ -6593,8 +10311,8 @@
         </p:nvSpPr>
         <p:spPr>
           <a:xfrm>
-            <a:off x="9137599" y="548640"/>
-            <a:ext cx="2505456" cy="365760"/>
+            <a:off x="10097719" y="237744"/>
+            <a:ext cx="1545336" cy="329184"/>
           </a:xfrm>
           <a:prstGeom prst="rect">
             <a:avLst/>
@@ -6602,25 +10320,26 @@
           <a:noFill/>
         </p:spPr>
         <p:txBody>
-          <a:bodyPr wrap="square" anchor="ctr" lIns="45720" rIns="45720" tIns="0" bIns="0">
+          <a:bodyPr wrap="square" anchor="ctr" lIns="54864" rIns="54864" tIns="0" bIns="0">
             <a:spAutoFit/>
           </a:bodyPr>
           <a:lstStyle/>
           <a:p>
             <a:pPr algn="ctr">
               <a:lnSpc>
-                <a:spcPct val="125000"/>
+                <a:spcPct val="130000"/>
               </a:lnSpc>
+              <a:defRPr sz="1100"/>
             </a:pPr>
             <a:r>
-              <a:rPr sz="1200" b="1">
-                <a:solidFill>
-                  <a:srgbClr val="4B5563"/>
+              <a:rPr sz="1100" b="1" u="none">
+                <a:solidFill>
+                  <a:srgbClr val="FFFFFF"/>
                 </a:solidFill>
                 <a:latin typeface="Times New Roman"/>
                 <a:ea typeface="微软雅黑"/>
               </a:rPr>
-              <a:t>三、非选择题：本题共4小</a:t>
+              <a:t>二、多项选择题</a:t>
             </a:r>
           </a:p>
         </p:txBody>
@@ -6633,8 +10352,8 @@
         </p:nvSpPr>
         <p:spPr>
           <a:xfrm>
-            <a:off x="822960" y="1554480"/>
-            <a:ext cx="10545775" cy="2377440"/>
+            <a:off x="548640" y="1078992"/>
+            <a:ext cx="11094415" cy="2103120"/>
           </a:xfrm>
           <a:prstGeom prst="rect">
             <a:avLst/>
@@ -6642,7 +10361,7 @@
           <a:noFill/>
         </p:spPr>
         <p:txBody>
-          <a:bodyPr wrap="square" anchor="t" lIns="45720" rIns="45720" tIns="0" bIns="0">
+          <a:bodyPr wrap="square" anchor="t" lIns="54864" rIns="54864" tIns="0" bIns="0">
             <a:spAutoFit/>
           </a:bodyPr>
           <a:lstStyle/>
@@ -6651,56 +10370,62 @@
               <a:lnSpc>
                 <a:spcPct val="145000"/>
               </a:lnSpc>
+              <a:defRPr sz="2200"/>
             </a:pPr>
             <a:r>
-              <a:rPr sz="2400" b="0">
+              <a:rPr sz="2200" b="0" u="none">
                 <a:solidFill>
                   <a:srgbClr val="111827"/>
-                </a:solidFill>
-                <a:latin typeface="Times New Roman"/>
-              </a:rPr>
-              <a:t>（14分）汽车以v0=20 m/s的速度匀速行驶，司机发现前方障碍后经0.5 s反应时间开始刹车，刹车加速度大小为5 m/s²。求： （1）从发现障碍到停止所用的总时间； （2）从发现障碍到停止所通过的总距离。</a:t>
-            </a:r>
-          </a:p>
-        </p:txBody>
-      </p:sp>
-      <p:sp>
-        <p:nvSpPr>
-          <p:cNvPr id="8" name="TextBox 7"/>
-          <p:cNvSpPr txBox="1"/>
-          <p:nvPr/>
-        </p:nvSpPr>
-        <p:spPr>
-          <a:xfrm>
-            <a:off x="548640" y="6473952"/>
-            <a:ext cx="8229600" cy="274320"/>
-          </a:xfrm>
-          <a:prstGeom prst="rect">
-            <a:avLst/>
-          </a:prstGeom>
-          <a:noFill/>
-        </p:spPr>
-        <p:txBody>
-          <a:bodyPr wrap="square" anchor="t" lIns="45720" rIns="45720" tIns="0" bIns="0">
-            <a:spAutoFit/>
-          </a:bodyPr>
-          <a:lstStyle/>
-          <a:p>
-            <a:pPr algn="l">
-              <a:lnSpc>
-                <a:spcPct val="125000"/>
-              </a:lnSpc>
-            </a:pPr>
-            <a:r>
-              <a:rPr sz="1000" b="0">
-                <a:solidFill>
-                  <a:srgbClr val="8A94A6"/>
                 </a:solidFill>
                 <a:latin typeface="Times New Roman"/>
                 <a:ea typeface="微软雅黑"/>
               </a:rPr>
-              <a:t>胶州四中 · 第 7 题</a:t>
-            </a:r>
+              <a:t>甲、乙两物体从同一地点沿同一方向做直线运动，其v-t图像如图，下列说法正确的是（　　） A. 甲做匀加速直线运动 B. 乙做匀减速直线运动 C. t=2 s时两物体相遇 D. 0~4 s内乙的位移比甲大</a:t>
+            </a:r>
+          </a:p>
+        </p:txBody>
+      </p:sp>
+      <p:sp>
+        <p:nvSpPr>
+          <p:cNvPr id="8" name="Rectangle 7"/>
+          <p:cNvSpPr/>
+          <p:nvPr/>
+        </p:nvSpPr>
+        <p:spPr>
+          <a:xfrm>
+            <a:off x="0" y="6739128"/>
+            <a:ext cx="12191695" cy="118872"/>
+          </a:xfrm>
+          <a:prstGeom prst="rect">
+            <a:avLst/>
+          </a:prstGeom>
+          <a:solidFill>
+            <a:srgbClr val="475569"/>
+          </a:solidFill>
+          <a:ln>
+            <a:noFill/>
+          </a:ln>
+          <a:effectLst/>
+        </p:spPr>
+        <p:style>
+          <a:lnRef idx="1">
+            <a:schemeClr val="accent1"/>
+          </a:lnRef>
+          <a:fillRef idx="3">
+            <a:schemeClr val="accent1"/>
+          </a:fillRef>
+          <a:effectRef idx="2">
+            <a:schemeClr val="accent1"/>
+          </a:effectRef>
+          <a:fontRef idx="minor">
+            <a:schemeClr val="lt1"/>
+          </a:fontRef>
+        </p:style>
+        <p:txBody>
+          <a:bodyPr rtlCol="0" anchor="ctr"/>
+          <a:lstStyle/>
+          <a:p>
+            <a:pPr algn="ctr"/>
           </a:p>
         </p:txBody>
       </p:sp>
@@ -6712,8 +10437,8 @@
         </p:nvSpPr>
         <p:spPr>
           <a:xfrm>
-            <a:off x="11002975" y="6473952"/>
-            <a:ext cx="731520" cy="274320"/>
+            <a:off x="548640" y="6345936"/>
+            <a:ext cx="8595360" cy="274320"/>
           </a:xfrm>
           <a:prstGeom prst="rect">
             <a:avLst/>
@@ -6721,18 +10446,60 @@
           <a:noFill/>
         </p:spPr>
         <p:txBody>
-          <a:bodyPr wrap="square" anchor="t" lIns="45720" rIns="45720" tIns="0" bIns="0">
+          <a:bodyPr wrap="square" anchor="t" lIns="54864" rIns="54864" tIns="0" bIns="0">
             <a:spAutoFit/>
           </a:bodyPr>
           <a:lstStyle/>
           <a:p>
+            <a:pPr algn="l">
+              <a:lnSpc>
+                <a:spcPct val="130000"/>
+              </a:lnSpc>
+              <a:defRPr sz="1000"/>
+            </a:pPr>
+            <a:r>
+              <a:rPr sz="1000" b="0" u="none">
+                <a:solidFill>
+                  <a:srgbClr val="8A94A6"/>
+                </a:solidFill>
+                <a:latin typeface="Times New Roman"/>
+                <a:ea typeface="微软雅黑"/>
+              </a:rPr>
+              <a:t>胶州四中高三级部物理学科单元达标评测题</a:t>
+            </a:r>
+          </a:p>
+        </p:txBody>
+      </p:sp>
+      <p:sp>
+        <p:nvSpPr>
+          <p:cNvPr id="10" name="TextBox 9"/>
+          <p:cNvSpPr txBox="1"/>
+          <p:nvPr/>
+        </p:nvSpPr>
+        <p:spPr>
+          <a:xfrm>
+            <a:off x="11048695" y="6345936"/>
+            <a:ext cx="685800" cy="274320"/>
+          </a:xfrm>
+          <a:prstGeom prst="rect">
+            <a:avLst/>
+          </a:prstGeom>
+          <a:noFill/>
+        </p:spPr>
+        <p:txBody>
+          <a:bodyPr wrap="square" anchor="t" lIns="54864" rIns="54864" tIns="0" bIns="0">
+            <a:spAutoFit/>
+          </a:bodyPr>
+          <a:lstStyle/>
+          <a:p>
             <a:pPr algn="r">
               <a:lnSpc>
-                <a:spcPct val="125000"/>
+                <a:spcPct val="130000"/>
               </a:lnSpc>
+              <a:defRPr sz="1000"/>
             </a:pPr>
             <a:r>
-              <a:rPr sz="1000" b="0">
+              <a:rPr sz="1000" b="0" u="none">
                 <a:solidFill>
                   <a:srgbClr val="8A94A6"/>
                 </a:solidFill>
